--- a/大貴/添付ファイル/救急搬送たらい回し問題_ビジネス評価資料.pptx
+++ b/大貴/添付ファイル/救急搬送たらい回し問題_ビジネス評価資料.pptx
@@ -21,9 +21,11 @@
     <p:sldId id="269" r:id="rId15"/>
     <p:sldId id="270" r:id="rId16"/>
     <p:sldId id="271" r:id="rId17"/>
+    <p:sldId id="272" r:id="rId18"/>
+    <p:sldId id="273" r:id="rId19"/>
   </p:sldIdLst>
   <p:notesMasterIdLst>
-    <p:notesMasterId r:id="rId18"/>
+    <p:notesMasterId r:id="rId20"/>
   </p:notesMasterIdLst>
   <p:sldSz cx="12191695" cy="6858000"/>
   <p:notesSz cx="6858000" cy="12191695"/>
@@ -1157,6 +1159,182 @@
             <a:fld id="{F7021451-1387-4CA6-816F-3879F97B5CBC}" type="slidenum">
               <a:rPr lang="en-US"/>
               <a:t>16</a:t>
+            </a:fld>
+            <a:endParaRPr lang="en-US"/>
+          </a:p>
+        </p:txBody>
+      </p:sp>
+    </p:spTree>
+    <p:extLst>
+      <p:ext uri="{BB962C8B-B14F-4D97-AF65-F5344CB8AC3E}">
+        <p14:creationId xmlns:p14="http://schemas.microsoft.com/office/powerpoint/2010/main" val="1024086991"/>
+      </p:ext>
+    </p:extLst>
+  </p:cSld>
+  <p:clrMapOvr>
+    <a:masterClrMapping/>
+  </p:clrMapOvr>
+</p:notes>
+</file>
+
+<file path=ppt/notesSlides/notesSlide17.xml><?xml version="1.0" encoding="utf-8"?>
+<p:notes xmlns:a="http://schemas.openxmlformats.org/drawingml/2006/main" xmlns:r="http://schemas.openxmlformats.org/officeDocument/2006/relationships" xmlns:p="http://schemas.openxmlformats.org/presentationml/2006/main">
+  <p:cSld>
+    <p:spTree>
+      <p:nvGrpSpPr>
+        <p:cNvPr id="1" name=""/>
+        <p:cNvGrpSpPr/>
+        <p:nvPr/>
+      </p:nvGrpSpPr>
+      <p:grpSpPr>
+        <a:xfrm>
+          <a:off x="0" y="0"/>
+          <a:ext cx="0" cy="0"/>
+          <a:chOff x="0" y="0"/>
+          <a:chExt cx="0" cy="0"/>
+        </a:xfrm>
+      </p:grpSpPr>
+      <p:sp>
+        <p:nvSpPr>
+          <p:cNvPr id="2" name="Slide Image Placeholder 1"/>
+          <p:cNvSpPr>
+            <a:spLocks noGrp="1" noRot="1" noChangeAspect="1"/>
+          </p:cNvSpPr>
+          <p:nvPr>
+            <p:ph type="sldImg"/>
+          </p:nvPr>
+        </p:nvSpPr>
+        <p:spPr/>
+      </p:sp>
+      <p:sp>
+        <p:nvSpPr>
+          <p:cNvPr id="3" name="Notes Placeholder 2"/>
+          <p:cNvSpPr>
+            <a:spLocks noGrp="1"/>
+          </p:cNvSpPr>
+          <p:nvPr>
+            <p:ph type="body" idx="1"/>
+          </p:nvPr>
+        </p:nvSpPr>
+        <p:spPr/>
+        <p:txBody>
+          <a:bodyPr/>
+          <a:lstStyle/>
+          <a:p>
+            <a:r>
+              <a:rPr lang="en-US" dirty="0"/>
+              <a:t/>
+            </a:r>
+            <a:endParaRPr lang="en-US" dirty="0"/>
+          </a:p>
+        </p:txBody>
+      </p:sp>
+      <p:sp>
+        <p:nvSpPr>
+          <p:cNvPr id="4" name="Slide Number Placeholder 3"/>
+          <p:cNvSpPr>
+            <a:spLocks noGrp="1"/>
+          </p:cNvSpPr>
+          <p:nvPr>
+            <p:ph type="sldNum" sz="quarter" idx="10"/>
+          </p:nvPr>
+        </p:nvSpPr>
+        <p:spPr/>
+        <p:txBody>
+          <a:bodyPr/>
+          <a:lstStyle/>
+          <a:p>
+            <a:fld id="{F7021451-1387-4CA6-816F-3879F97B5CBC}" type="slidenum">
+              <a:rPr lang="en-US"/>
+              <a:t>17</a:t>
+            </a:fld>
+            <a:endParaRPr lang="en-US"/>
+          </a:p>
+        </p:txBody>
+      </p:sp>
+    </p:spTree>
+    <p:extLst>
+      <p:ext uri="{BB962C8B-B14F-4D97-AF65-F5344CB8AC3E}">
+        <p14:creationId xmlns:p14="http://schemas.microsoft.com/office/powerpoint/2010/main" val="1024086991"/>
+      </p:ext>
+    </p:extLst>
+  </p:cSld>
+  <p:clrMapOvr>
+    <a:masterClrMapping/>
+  </p:clrMapOvr>
+</p:notes>
+</file>
+
+<file path=ppt/notesSlides/notesSlide18.xml><?xml version="1.0" encoding="utf-8"?>
+<p:notes xmlns:a="http://schemas.openxmlformats.org/drawingml/2006/main" xmlns:r="http://schemas.openxmlformats.org/officeDocument/2006/relationships" xmlns:p="http://schemas.openxmlformats.org/presentationml/2006/main">
+  <p:cSld>
+    <p:spTree>
+      <p:nvGrpSpPr>
+        <p:cNvPr id="1" name=""/>
+        <p:cNvGrpSpPr/>
+        <p:nvPr/>
+      </p:nvGrpSpPr>
+      <p:grpSpPr>
+        <a:xfrm>
+          <a:off x="0" y="0"/>
+          <a:ext cx="0" cy="0"/>
+          <a:chOff x="0" y="0"/>
+          <a:chExt cx="0" cy="0"/>
+        </a:xfrm>
+      </p:grpSpPr>
+      <p:sp>
+        <p:nvSpPr>
+          <p:cNvPr id="2" name="Slide Image Placeholder 1"/>
+          <p:cNvSpPr>
+            <a:spLocks noGrp="1" noRot="1" noChangeAspect="1"/>
+          </p:cNvSpPr>
+          <p:nvPr>
+            <p:ph type="sldImg"/>
+          </p:nvPr>
+        </p:nvSpPr>
+        <p:spPr/>
+      </p:sp>
+      <p:sp>
+        <p:nvSpPr>
+          <p:cNvPr id="3" name="Notes Placeholder 2"/>
+          <p:cNvSpPr>
+            <a:spLocks noGrp="1"/>
+          </p:cNvSpPr>
+          <p:nvPr>
+            <p:ph type="body" idx="1"/>
+          </p:nvPr>
+        </p:nvSpPr>
+        <p:spPr/>
+        <p:txBody>
+          <a:bodyPr/>
+          <a:lstStyle/>
+          <a:p>
+            <a:r>
+              <a:rPr lang="en-US" dirty="0"/>
+              <a:t/>
+            </a:r>
+            <a:endParaRPr lang="en-US" dirty="0"/>
+          </a:p>
+        </p:txBody>
+      </p:sp>
+      <p:sp>
+        <p:nvSpPr>
+          <p:cNvPr id="4" name="Slide Number Placeholder 3"/>
+          <p:cNvSpPr>
+            <a:spLocks noGrp="1"/>
+          </p:cNvSpPr>
+          <p:nvPr>
+            <p:ph type="sldNum" sz="quarter" idx="10"/>
+          </p:nvPr>
+        </p:nvSpPr>
+        <p:spPr/>
+        <p:txBody>
+          <a:bodyPr/>
+          <a:lstStyle/>
+          <a:p>
+            <a:fld id="{F7021451-1387-4CA6-816F-3879F97B5CBC}" type="slidenum">
+              <a:rPr lang="en-US"/>
+              <a:t>18</a:t>
             </a:fld>
             <a:endParaRPr lang="en-US"/>
           </a:p>
@@ -5416,7 +5594,7 @@
                 <a:ea typeface="Yu Gothic" pitchFamily="34" charset="-122"/>
                 <a:cs typeface="Yu Gothic" pitchFamily="34" charset="-120"/>
               </a:rPr>
-              <a:t>3C ②</a:t>
+              <a:t>アライアンス候補</a:t>
             </a:r>
             <a:endParaRPr lang="en-US" sz="1300" dirty="0"/>
           </a:p>
@@ -5455,7 +5633,7 @@
                 <a:ea typeface="Yu Gothic" pitchFamily="34" charset="-122"/>
                 <a:cs typeface="Yu Gothic" pitchFamily="34" charset="-120"/>
               </a:rPr>
-              <a:t>3C分析</a:t>
+              <a:t>TXP Medical以外の提携先候補</a:t>
             </a:r>
             <a:endParaRPr lang="en-US" sz="2800" dirty="0"/>
           </a:p>
@@ -5463,48 +5641,14 @@
       </p:sp>
       <p:sp>
         <p:nvSpPr>
-          <p:cNvPr id="4" name="Shape 2"/>
-          <p:cNvSpPr/>
-          <p:nvPr/>
-        </p:nvSpPr>
-        <p:spPr>
-          <a:xfrm>
-            <a:off x="548640" y="1691640"/>
-            <a:ext cx="3515258" cy="3931920"/>
-          </a:xfrm>
-          <a:prstGeom prst="roundRect">
-            <a:avLst>
-              <a:gd name="adj" fmla="val 2081"/>
-            </a:avLst>
-          </a:prstGeom>
-          <a:solidFill>
-            <a:srgbClr val="FFFFFF"/>
-          </a:solidFill>
-          <a:ln w="9525">
-            <a:solidFill>
-              <a:srgbClr val="D9D9D9"/>
-            </a:solidFill>
-            <a:prstDash val="solid"/>
-          </a:ln>
-          <a:effectLst>
-            <a:outerShdw sx="100000" sy="100000" kx="0" ky="0" algn="bl" rotWithShape="0" blurRad="76200" dist="25400" dir="5400000">
-              <a:srgbClr val="000000">
-                <a:alpha val="12000"/>
-              </a:srgbClr>
-            </a:outerShdw>
-          </a:effectLst>
-        </p:spPr>
-      </p:sp>
-      <p:sp>
-        <p:nvSpPr>
-          <p:cNvPr id="5" name="Text 3"/>
-          <p:cNvSpPr/>
-          <p:nvPr/>
-        </p:nvSpPr>
-        <p:spPr>
-          <a:xfrm>
-            <a:off x="777240" y="1874520"/>
-            <a:ext cx="3058058" cy="365760"/>
+          <p:cNvPr id="4" name="Text 2"/>
+          <p:cNvSpPr/>
+          <p:nvPr/>
+        </p:nvSpPr>
+        <p:spPr>
+          <a:xfrm>
+            <a:off x="548640" y="1554480"/>
+            <a:ext cx="11094415" cy="457200"/>
           </a:xfrm>
           <a:prstGeom prst="rect">
             <a:avLst/>
@@ -5520,46 +5664,7 @@
               <a:buNone/>
             </a:pPr>
             <a:r>
-              <a:rPr lang="en-US" sz="1700" b="1" dirty="0">
-                <a:solidFill>
-                  <a:srgbClr val="C00000"/>
-                </a:solidFill>
-                <a:latin typeface="Yu Gothic" pitchFamily="34" charset="0"/>
-                <a:ea typeface="Yu Gothic" pitchFamily="34" charset="-122"/>
-                <a:cs typeface="Yu Gothic" pitchFamily="34" charset="-120"/>
-              </a:rPr>
-              <a:t>Customer</a:t>
-            </a:r>
-            <a:endParaRPr lang="en-US" sz="1700" dirty="0"/>
-          </a:p>
-        </p:txBody>
-      </p:sp>
-      <p:sp>
-        <p:nvSpPr>
-          <p:cNvPr id="6" name="Text 4"/>
-          <p:cNvSpPr/>
-          <p:nvPr/>
-        </p:nvSpPr>
-        <p:spPr>
-          <a:xfrm>
-            <a:off x="777240" y="2240280"/>
-            <a:ext cx="3058058" cy="320040"/>
-          </a:xfrm>
-          <a:prstGeom prst="rect">
-            <a:avLst/>
-          </a:prstGeom>
-          <a:noFill/>
-          <a:ln/>
-        </p:spPr>
-        <p:txBody>
-          <a:bodyPr wrap="square" lIns="0" tIns="0" rIns="0" bIns="0" rtlCol="0" anchor="ctr"/>
-          <a:lstStyle/>
-          <a:p>
-            <a:pPr indent="0" marL="0">
-              <a:buNone/>
-            </a:pPr>
-            <a:r>
-              <a:rPr lang="en-US" sz="1200" dirty="0">
+              <a:rPr lang="en-US" sz="1300" i="1" dirty="0">
                 <a:solidFill>
                   <a:srgbClr val="595959"/>
                 </a:solidFill>
@@ -5567,494 +5672,1434 @@
                 <a:ea typeface="Yu Gothic" pitchFamily="34" charset="-122"/>
                 <a:cs typeface="Yu Gothic" pitchFamily="34" charset="-120"/>
               </a:rPr>
-              <a:t>顧客・市場</a:t>
-            </a:r>
-            <a:endParaRPr lang="en-US" sz="1200" dirty="0"/>
-          </a:p>
-        </p:txBody>
-      </p:sp>
-      <p:sp>
-        <p:nvSpPr>
-          <p:cNvPr id="7" name="Text 5"/>
-          <p:cNvSpPr/>
-          <p:nvPr/>
-        </p:nvSpPr>
-        <p:spPr>
-          <a:xfrm>
-            <a:off x="777240" y="2651760"/>
-            <a:ext cx="3058058" cy="2834640"/>
-          </a:xfrm>
-          <a:prstGeom prst="rect">
-            <a:avLst/>
-          </a:prstGeom>
-          <a:noFill/>
-          <a:ln/>
-        </p:spPr>
-        <p:txBody>
-          <a:bodyPr wrap="square" lIns="0" tIns="0" rIns="0" bIns="0" rtlCol="0" anchor="t"/>
-          <a:lstStyle/>
-          <a:p>
-            <a:pPr marL="342900" indent="-342900">
-              <a:spcAft>
-                <a:spcPts val="1000"/>
-              </a:spcAft>
-              <a:buSzPct val="100000"/>
-              <a:buChar char="•"/>
-            </a:pPr>
-            <a:r>
-              <a:rPr lang="en-US" sz="1250" dirty="0">
-                <a:solidFill>
-                  <a:srgbClr val="000000"/>
-                </a:solidFill>
-                <a:latin typeface="Yu Gothic" pitchFamily="34" charset="0"/>
-                <a:ea typeface="Yu Gothic" pitchFamily="34" charset="-122"/>
-                <a:cs typeface="Yu Gothic" pitchFamily="34" charset="-120"/>
-              </a:rPr>
-              <a:t>顧客（払う人）：消防本部／自治体／厚労省</a:t>
-            </a:r>
-            <a:endParaRPr lang="en-US" sz="1250" dirty="0"/>
-          </a:p>
-          <a:p>
-            <a:pPr marL="342900" indent="-342900">
-              <a:spcAft>
-                <a:spcPts val="1000"/>
-              </a:spcAft>
-              <a:buSzPct val="100000"/>
-              <a:buChar char="•"/>
-            </a:pPr>
-            <a:r>
-              <a:rPr lang="en-US" sz="1250" dirty="0">
-                <a:solidFill>
-                  <a:srgbClr val="000000"/>
-                </a:solidFill>
-                <a:latin typeface="Yu Gothic" pitchFamily="34" charset="0"/>
-                <a:ea typeface="Yu Gothic" pitchFamily="34" charset="-122"/>
-                <a:cs typeface="Yu Gothic" pitchFamily="34" charset="-120"/>
-              </a:rPr>
-              <a:t>ユーザー（困っている人）：患者</a:t>
-            </a:r>
-            <a:endParaRPr lang="en-US" sz="1250" dirty="0"/>
-          </a:p>
-          <a:p>
-            <a:pPr marL="342900" indent="-342900">
-              <a:spcAft>
-                <a:spcPts val="1000"/>
-              </a:spcAft>
-              <a:buSzPct val="100000"/>
-              <a:buChar char="•"/>
-            </a:pPr>
-            <a:r>
-              <a:rPr lang="en-US" sz="1250" dirty="0">
-                <a:solidFill>
-                  <a:srgbClr val="000000"/>
-                </a:solidFill>
-                <a:latin typeface="Yu Gothic" pitchFamily="34" charset="0"/>
-                <a:ea typeface="Yu Gothic" pitchFamily="34" charset="-122"/>
-                <a:cs typeface="Yu Gothic" pitchFamily="34" charset="-120"/>
-              </a:rPr>
-              <a:t>顧客とユーザーが分離した市場構造</a:t>
-            </a:r>
-            <a:endParaRPr lang="en-US" sz="1250" dirty="0"/>
-          </a:p>
-        </p:txBody>
-      </p:sp>
-      <p:sp>
-        <p:nvSpPr>
-          <p:cNvPr id="8" name="Shape 6"/>
-          <p:cNvSpPr/>
-          <p:nvPr/>
-        </p:nvSpPr>
-        <p:spPr>
-          <a:xfrm>
-            <a:off x="4338218" y="1691640"/>
-            <a:ext cx="3515258" cy="3931920"/>
-          </a:xfrm>
-          <a:prstGeom prst="roundRect">
-            <a:avLst>
-              <a:gd name="adj" fmla="val 2081"/>
-            </a:avLst>
-          </a:prstGeom>
-          <a:solidFill>
-            <a:srgbClr val="FFFFFF"/>
-          </a:solidFill>
-          <a:ln w="9525">
-            <a:solidFill>
-              <a:srgbClr val="D9D9D9"/>
-            </a:solidFill>
-            <a:prstDash val="solid"/>
-          </a:ln>
-          <a:effectLst>
-            <a:outerShdw sx="100000" sy="100000" kx="0" ky="0" algn="bl" rotWithShape="0" blurRad="76200" dist="25400" dir="5400000">
-              <a:srgbClr val="000000">
-                <a:alpha val="12000"/>
-              </a:srgbClr>
-            </a:outerShdw>
-          </a:effectLst>
-        </p:spPr>
-      </p:sp>
-      <p:sp>
-        <p:nvSpPr>
-          <p:cNvPr id="9" name="Text 7"/>
-          <p:cNvSpPr/>
-          <p:nvPr/>
-        </p:nvSpPr>
-        <p:spPr>
-          <a:xfrm>
-            <a:off x="4566818" y="1874520"/>
-            <a:ext cx="3058058" cy="365760"/>
-          </a:xfrm>
-          <a:prstGeom prst="rect">
-            <a:avLst/>
-          </a:prstGeom>
-          <a:noFill/>
-          <a:ln/>
-        </p:spPr>
-        <p:txBody>
-          <a:bodyPr wrap="square" lIns="0" tIns="0" rIns="0" bIns="0" rtlCol="0" anchor="ctr"/>
-          <a:lstStyle/>
-          <a:p>
-            <a:pPr indent="0" marL="0">
-              <a:buNone/>
-            </a:pPr>
-            <a:r>
-              <a:rPr lang="en-US" sz="1700" b="1" dirty="0">
-                <a:solidFill>
-                  <a:srgbClr val="C00000"/>
-                </a:solidFill>
-                <a:latin typeface="Yu Gothic" pitchFamily="34" charset="0"/>
-                <a:ea typeface="Yu Gothic" pitchFamily="34" charset="-122"/>
-                <a:cs typeface="Yu Gothic" pitchFamily="34" charset="-120"/>
-              </a:rPr>
-              <a:t>Competitor</a:t>
-            </a:r>
-            <a:endParaRPr lang="en-US" sz="1700" dirty="0"/>
-          </a:p>
-        </p:txBody>
-      </p:sp>
-      <p:sp>
-        <p:nvSpPr>
-          <p:cNvPr id="10" name="Text 8"/>
-          <p:cNvSpPr/>
-          <p:nvPr/>
-        </p:nvSpPr>
-        <p:spPr>
-          <a:xfrm>
-            <a:off x="4566818" y="2240280"/>
-            <a:ext cx="3058058" cy="320040"/>
-          </a:xfrm>
-          <a:prstGeom prst="rect">
-            <a:avLst/>
-          </a:prstGeom>
-          <a:noFill/>
-          <a:ln/>
-        </p:spPr>
-        <p:txBody>
-          <a:bodyPr wrap="square" lIns="0" tIns="0" rIns="0" bIns="0" rtlCol="0" anchor="ctr"/>
-          <a:lstStyle/>
-          <a:p>
-            <a:pPr indent="0" marL="0">
-              <a:buNone/>
-            </a:pPr>
-            <a:r>
-              <a:rPr lang="en-US" sz="1200" dirty="0">
-                <a:solidFill>
-                  <a:srgbClr val="595959"/>
-                </a:solidFill>
-                <a:latin typeface="Yu Gothic" pitchFamily="34" charset="0"/>
-                <a:ea typeface="Yu Gothic" pitchFamily="34" charset="-122"/>
-                <a:cs typeface="Yu Gothic" pitchFamily="34" charset="-120"/>
-              </a:rPr>
-              <a:t>競合</a:t>
-            </a:r>
-            <a:endParaRPr lang="en-US" sz="1200" dirty="0"/>
-          </a:p>
-        </p:txBody>
-      </p:sp>
-      <p:sp>
-        <p:nvSpPr>
-          <p:cNvPr id="11" name="Text 9"/>
-          <p:cNvSpPr/>
-          <p:nvPr/>
-        </p:nvSpPr>
-        <p:spPr>
-          <a:xfrm>
-            <a:off x="4566818" y="2651760"/>
-            <a:ext cx="3058058" cy="2834640"/>
-          </a:xfrm>
-          <a:prstGeom prst="rect">
-            <a:avLst/>
-          </a:prstGeom>
-          <a:noFill/>
-          <a:ln/>
-        </p:spPr>
-        <p:txBody>
-          <a:bodyPr wrap="square" lIns="0" tIns="0" rIns="0" bIns="0" rtlCol="0" anchor="t"/>
-          <a:lstStyle/>
-          <a:p>
-            <a:pPr marL="342900" indent="-342900">
-              <a:spcAft>
-                <a:spcPts val="1000"/>
-              </a:spcAft>
-              <a:buSzPct val="100000"/>
-              <a:buChar char="•"/>
-            </a:pPr>
-            <a:r>
-              <a:rPr lang="en-US" sz="1250" dirty="0">
-                <a:solidFill>
-                  <a:srgbClr val="000000"/>
-                </a:solidFill>
-                <a:latin typeface="Yu Gothic" pitchFamily="34" charset="0"/>
-                <a:ea typeface="Yu Gothic" pitchFamily="34" charset="-122"/>
-                <a:cs typeface="Yu Gothic" pitchFamily="34" charset="-120"/>
-              </a:rPr>
-              <a:t>TXP Medical（NSER mobile）：資金力24.6億円、51自治体で実績</a:t>
-            </a:r>
-            <a:endParaRPr lang="en-US" sz="1250" dirty="0"/>
-          </a:p>
-          <a:p>
-            <a:pPr marL="342900" indent="-342900">
-              <a:spcAft>
-                <a:spcPts val="1000"/>
-              </a:spcAft>
-              <a:buSzPct val="100000"/>
-              <a:buChar char="•"/>
-            </a:pPr>
-            <a:r>
-              <a:rPr lang="en-US" sz="1250" dirty="0">
-                <a:solidFill>
-                  <a:srgbClr val="000000"/>
-                </a:solidFill>
-                <a:latin typeface="Yu Gothic" pitchFamily="34" charset="0"/>
-                <a:ea typeface="Yu Gothic" pitchFamily="34" charset="-122"/>
-                <a:cs typeface="Yu Gothic" pitchFamily="34" charset="-120"/>
-              </a:rPr>
-              <a:t>Smart119・消防庁直轄AI実証</a:t>
-            </a:r>
-            <a:endParaRPr lang="en-US" sz="1250" dirty="0"/>
-          </a:p>
-          <a:p>
-            <a:pPr marL="342900" indent="-342900">
-              <a:spcAft>
-                <a:spcPts val="1000"/>
-              </a:spcAft>
-              <a:buSzPct val="100000"/>
-              <a:buChar char="•"/>
-            </a:pPr>
-            <a:r>
-              <a:rPr lang="en-US" sz="1250" dirty="0">
-                <a:solidFill>
-                  <a:srgbClr val="000000"/>
-                </a:solidFill>
-                <a:latin typeface="Yu Gothic" pitchFamily="34" charset="0"/>
-                <a:ea typeface="Yu Gothic" pitchFamily="34" charset="-122"/>
-                <a:cs typeface="Yu Gothic" pitchFamily="34" charset="-120"/>
-              </a:rPr>
-              <a:t>情報共有レイヤーは競合が先行</a:t>
-            </a:r>
-            <a:endParaRPr lang="en-US" sz="1250" dirty="0"/>
-          </a:p>
-        </p:txBody>
-      </p:sp>
-      <p:sp>
-        <p:nvSpPr>
-          <p:cNvPr id="12" name="Shape 10"/>
-          <p:cNvSpPr/>
-          <p:nvPr/>
-        </p:nvSpPr>
-        <p:spPr>
-          <a:xfrm>
-            <a:off x="8127797" y="1691640"/>
-            <a:ext cx="3515258" cy="3931920"/>
-          </a:xfrm>
-          <a:prstGeom prst="roundRect">
-            <a:avLst>
-              <a:gd name="adj" fmla="val 2081"/>
-            </a:avLst>
-          </a:prstGeom>
-          <a:solidFill>
-            <a:srgbClr val="F2F2F2"/>
-          </a:solidFill>
-          <a:ln w="9525">
-            <a:solidFill>
-              <a:srgbClr val="D9D9D9"/>
-            </a:solidFill>
-            <a:prstDash val="solid"/>
-          </a:ln>
-          <a:effectLst>
-            <a:outerShdw sx="100000" sy="100000" kx="0" ky="0" algn="bl" rotWithShape="0" blurRad="76200" dist="25400" dir="5400000">
-              <a:srgbClr val="000000">
-                <a:alpha val="12000"/>
-              </a:srgbClr>
-            </a:outerShdw>
-          </a:effectLst>
-        </p:spPr>
-      </p:sp>
-      <p:sp>
-        <p:nvSpPr>
-          <p:cNvPr id="13" name="Text 11"/>
-          <p:cNvSpPr/>
-          <p:nvPr/>
-        </p:nvSpPr>
-        <p:spPr>
-          <a:xfrm>
-            <a:off x="8356397" y="1874520"/>
-            <a:ext cx="3058058" cy="365760"/>
-          </a:xfrm>
-          <a:prstGeom prst="rect">
-            <a:avLst/>
-          </a:prstGeom>
-          <a:noFill/>
-          <a:ln/>
-        </p:spPr>
-        <p:txBody>
-          <a:bodyPr wrap="square" lIns="0" tIns="0" rIns="0" bIns="0" rtlCol="0" anchor="ctr"/>
-          <a:lstStyle/>
-          <a:p>
-            <a:pPr indent="0" marL="0">
-              <a:buNone/>
-            </a:pPr>
-            <a:r>
-              <a:rPr lang="en-US" sz="1700" b="1" dirty="0">
-                <a:solidFill>
-                  <a:srgbClr val="C00000"/>
-                </a:solidFill>
-                <a:latin typeface="Yu Gothic" pitchFamily="34" charset="0"/>
-                <a:ea typeface="Yu Gothic" pitchFamily="34" charset="-122"/>
-                <a:cs typeface="Yu Gothic" pitchFamily="34" charset="-120"/>
-              </a:rPr>
-              <a:t>Company</a:t>
-            </a:r>
-            <a:endParaRPr lang="en-US" sz="1700" dirty="0"/>
-          </a:p>
-        </p:txBody>
-      </p:sp>
-      <p:sp>
-        <p:nvSpPr>
-          <p:cNvPr id="14" name="Text 12"/>
-          <p:cNvSpPr/>
-          <p:nvPr/>
-        </p:nvSpPr>
-        <p:spPr>
-          <a:xfrm>
-            <a:off x="8356397" y="2240280"/>
-            <a:ext cx="3058058" cy="320040"/>
-          </a:xfrm>
-          <a:prstGeom prst="rect">
-            <a:avLst/>
-          </a:prstGeom>
-          <a:noFill/>
-          <a:ln/>
-        </p:spPr>
-        <p:txBody>
-          <a:bodyPr wrap="square" lIns="0" tIns="0" rIns="0" bIns="0" rtlCol="0" anchor="ctr"/>
-          <a:lstStyle/>
-          <a:p>
-            <a:pPr indent="0" marL="0">
-              <a:buNone/>
-            </a:pPr>
-            <a:r>
-              <a:rPr lang="en-US" sz="1200" dirty="0">
-                <a:solidFill>
-                  <a:srgbClr val="595959"/>
-                </a:solidFill>
-                <a:latin typeface="Yu Gothic" pitchFamily="34" charset="0"/>
-                <a:ea typeface="Yu Gothic" pitchFamily="34" charset="-122"/>
-                <a:cs typeface="Yu Gothic" pitchFamily="34" charset="-120"/>
-              </a:rPr>
-              <a:t>自社</a:t>
-            </a:r>
-            <a:endParaRPr lang="en-US" sz="1200" dirty="0"/>
-          </a:p>
-        </p:txBody>
-      </p:sp>
-      <p:sp>
-        <p:nvSpPr>
-          <p:cNvPr id="15" name="Text 13"/>
-          <p:cNvSpPr/>
-          <p:nvPr/>
-        </p:nvSpPr>
-        <p:spPr>
-          <a:xfrm>
-            <a:off x="8356397" y="2651760"/>
-            <a:ext cx="3058058" cy="2834640"/>
-          </a:xfrm>
-          <a:prstGeom prst="rect">
-            <a:avLst/>
-          </a:prstGeom>
-          <a:noFill/>
-          <a:ln/>
-        </p:spPr>
-        <p:txBody>
-          <a:bodyPr wrap="square" lIns="0" tIns="0" rIns="0" bIns="0" rtlCol="0" anchor="t"/>
-          <a:lstStyle/>
-          <a:p>
-            <a:pPr marL="342900" indent="-342900">
-              <a:spcAft>
-                <a:spcPts val="1000"/>
-              </a:spcAft>
-              <a:buSzPct val="100000"/>
-              <a:buChar char="•"/>
-            </a:pPr>
-            <a:r>
-              <a:rPr lang="en-US" sz="1250" dirty="0">
-                <a:solidFill>
-                  <a:srgbClr val="000000"/>
-                </a:solidFill>
-                <a:latin typeface="Yu Gothic" pitchFamily="34" charset="0"/>
-                <a:ea typeface="Yu Gothic" pitchFamily="34" charset="-122"/>
-                <a:cs typeface="Yu Gothic" pitchFamily="34" charset="-120"/>
-              </a:rPr>
-              <a:t>全国規模の通信網と5G</a:t>
-            </a:r>
-            <a:endParaRPr lang="en-US" sz="1250" dirty="0"/>
-          </a:p>
-          <a:p>
-            <a:pPr marL="342900" indent="-342900">
-              <a:spcAft>
-                <a:spcPts val="1000"/>
-              </a:spcAft>
-              <a:buSzPct val="100000"/>
-              <a:buChar char="•"/>
-            </a:pPr>
-            <a:r>
-              <a:rPr lang="en-US" sz="1250" dirty="0">
-                <a:solidFill>
-                  <a:srgbClr val="000000"/>
-                </a:solidFill>
-                <a:latin typeface="Yu Gothic" pitchFamily="34" charset="0"/>
-                <a:ea typeface="Yu Gothic" pitchFamily="34" charset="-122"/>
-                <a:cs typeface="Yu Gothic" pitchFamily="34" charset="-120"/>
-              </a:rPr>
-              <a:t>モバイル空間統計・LAM技術</a:t>
-            </a:r>
-            <a:endParaRPr lang="en-US" sz="1250" dirty="0"/>
-          </a:p>
-          <a:p>
-            <a:pPr marL="342900" indent="-342900">
-              <a:spcAft>
-                <a:spcPts val="1000"/>
-              </a:spcAft>
-              <a:buSzPct val="100000"/>
-              <a:buChar char="•"/>
-            </a:pPr>
-            <a:r>
-              <a:rPr lang="en-US" sz="1250" dirty="0">
-                <a:solidFill>
-                  <a:srgbClr val="000000"/>
-                </a:solidFill>
-                <a:latin typeface="Yu Gothic" pitchFamily="34" charset="0"/>
-                <a:ea typeface="Yu Gothic" pitchFamily="34" charset="-122"/>
-                <a:cs typeface="Yu Gothic" pitchFamily="34" charset="-120"/>
-              </a:rPr>
-              <a:t>NTT Com×TXP Medicalの資本関係という土台</a:t>
-            </a:r>
-            <a:endParaRPr lang="en-US" sz="1250" dirty="0"/>
-          </a:p>
-        </p:txBody>
-      </p:sp>
-      <p:sp>
-        <p:nvSpPr>
-          <p:cNvPr id="16" name="Text 14"/>
+              <a:t>TXP Medicalは「現場アプリ」という新しい接点から攻めるチャレンジャー型。以下は、消防本部・病院が既に持つ調達プロセスの内側から攻める王道型の候補</a:t>
+            </a:r>
+            <a:endParaRPr lang="en-US" sz="1300" dirty="0"/>
+          </a:p>
+        </p:txBody>
+      </p:sp>
+      <p:graphicFrame>
+        <p:nvGraphicFramePr>
+          <p:cNvPr id="14" name="Table 0"/>
+          <p:cNvGraphicFramePr>
+            <a:graphicFrameLocks noGrp="1"/>
+          </p:cNvGraphicFramePr>
+          <p:nvPr>
+            <p:extLst>
+              <p:ext uri="{D42A27DB-BD31-4B8C-83A1-F6EECF244321}">
+                <p14:modId xmlns:p14="http://schemas.microsoft.com/office/powerpoint/2010/main" val="1579011935"/>
+              </p:ext>
+            </p:extLst>
+          </p:nvPr>
+        </p:nvGraphicFramePr>
+        <p:xfrm>
+          <a:off x="548640" y="2103120"/>
+          <a:ext cx="11094415" cy="914400"/>
+        </p:xfrm>
+        <a:graphic>
+          <a:graphicData uri="http://schemas.openxmlformats.org/drawingml/2006/table">
+            <a:tbl>
+              <a:tblPr/>
+              <a:tblGrid>
+                <a:gridCol w="1737360"/>
+                <a:gridCol w="4480560"/>
+                <a:gridCol w="4389120"/>
+              </a:tblGrid>
+              <a:tr h="658368">
+                <a:tc>
+                  <a:txBody>
+                    <a:bodyPr/>
+                    <a:lstStyle/>
+                    <a:p>
+                      <a:pPr indent="0" marL="0">
+                        <a:buNone/>
+                      </a:pPr>
+                      <a:r>
+                        <a:rPr lang="en-US" sz="1250" b="1" dirty="0">
+                          <a:solidFill>
+                            <a:srgbClr val="FFFFFF"/>
+                          </a:solidFill>
+                          <a:latin typeface="Yu Gothic" pitchFamily="34" charset="0"/>
+                          <a:ea typeface="Yu Gothic" pitchFamily="34" charset="-122"/>
+                          <a:cs typeface="Yu Gothic" pitchFamily="34" charset="-120"/>
+                        </a:rPr>
+                        <a:t>カテゴリ</a:t>
+                      </a:r>
+                      <a:endParaRPr lang="en-US" sz="1250" dirty="0">
+                        <a:latin typeface="Yu Gothic" charset="0"/>
+                        <a:ea typeface="Yu Gothic" charset="0"/>
+                        <a:cs typeface="Yu Gothic" charset="0"/>
+                      </a:endParaRPr>
+                    </a:p>
+                  </a:txBody>
+                  <a:tcPr marL="91440" marR="91440" marT="45720" marB="45720">
+                    <a:lnL w="9525" cap="flat" cmpd="sng" algn="ctr">
+                      <a:solidFill>
+                        <a:srgbClr val="D9D9D9"/>
+                      </a:solidFill>
+                      <a:prstDash val="solid"/>
+                      <a:round/>
+                      <a:headEnd type="none" w="med" len="med"/>
+                      <a:tailEnd type="none" w="med" len="med"/>
+                    </a:lnL>
+                    <a:lnR w="9525" cap="flat" cmpd="sng" algn="ctr">
+                      <a:solidFill>
+                        <a:srgbClr val="D9D9D9"/>
+                      </a:solidFill>
+                      <a:prstDash val="solid"/>
+                      <a:round/>
+                      <a:headEnd type="none" w="med" len="med"/>
+                      <a:tailEnd type="none" w="med" len="med"/>
+                    </a:lnR>
+                    <a:lnT w="9525" cap="flat" cmpd="sng" algn="ctr">
+                      <a:solidFill>
+                        <a:srgbClr val="D9D9D9"/>
+                      </a:solidFill>
+                      <a:prstDash val="solid"/>
+                      <a:round/>
+                      <a:headEnd type="none" w="med" len="med"/>
+                      <a:tailEnd type="none" w="med" len="med"/>
+                    </a:lnT>
+                    <a:lnB w="9525" cap="flat" cmpd="sng" algn="ctr">
+                      <a:solidFill>
+                        <a:srgbClr val="D9D9D9"/>
+                      </a:solidFill>
+                      <a:prstDash val="solid"/>
+                      <a:round/>
+                      <a:headEnd type="none" w="med" len="med"/>
+                      <a:tailEnd type="none" w="med" len="med"/>
+                    </a:lnB>
+                    <a:solidFill>
+                      <a:srgbClr val="000000"/>
+                    </a:solidFill>
+                  </a:tcPr>
+                </a:tc>
+                <a:tc>
+                  <a:txBody>
+                    <a:bodyPr/>
+                    <a:lstStyle/>
+                    <a:p>
+                      <a:pPr indent="0" marL="0">
+                        <a:buNone/>
+                      </a:pPr>
+                      <a:r>
+                        <a:rPr lang="en-US" sz="1250" b="1" dirty="0">
+                          <a:solidFill>
+                            <a:srgbClr val="FFFFFF"/>
+                          </a:solidFill>
+                          <a:latin typeface="Yu Gothic" pitchFamily="34" charset="0"/>
+                          <a:ea typeface="Yu Gothic" pitchFamily="34" charset="-122"/>
+                          <a:cs typeface="Yu Gothic" pitchFamily="34" charset="-120"/>
+                        </a:rPr>
+                        <a:t>候補</a:t>
+                      </a:r>
+                      <a:endParaRPr lang="en-US" sz="1250" dirty="0">
+                        <a:latin typeface="Yu Gothic" charset="0"/>
+                        <a:ea typeface="Yu Gothic" charset="0"/>
+                        <a:cs typeface="Yu Gothic" charset="0"/>
+                      </a:endParaRPr>
+                    </a:p>
+                  </a:txBody>
+                  <a:tcPr marL="91440" marR="91440" marT="45720" marB="45720">
+                    <a:lnL w="9525" cap="flat" cmpd="sng" algn="ctr">
+                      <a:solidFill>
+                        <a:srgbClr val="D9D9D9"/>
+                      </a:solidFill>
+                      <a:prstDash val="solid"/>
+                      <a:round/>
+                      <a:headEnd type="none" w="med" len="med"/>
+                      <a:tailEnd type="none" w="med" len="med"/>
+                    </a:lnL>
+                    <a:lnR w="9525" cap="flat" cmpd="sng" algn="ctr">
+                      <a:solidFill>
+                        <a:srgbClr val="D9D9D9"/>
+                      </a:solidFill>
+                      <a:prstDash val="solid"/>
+                      <a:round/>
+                      <a:headEnd type="none" w="med" len="med"/>
+                      <a:tailEnd type="none" w="med" len="med"/>
+                    </a:lnR>
+                    <a:lnT w="9525" cap="flat" cmpd="sng" algn="ctr">
+                      <a:solidFill>
+                        <a:srgbClr val="D9D9D9"/>
+                      </a:solidFill>
+                      <a:prstDash val="solid"/>
+                      <a:round/>
+                      <a:headEnd type="none" w="med" len="med"/>
+                      <a:tailEnd type="none" w="med" len="med"/>
+                    </a:lnT>
+                    <a:lnB w="9525" cap="flat" cmpd="sng" algn="ctr">
+                      <a:solidFill>
+                        <a:srgbClr val="D9D9D9"/>
+                      </a:solidFill>
+                      <a:prstDash val="solid"/>
+                      <a:round/>
+                      <a:headEnd type="none" w="med" len="med"/>
+                      <a:tailEnd type="none" w="med" len="med"/>
+                    </a:lnB>
+                    <a:solidFill>
+                      <a:srgbClr val="000000"/>
+                    </a:solidFill>
+                  </a:tcPr>
+                </a:tc>
+                <a:tc>
+                  <a:txBody>
+                    <a:bodyPr/>
+                    <a:lstStyle/>
+                    <a:p>
+                      <a:pPr indent="0" marL="0">
+                        <a:buNone/>
+                      </a:pPr>
+                      <a:r>
+                        <a:rPr lang="en-US" sz="1250" b="1" dirty="0">
+                          <a:solidFill>
+                            <a:srgbClr val="FFFFFF"/>
+                          </a:solidFill>
+                          <a:latin typeface="Yu Gothic" pitchFamily="34" charset="0"/>
+                          <a:ea typeface="Yu Gothic" pitchFamily="34" charset="-122"/>
+                          <a:cs typeface="Yu Gothic" pitchFamily="34" charset="-120"/>
+                        </a:rPr>
+                        <a:t>狙い</a:t>
+                      </a:r>
+                      <a:endParaRPr lang="en-US" sz="1250" dirty="0">
+                        <a:latin typeface="Yu Gothic" charset="0"/>
+                        <a:ea typeface="Yu Gothic" charset="0"/>
+                        <a:cs typeface="Yu Gothic" charset="0"/>
+                      </a:endParaRPr>
+                    </a:p>
+                  </a:txBody>
+                  <a:tcPr marL="91440" marR="91440" marT="45720" marB="45720">
+                    <a:lnL w="9525" cap="flat" cmpd="sng" algn="ctr">
+                      <a:solidFill>
+                        <a:srgbClr val="D9D9D9"/>
+                      </a:solidFill>
+                      <a:prstDash val="solid"/>
+                      <a:round/>
+                      <a:headEnd type="none" w="med" len="med"/>
+                      <a:tailEnd type="none" w="med" len="med"/>
+                    </a:lnL>
+                    <a:lnR w="9525" cap="flat" cmpd="sng" algn="ctr">
+                      <a:solidFill>
+                        <a:srgbClr val="D9D9D9"/>
+                      </a:solidFill>
+                      <a:prstDash val="solid"/>
+                      <a:round/>
+                      <a:headEnd type="none" w="med" len="med"/>
+                      <a:tailEnd type="none" w="med" len="med"/>
+                    </a:lnR>
+                    <a:lnT w="9525" cap="flat" cmpd="sng" algn="ctr">
+                      <a:solidFill>
+                        <a:srgbClr val="D9D9D9"/>
+                      </a:solidFill>
+                      <a:prstDash val="solid"/>
+                      <a:round/>
+                      <a:headEnd type="none" w="med" len="med"/>
+                      <a:tailEnd type="none" w="med" len="med"/>
+                    </a:lnT>
+                    <a:lnB w="9525" cap="flat" cmpd="sng" algn="ctr">
+                      <a:solidFill>
+                        <a:srgbClr val="D9D9D9"/>
+                      </a:solidFill>
+                      <a:prstDash val="solid"/>
+                      <a:round/>
+                      <a:headEnd type="none" w="med" len="med"/>
+                      <a:tailEnd type="none" w="med" len="med"/>
+                    </a:lnB>
+                    <a:solidFill>
+                      <a:srgbClr val="000000"/>
+                    </a:solidFill>
+                  </a:tcPr>
+                </a:tc>
+              </a:tr>
+              <a:tr h="658368">
+                <a:tc>
+                  <a:txBody>
+                    <a:bodyPr/>
+                    <a:lstStyle/>
+                    <a:p>
+                      <a:pPr indent="0" marL="0">
+                        <a:buNone/>
+                      </a:pPr>
+                      <a:r>
+                        <a:rPr lang="en-US" sz="1150" b="1" dirty="0">
+                          <a:solidFill>
+                            <a:srgbClr val="000000"/>
+                          </a:solidFill>
+                          <a:latin typeface="Yu Gothic" pitchFamily="34" charset="0"/>
+                          <a:ea typeface="Yu Gothic" pitchFamily="34" charset="-122"/>
+                          <a:cs typeface="Yu Gothic" pitchFamily="34" charset="-120"/>
+                        </a:rPr>
+                        <a:t>指令システム</a:t>
+                      </a:r>
+                      <a:endParaRPr lang="en-US" sz="1150" dirty="0">
+                        <a:latin typeface="Yu Gothic" charset="0"/>
+                        <a:ea typeface="Yu Gothic" charset="0"/>
+                        <a:cs typeface="Yu Gothic" charset="0"/>
+                      </a:endParaRPr>
+                    </a:p>
+                  </a:txBody>
+                  <a:tcPr marL="91440" marR="91440" marT="45720" marB="45720" anchor="ctr">
+                    <a:lnL w="9525" cap="flat" cmpd="sng" algn="ctr">
+                      <a:solidFill>
+                        <a:srgbClr val="D9D9D9"/>
+                      </a:solidFill>
+                      <a:prstDash val="solid"/>
+                      <a:round/>
+                      <a:headEnd type="none" w="med" len="med"/>
+                      <a:tailEnd type="none" w="med" len="med"/>
+                    </a:lnL>
+                    <a:lnR w="9525" cap="flat" cmpd="sng" algn="ctr">
+                      <a:solidFill>
+                        <a:srgbClr val="D9D9D9"/>
+                      </a:solidFill>
+                      <a:prstDash val="solid"/>
+                      <a:round/>
+                      <a:headEnd type="none" w="med" len="med"/>
+                      <a:tailEnd type="none" w="med" len="med"/>
+                    </a:lnR>
+                    <a:lnT w="9525" cap="flat" cmpd="sng" algn="ctr">
+                      <a:solidFill>
+                        <a:srgbClr val="D9D9D9"/>
+                      </a:solidFill>
+                      <a:prstDash val="solid"/>
+                      <a:round/>
+                      <a:headEnd type="none" w="med" len="med"/>
+                      <a:tailEnd type="none" w="med" len="med"/>
+                    </a:lnT>
+                    <a:lnB w="9525" cap="flat" cmpd="sng" algn="ctr">
+                      <a:solidFill>
+                        <a:srgbClr val="D9D9D9"/>
+                      </a:solidFill>
+                      <a:prstDash val="solid"/>
+                      <a:round/>
+                      <a:headEnd type="none" w="med" len="med"/>
+                      <a:tailEnd type="none" w="med" len="med"/>
+                    </a:lnB>
+                  </a:tcPr>
+                </a:tc>
+                <a:tc>
+                  <a:txBody>
+                    <a:bodyPr/>
+                    <a:lstStyle/>
+                    <a:p>
+                      <a:pPr indent="0" marL="0">
+                        <a:buNone/>
+                      </a:pPr>
+                      <a:r>
+                        <a:rPr lang="en-US" sz="1050" dirty="0">
+                          <a:solidFill>
+                            <a:srgbClr val="000000"/>
+                          </a:solidFill>
+                          <a:latin typeface="Yu Gothic" pitchFamily="34" charset="0"/>
+                          <a:ea typeface="Yu Gothic" pitchFamily="34" charset="-122"/>
+                          <a:cs typeface="Yu Gothic" pitchFamily="34" charset="-120"/>
+                        </a:rPr>
+                        <a:t>日立・NEC</a:t>
+                      </a:r>
+                      <a:endParaRPr lang="en-US" sz="1050" dirty="0">
+                        <a:latin typeface="Yu Gothic" charset="0"/>
+                        <a:ea typeface="Yu Gothic" charset="0"/>
+                        <a:cs typeface="Yu Gothic" charset="0"/>
+                      </a:endParaRPr>
+                    </a:p>
+                  </a:txBody>
+                  <a:tcPr marL="91440" marR="91440" marT="45720" marB="45720" anchor="ctr">
+                    <a:lnL w="9525" cap="flat" cmpd="sng" algn="ctr">
+                      <a:solidFill>
+                        <a:srgbClr val="D9D9D9"/>
+                      </a:solidFill>
+                      <a:prstDash val="solid"/>
+                      <a:round/>
+                      <a:headEnd type="none" w="med" len="med"/>
+                      <a:tailEnd type="none" w="med" len="med"/>
+                    </a:lnL>
+                    <a:lnR w="9525" cap="flat" cmpd="sng" algn="ctr">
+                      <a:solidFill>
+                        <a:srgbClr val="D9D9D9"/>
+                      </a:solidFill>
+                      <a:prstDash val="solid"/>
+                      <a:round/>
+                      <a:headEnd type="none" w="med" len="med"/>
+                      <a:tailEnd type="none" w="med" len="med"/>
+                    </a:lnR>
+                    <a:lnT w="9525" cap="flat" cmpd="sng" algn="ctr">
+                      <a:solidFill>
+                        <a:srgbClr val="D9D9D9"/>
+                      </a:solidFill>
+                      <a:prstDash val="solid"/>
+                      <a:round/>
+                      <a:headEnd type="none" w="med" len="med"/>
+                      <a:tailEnd type="none" w="med" len="med"/>
+                    </a:lnT>
+                    <a:lnB w="9525" cap="flat" cmpd="sng" algn="ctr">
+                      <a:solidFill>
+                        <a:srgbClr val="D9D9D9"/>
+                      </a:solidFill>
+                      <a:prstDash val="solid"/>
+                      <a:round/>
+                      <a:headEnd type="none" w="med" len="med"/>
+                      <a:tailEnd type="none" w="med" len="med"/>
+                    </a:lnB>
+                  </a:tcPr>
+                </a:tc>
+                <a:tc>
+                  <a:txBody>
+                    <a:bodyPr/>
+                    <a:lstStyle/>
+                    <a:p>
+                      <a:pPr indent="0" marL="0">
+                        <a:buNone/>
+                      </a:pPr>
+                      <a:r>
+                        <a:rPr lang="en-US" sz="1050" dirty="0">
+                          <a:solidFill>
+                            <a:srgbClr val="C00000"/>
+                          </a:solidFill>
+                          <a:latin typeface="Yu Gothic" pitchFamily="34" charset="0"/>
+                          <a:ea typeface="Yu Gothic" pitchFamily="34" charset="-122"/>
+                          <a:cs typeface="Yu Gothic" pitchFamily="34" charset="-120"/>
+                        </a:rPr>
+                        <a:t>消防本部の指令台に、搬送先選定AIを標準アドオンとして組み込む</a:t>
+                      </a:r>
+                      <a:endParaRPr lang="en-US" sz="1050" dirty="0">
+                        <a:latin typeface="Yu Gothic" charset="0"/>
+                        <a:ea typeface="Yu Gothic" charset="0"/>
+                        <a:cs typeface="Yu Gothic" charset="0"/>
+                      </a:endParaRPr>
+                    </a:p>
+                  </a:txBody>
+                  <a:tcPr marL="91440" marR="91440" marT="45720" marB="45720" anchor="ctr">
+                    <a:lnL w="9525" cap="flat" cmpd="sng" algn="ctr">
+                      <a:solidFill>
+                        <a:srgbClr val="D9D9D9"/>
+                      </a:solidFill>
+                      <a:prstDash val="solid"/>
+                      <a:round/>
+                      <a:headEnd type="none" w="med" len="med"/>
+                      <a:tailEnd type="none" w="med" len="med"/>
+                    </a:lnL>
+                    <a:lnR w="9525" cap="flat" cmpd="sng" algn="ctr">
+                      <a:solidFill>
+                        <a:srgbClr val="D9D9D9"/>
+                      </a:solidFill>
+                      <a:prstDash val="solid"/>
+                      <a:round/>
+                      <a:headEnd type="none" w="med" len="med"/>
+                      <a:tailEnd type="none" w="med" len="med"/>
+                    </a:lnR>
+                    <a:lnT w="9525" cap="flat" cmpd="sng" algn="ctr">
+                      <a:solidFill>
+                        <a:srgbClr val="D9D9D9"/>
+                      </a:solidFill>
+                      <a:prstDash val="solid"/>
+                      <a:round/>
+                      <a:headEnd type="none" w="med" len="med"/>
+                      <a:tailEnd type="none" w="med" len="med"/>
+                    </a:lnT>
+                    <a:lnB w="9525" cap="flat" cmpd="sng" algn="ctr">
+                      <a:solidFill>
+                        <a:srgbClr val="D9D9D9"/>
+                      </a:solidFill>
+                      <a:prstDash val="solid"/>
+                      <a:round/>
+                      <a:headEnd type="none" w="med" len="med"/>
+                      <a:tailEnd type="none" w="med" len="med"/>
+                    </a:lnB>
+                  </a:tcPr>
+                </a:tc>
+              </a:tr>
+              <a:tr h="658368">
+                <a:tc>
+                  <a:txBody>
+                    <a:bodyPr/>
+                    <a:lstStyle/>
+                    <a:p>
+                      <a:pPr indent="0" marL="0">
+                        <a:buNone/>
+                      </a:pPr>
+                      <a:r>
+                        <a:rPr lang="en-US" sz="1150" b="1" dirty="0">
+                          <a:solidFill>
+                            <a:srgbClr val="000000"/>
+                          </a:solidFill>
+                          <a:latin typeface="Yu Gothic" pitchFamily="34" charset="0"/>
+                          <a:ea typeface="Yu Gothic" pitchFamily="34" charset="-122"/>
+                          <a:cs typeface="Yu Gothic" pitchFamily="34" charset="-120"/>
+                        </a:rPr>
+                        <a:t>車両艤装</a:t>
+                      </a:r>
+                      <a:endParaRPr lang="en-US" sz="1150" dirty="0">
+                        <a:latin typeface="Yu Gothic" charset="0"/>
+                        <a:ea typeface="Yu Gothic" charset="0"/>
+                        <a:cs typeface="Yu Gothic" charset="0"/>
+                      </a:endParaRPr>
+                    </a:p>
+                  </a:txBody>
+                  <a:tcPr marL="91440" marR="91440" marT="45720" marB="45720" anchor="ctr">
+                    <a:lnL w="9525" cap="flat" cmpd="sng" algn="ctr">
+                      <a:solidFill>
+                        <a:srgbClr val="D9D9D9"/>
+                      </a:solidFill>
+                      <a:prstDash val="solid"/>
+                      <a:round/>
+                      <a:headEnd type="none" w="med" len="med"/>
+                      <a:tailEnd type="none" w="med" len="med"/>
+                    </a:lnL>
+                    <a:lnR w="9525" cap="flat" cmpd="sng" algn="ctr">
+                      <a:solidFill>
+                        <a:srgbClr val="D9D9D9"/>
+                      </a:solidFill>
+                      <a:prstDash val="solid"/>
+                      <a:round/>
+                      <a:headEnd type="none" w="med" len="med"/>
+                      <a:tailEnd type="none" w="med" len="med"/>
+                    </a:lnR>
+                    <a:lnT w="9525" cap="flat" cmpd="sng" algn="ctr">
+                      <a:solidFill>
+                        <a:srgbClr val="D9D9D9"/>
+                      </a:solidFill>
+                      <a:prstDash val="solid"/>
+                      <a:round/>
+                      <a:headEnd type="none" w="med" len="med"/>
+                      <a:tailEnd type="none" w="med" len="med"/>
+                    </a:lnT>
+                    <a:lnB w="9525" cap="flat" cmpd="sng" algn="ctr">
+                      <a:solidFill>
+                        <a:srgbClr val="D9D9D9"/>
+                      </a:solidFill>
+                      <a:prstDash val="solid"/>
+                      <a:round/>
+                      <a:headEnd type="none" w="med" len="med"/>
+                      <a:tailEnd type="none" w="med" len="med"/>
+                    </a:lnB>
+                  </a:tcPr>
+                </a:tc>
+                <a:tc>
+                  <a:txBody>
+                    <a:bodyPr/>
+                    <a:lstStyle/>
+                    <a:p>
+                      <a:pPr indent="0" marL="0">
+                        <a:buNone/>
+                      </a:pPr>
+                      <a:r>
+                        <a:rPr lang="en-US" sz="1050" dirty="0">
+                          <a:solidFill>
+                            <a:srgbClr val="000000"/>
+                          </a:solidFill>
+                          <a:latin typeface="Yu Gothic" pitchFamily="34" charset="0"/>
+                          <a:ea typeface="Yu Gothic" pitchFamily="34" charset="-122"/>
+                          <a:cs typeface="Yu Gothic" pitchFamily="34" charset="-120"/>
+                        </a:rPr>
+                        <a:t>モリタホールディングス（消防車両で国内トップシェア、年700台以上製造）</a:t>
+                      </a:r>
+                      <a:endParaRPr lang="en-US" sz="1050" dirty="0">
+                        <a:latin typeface="Yu Gothic" charset="0"/>
+                        <a:ea typeface="Yu Gothic" charset="0"/>
+                        <a:cs typeface="Yu Gothic" charset="0"/>
+                      </a:endParaRPr>
+                    </a:p>
+                  </a:txBody>
+                  <a:tcPr marL="91440" marR="91440" marT="45720" marB="45720" anchor="ctr">
+                    <a:lnL w="9525" cap="flat" cmpd="sng" algn="ctr">
+                      <a:solidFill>
+                        <a:srgbClr val="D9D9D9"/>
+                      </a:solidFill>
+                      <a:prstDash val="solid"/>
+                      <a:round/>
+                      <a:headEnd type="none" w="med" len="med"/>
+                      <a:tailEnd type="none" w="med" len="med"/>
+                    </a:lnL>
+                    <a:lnR w="9525" cap="flat" cmpd="sng" algn="ctr">
+                      <a:solidFill>
+                        <a:srgbClr val="D9D9D9"/>
+                      </a:solidFill>
+                      <a:prstDash val="solid"/>
+                      <a:round/>
+                      <a:headEnd type="none" w="med" len="med"/>
+                      <a:tailEnd type="none" w="med" len="med"/>
+                    </a:lnR>
+                    <a:lnT w="9525" cap="flat" cmpd="sng" algn="ctr">
+                      <a:solidFill>
+                        <a:srgbClr val="D9D9D9"/>
+                      </a:solidFill>
+                      <a:prstDash val="solid"/>
+                      <a:round/>
+                      <a:headEnd type="none" w="med" len="med"/>
+                      <a:tailEnd type="none" w="med" len="med"/>
+                    </a:lnT>
+                    <a:lnB w="9525" cap="flat" cmpd="sng" algn="ctr">
+                      <a:solidFill>
+                        <a:srgbClr val="D9D9D9"/>
+                      </a:solidFill>
+                      <a:prstDash val="solid"/>
+                      <a:round/>
+                      <a:headEnd type="none" w="med" len="med"/>
+                      <a:tailEnd type="none" w="med" len="med"/>
+                    </a:lnB>
+                  </a:tcPr>
+                </a:tc>
+                <a:tc>
+                  <a:txBody>
+                    <a:bodyPr/>
+                    <a:lstStyle/>
+                    <a:p>
+                      <a:pPr indent="0" marL="0">
+                        <a:buNone/>
+                      </a:pPr>
+                      <a:r>
+                        <a:rPr lang="en-US" sz="1050" dirty="0">
+                          <a:solidFill>
+                            <a:srgbClr val="C00000"/>
+                          </a:solidFill>
+                          <a:latin typeface="Yu Gothic" pitchFamily="34" charset="0"/>
+                          <a:ea typeface="Yu Gothic" pitchFamily="34" charset="-122"/>
+                          <a:cs typeface="Yu Gothic" pitchFamily="34" charset="-120"/>
+                        </a:rPr>
+                        <a:t>新造・更新時に通信モジュールを標準搭載する</a:t>
+                      </a:r>
+                      <a:endParaRPr lang="en-US" sz="1050" dirty="0">
+                        <a:latin typeface="Yu Gothic" charset="0"/>
+                        <a:ea typeface="Yu Gothic" charset="0"/>
+                        <a:cs typeface="Yu Gothic" charset="0"/>
+                      </a:endParaRPr>
+                    </a:p>
+                  </a:txBody>
+                  <a:tcPr marL="91440" marR="91440" marT="45720" marB="45720" anchor="ctr">
+                    <a:lnL w="9525" cap="flat" cmpd="sng" algn="ctr">
+                      <a:solidFill>
+                        <a:srgbClr val="D9D9D9"/>
+                      </a:solidFill>
+                      <a:prstDash val="solid"/>
+                      <a:round/>
+                      <a:headEnd type="none" w="med" len="med"/>
+                      <a:tailEnd type="none" w="med" len="med"/>
+                    </a:lnL>
+                    <a:lnR w="9525" cap="flat" cmpd="sng" algn="ctr">
+                      <a:solidFill>
+                        <a:srgbClr val="D9D9D9"/>
+                      </a:solidFill>
+                      <a:prstDash val="solid"/>
+                      <a:round/>
+                      <a:headEnd type="none" w="med" len="med"/>
+                      <a:tailEnd type="none" w="med" len="med"/>
+                    </a:lnR>
+                    <a:lnT w="9525" cap="flat" cmpd="sng" algn="ctr">
+                      <a:solidFill>
+                        <a:srgbClr val="D9D9D9"/>
+                      </a:solidFill>
+                      <a:prstDash val="solid"/>
+                      <a:round/>
+                      <a:headEnd type="none" w="med" len="med"/>
+                      <a:tailEnd type="none" w="med" len="med"/>
+                    </a:lnT>
+                    <a:lnB w="9525" cap="flat" cmpd="sng" algn="ctr">
+                      <a:solidFill>
+                        <a:srgbClr val="D9D9D9"/>
+                      </a:solidFill>
+                      <a:prstDash val="solid"/>
+                      <a:round/>
+                      <a:headEnd type="none" w="med" len="med"/>
+                      <a:tailEnd type="none" w="med" len="med"/>
+                    </a:lnB>
+                  </a:tcPr>
+                </a:tc>
+              </a:tr>
+              <a:tr h="658368">
+                <a:tc>
+                  <a:txBody>
+                    <a:bodyPr/>
+                    <a:lstStyle/>
+                    <a:p>
+                      <a:pPr indent="0" marL="0">
+                        <a:buNone/>
+                      </a:pPr>
+                      <a:r>
+                        <a:rPr lang="en-US" sz="1150" b="1" dirty="0">
+                          <a:solidFill>
+                            <a:srgbClr val="000000"/>
+                          </a:solidFill>
+                          <a:latin typeface="Yu Gothic" pitchFamily="34" charset="0"/>
+                          <a:ea typeface="Yu Gothic" pitchFamily="34" charset="-122"/>
+                          <a:cs typeface="Yu Gothic" pitchFamily="34" charset="-120"/>
+                        </a:rPr>
+                        <a:t>医療機器</a:t>
+                      </a:r>
+                      <a:endParaRPr lang="en-US" sz="1150" dirty="0">
+                        <a:latin typeface="Yu Gothic" charset="0"/>
+                        <a:ea typeface="Yu Gothic" charset="0"/>
+                        <a:cs typeface="Yu Gothic" charset="0"/>
+                      </a:endParaRPr>
+                    </a:p>
+                  </a:txBody>
+                  <a:tcPr marL="91440" marR="91440" marT="45720" marB="45720" anchor="ctr">
+                    <a:lnL w="9525" cap="flat" cmpd="sng" algn="ctr">
+                      <a:solidFill>
+                        <a:srgbClr val="D9D9D9"/>
+                      </a:solidFill>
+                      <a:prstDash val="solid"/>
+                      <a:round/>
+                      <a:headEnd type="none" w="med" len="med"/>
+                      <a:tailEnd type="none" w="med" len="med"/>
+                    </a:lnL>
+                    <a:lnR w="9525" cap="flat" cmpd="sng" algn="ctr">
+                      <a:solidFill>
+                        <a:srgbClr val="D9D9D9"/>
+                      </a:solidFill>
+                      <a:prstDash val="solid"/>
+                      <a:round/>
+                      <a:headEnd type="none" w="med" len="med"/>
+                      <a:tailEnd type="none" w="med" len="med"/>
+                    </a:lnR>
+                    <a:lnT w="9525" cap="flat" cmpd="sng" algn="ctr">
+                      <a:solidFill>
+                        <a:srgbClr val="D9D9D9"/>
+                      </a:solidFill>
+                      <a:prstDash val="solid"/>
+                      <a:round/>
+                      <a:headEnd type="none" w="med" len="med"/>
+                      <a:tailEnd type="none" w="med" len="med"/>
+                    </a:lnT>
+                    <a:lnB w="9525" cap="flat" cmpd="sng" algn="ctr">
+                      <a:solidFill>
+                        <a:srgbClr val="D9D9D9"/>
+                      </a:solidFill>
+                      <a:prstDash val="solid"/>
+                      <a:round/>
+                      <a:headEnd type="none" w="med" len="med"/>
+                      <a:tailEnd type="none" w="med" len="med"/>
+                    </a:lnB>
+                  </a:tcPr>
+                </a:tc>
+                <a:tc>
+                  <a:txBody>
+                    <a:bodyPr/>
+                    <a:lstStyle/>
+                    <a:p>
+                      <a:pPr indent="0" marL="0">
+                        <a:buNone/>
+                      </a:pPr>
+                      <a:r>
+                        <a:rPr lang="en-US" sz="1050" dirty="0">
+                          <a:solidFill>
+                            <a:srgbClr val="000000"/>
+                          </a:solidFill>
+                          <a:latin typeface="Yu Gothic" pitchFamily="34" charset="0"/>
+                          <a:ea typeface="Yu Gothic" pitchFamily="34" charset="-122"/>
+                          <a:cs typeface="Yu Gothic" pitchFamily="34" charset="-120"/>
+                        </a:rPr>
+                        <a:t>日本光電</a:t>
+                      </a:r>
+                      <a:endParaRPr lang="en-US" sz="1050" dirty="0">
+                        <a:latin typeface="Yu Gothic" charset="0"/>
+                        <a:ea typeface="Yu Gothic" charset="0"/>
+                        <a:cs typeface="Yu Gothic" charset="0"/>
+                      </a:endParaRPr>
+                    </a:p>
+                  </a:txBody>
+                  <a:tcPr marL="91440" marR="91440" marT="45720" marB="45720" anchor="ctr">
+                    <a:lnL w="9525" cap="flat" cmpd="sng" algn="ctr">
+                      <a:solidFill>
+                        <a:srgbClr val="D9D9D9"/>
+                      </a:solidFill>
+                      <a:prstDash val="solid"/>
+                      <a:round/>
+                      <a:headEnd type="none" w="med" len="med"/>
+                      <a:tailEnd type="none" w="med" len="med"/>
+                    </a:lnL>
+                    <a:lnR w="9525" cap="flat" cmpd="sng" algn="ctr">
+                      <a:solidFill>
+                        <a:srgbClr val="D9D9D9"/>
+                      </a:solidFill>
+                      <a:prstDash val="solid"/>
+                      <a:round/>
+                      <a:headEnd type="none" w="med" len="med"/>
+                      <a:tailEnd type="none" w="med" len="med"/>
+                    </a:lnR>
+                    <a:lnT w="9525" cap="flat" cmpd="sng" algn="ctr">
+                      <a:solidFill>
+                        <a:srgbClr val="D9D9D9"/>
+                      </a:solidFill>
+                      <a:prstDash val="solid"/>
+                      <a:round/>
+                      <a:headEnd type="none" w="med" len="med"/>
+                      <a:tailEnd type="none" w="med" len="med"/>
+                    </a:lnT>
+                    <a:lnB w="9525" cap="flat" cmpd="sng" algn="ctr">
+                      <a:solidFill>
+                        <a:srgbClr val="D9D9D9"/>
+                      </a:solidFill>
+                      <a:prstDash val="solid"/>
+                      <a:round/>
+                      <a:headEnd type="none" w="med" len="med"/>
+                      <a:tailEnd type="none" w="med" len="med"/>
+                    </a:lnB>
+                  </a:tcPr>
+                </a:tc>
+                <a:tc>
+                  <a:txBody>
+                    <a:bodyPr/>
+                    <a:lstStyle/>
+                    <a:p>
+                      <a:pPr indent="0" marL="0">
+                        <a:buNone/>
+                      </a:pPr>
+                      <a:r>
+                        <a:rPr lang="en-US" sz="1050" dirty="0">
+                          <a:solidFill>
+                            <a:srgbClr val="C00000"/>
+                          </a:solidFill>
+                          <a:latin typeface="Yu Gothic" pitchFamily="34" charset="0"/>
+                          <a:ea typeface="Yu Gothic" pitchFamily="34" charset="-122"/>
+                          <a:cs typeface="Yu Gothic" pitchFamily="34" charset="-120"/>
+                        </a:rPr>
+                        <a:t>救急車搭載のバイタル機器とAI連携し、自動送信の技術的接点にする</a:t>
+                      </a:r>
+                      <a:endParaRPr lang="en-US" sz="1050" dirty="0">
+                        <a:latin typeface="Yu Gothic" charset="0"/>
+                        <a:ea typeface="Yu Gothic" charset="0"/>
+                        <a:cs typeface="Yu Gothic" charset="0"/>
+                      </a:endParaRPr>
+                    </a:p>
+                  </a:txBody>
+                  <a:tcPr marL="91440" marR="91440" marT="45720" marB="45720" anchor="ctr">
+                    <a:lnL w="9525" cap="flat" cmpd="sng" algn="ctr">
+                      <a:solidFill>
+                        <a:srgbClr val="D9D9D9"/>
+                      </a:solidFill>
+                      <a:prstDash val="solid"/>
+                      <a:round/>
+                      <a:headEnd type="none" w="med" len="med"/>
+                      <a:tailEnd type="none" w="med" len="med"/>
+                    </a:lnL>
+                    <a:lnR w="9525" cap="flat" cmpd="sng" algn="ctr">
+                      <a:solidFill>
+                        <a:srgbClr val="D9D9D9"/>
+                      </a:solidFill>
+                      <a:prstDash val="solid"/>
+                      <a:round/>
+                      <a:headEnd type="none" w="med" len="med"/>
+                      <a:tailEnd type="none" w="med" len="med"/>
+                    </a:lnR>
+                    <a:lnT w="9525" cap="flat" cmpd="sng" algn="ctr">
+                      <a:solidFill>
+                        <a:srgbClr val="D9D9D9"/>
+                      </a:solidFill>
+                      <a:prstDash val="solid"/>
+                      <a:round/>
+                      <a:headEnd type="none" w="med" len="med"/>
+                      <a:tailEnd type="none" w="med" len="med"/>
+                    </a:lnT>
+                    <a:lnB w="9525" cap="flat" cmpd="sng" algn="ctr">
+                      <a:solidFill>
+                        <a:srgbClr val="D9D9D9"/>
+                      </a:solidFill>
+                      <a:prstDash val="solid"/>
+                      <a:round/>
+                      <a:headEnd type="none" w="med" len="med"/>
+                      <a:tailEnd type="none" w="med" len="med"/>
+                    </a:lnB>
+                  </a:tcPr>
+                </a:tc>
+              </a:tr>
+              <a:tr h="658368">
+                <a:tc>
+                  <a:txBody>
+                    <a:bodyPr/>
+                    <a:lstStyle/>
+                    <a:p>
+                      <a:pPr indent="0" marL="0">
+                        <a:buNone/>
+                      </a:pPr>
+                      <a:r>
+                        <a:rPr lang="en-US" sz="1150" b="1" dirty="0">
+                          <a:solidFill>
+                            <a:srgbClr val="000000"/>
+                          </a:solidFill>
+                          <a:latin typeface="Yu Gothic" pitchFamily="34" charset="0"/>
+                          <a:ea typeface="Yu Gothic" pitchFamily="34" charset="-122"/>
+                          <a:cs typeface="Yu Gothic" pitchFamily="34" charset="-120"/>
+                        </a:rPr>
+                        <a:t>電子カルテ</a:t>
+                      </a:r>
+                      <a:endParaRPr lang="en-US" sz="1150" dirty="0">
+                        <a:latin typeface="Yu Gothic" charset="0"/>
+                        <a:ea typeface="Yu Gothic" charset="0"/>
+                        <a:cs typeface="Yu Gothic" charset="0"/>
+                      </a:endParaRPr>
+                    </a:p>
+                  </a:txBody>
+                  <a:tcPr marL="91440" marR="91440" marT="45720" marB="45720" anchor="ctr">
+                    <a:lnL w="9525" cap="flat" cmpd="sng" algn="ctr">
+                      <a:solidFill>
+                        <a:srgbClr val="D9D9D9"/>
+                      </a:solidFill>
+                      <a:prstDash val="solid"/>
+                      <a:round/>
+                      <a:headEnd type="none" w="med" len="med"/>
+                      <a:tailEnd type="none" w="med" len="med"/>
+                    </a:lnL>
+                    <a:lnR w="9525" cap="flat" cmpd="sng" algn="ctr">
+                      <a:solidFill>
+                        <a:srgbClr val="D9D9D9"/>
+                      </a:solidFill>
+                      <a:prstDash val="solid"/>
+                      <a:round/>
+                      <a:headEnd type="none" w="med" len="med"/>
+                      <a:tailEnd type="none" w="med" len="med"/>
+                    </a:lnR>
+                    <a:lnT w="9525" cap="flat" cmpd="sng" algn="ctr">
+                      <a:solidFill>
+                        <a:srgbClr val="D9D9D9"/>
+                      </a:solidFill>
+                      <a:prstDash val="solid"/>
+                      <a:round/>
+                      <a:headEnd type="none" w="med" len="med"/>
+                      <a:tailEnd type="none" w="med" len="med"/>
+                    </a:lnT>
+                    <a:lnB w="9525" cap="flat" cmpd="sng" algn="ctr">
+                      <a:solidFill>
+                        <a:srgbClr val="D9D9D9"/>
+                      </a:solidFill>
+                      <a:prstDash val="solid"/>
+                      <a:round/>
+                      <a:headEnd type="none" w="med" len="med"/>
+                      <a:tailEnd type="none" w="med" len="med"/>
+                    </a:lnB>
+                  </a:tcPr>
+                </a:tc>
+                <a:tc>
+                  <a:txBody>
+                    <a:bodyPr/>
+                    <a:lstStyle/>
+                    <a:p>
+                      <a:pPr indent="0" marL="0">
+                        <a:buNone/>
+                      </a:pPr>
+                      <a:r>
+                        <a:rPr lang="en-US" sz="1050" dirty="0">
+                          <a:solidFill>
+                            <a:srgbClr val="000000"/>
+                          </a:solidFill>
+                          <a:latin typeface="Yu Gothic" pitchFamily="34" charset="0"/>
+                          <a:ea typeface="Yu Gothic" pitchFamily="34" charset="-122"/>
+                          <a:cs typeface="Yu Gothic" pitchFamily="34" charset="-120"/>
+                        </a:rPr>
+                        <a:t>富士通（シェア34.5%）／NEC・SCSK「MegaOak」陣営（約20%）</a:t>
+                      </a:r>
+                      <a:endParaRPr lang="en-US" sz="1050" dirty="0">
+                        <a:latin typeface="Yu Gothic" charset="0"/>
+                        <a:ea typeface="Yu Gothic" charset="0"/>
+                        <a:cs typeface="Yu Gothic" charset="0"/>
+                      </a:endParaRPr>
+                    </a:p>
+                  </a:txBody>
+                  <a:tcPr marL="91440" marR="91440" marT="45720" marB="45720" anchor="ctr">
+                    <a:lnL w="9525" cap="flat" cmpd="sng" algn="ctr">
+                      <a:solidFill>
+                        <a:srgbClr val="D9D9D9"/>
+                      </a:solidFill>
+                      <a:prstDash val="solid"/>
+                      <a:round/>
+                      <a:headEnd type="none" w="med" len="med"/>
+                      <a:tailEnd type="none" w="med" len="med"/>
+                    </a:lnL>
+                    <a:lnR w="9525" cap="flat" cmpd="sng" algn="ctr">
+                      <a:solidFill>
+                        <a:srgbClr val="D9D9D9"/>
+                      </a:solidFill>
+                      <a:prstDash val="solid"/>
+                      <a:round/>
+                      <a:headEnd type="none" w="med" len="med"/>
+                      <a:tailEnd type="none" w="med" len="med"/>
+                    </a:lnR>
+                    <a:lnT w="9525" cap="flat" cmpd="sng" algn="ctr">
+                      <a:solidFill>
+                        <a:srgbClr val="D9D9D9"/>
+                      </a:solidFill>
+                      <a:prstDash val="solid"/>
+                      <a:round/>
+                      <a:headEnd type="none" w="med" len="med"/>
+                      <a:tailEnd type="none" w="med" len="med"/>
+                    </a:lnT>
+                    <a:lnB w="9525" cap="flat" cmpd="sng" algn="ctr">
+                      <a:solidFill>
+                        <a:srgbClr val="D9D9D9"/>
+                      </a:solidFill>
+                      <a:prstDash val="solid"/>
+                      <a:round/>
+                      <a:headEnd type="none" w="med" len="med"/>
+                      <a:tailEnd type="none" w="med" len="med"/>
+                    </a:lnB>
+                  </a:tcPr>
+                </a:tc>
+                <a:tc>
+                  <a:txBody>
+                    <a:bodyPr/>
+                    <a:lstStyle/>
+                    <a:p>
+                      <a:pPr indent="0" marL="0">
+                        <a:buNone/>
+                      </a:pPr>
+                      <a:r>
+                        <a:rPr lang="en-US" sz="1050" dirty="0">
+                          <a:solidFill>
+                            <a:srgbClr val="C00000"/>
+                          </a:solidFill>
+                          <a:latin typeface="Yu Gothic" pitchFamily="34" charset="0"/>
+                          <a:ea typeface="Yu Gothic" pitchFamily="34" charset="-122"/>
+                          <a:cs typeface="Yu Gothic" pitchFamily="34" charset="-120"/>
+                        </a:rPr>
+                        <a:t>病院側の受け皿システムに直接統合し、新規導入の抵抗をなくす</a:t>
+                      </a:r>
+                      <a:endParaRPr lang="en-US" sz="1050" dirty="0">
+                        <a:latin typeface="Yu Gothic" charset="0"/>
+                        <a:ea typeface="Yu Gothic" charset="0"/>
+                        <a:cs typeface="Yu Gothic" charset="0"/>
+                      </a:endParaRPr>
+                    </a:p>
+                  </a:txBody>
+                  <a:tcPr marL="91440" marR="91440" marT="45720" marB="45720" anchor="ctr">
+                    <a:lnL w="9525" cap="flat" cmpd="sng" algn="ctr">
+                      <a:solidFill>
+                        <a:srgbClr val="D9D9D9"/>
+                      </a:solidFill>
+                      <a:prstDash val="solid"/>
+                      <a:round/>
+                      <a:headEnd type="none" w="med" len="med"/>
+                      <a:tailEnd type="none" w="med" len="med"/>
+                    </a:lnL>
+                    <a:lnR w="9525" cap="flat" cmpd="sng" algn="ctr">
+                      <a:solidFill>
+                        <a:srgbClr val="D9D9D9"/>
+                      </a:solidFill>
+                      <a:prstDash val="solid"/>
+                      <a:round/>
+                      <a:headEnd type="none" w="med" len="med"/>
+                      <a:tailEnd type="none" w="med" len="med"/>
+                    </a:lnR>
+                    <a:lnT w="9525" cap="flat" cmpd="sng" algn="ctr">
+                      <a:solidFill>
+                        <a:srgbClr val="D9D9D9"/>
+                      </a:solidFill>
+                      <a:prstDash val="solid"/>
+                      <a:round/>
+                      <a:headEnd type="none" w="med" len="med"/>
+                      <a:tailEnd type="none" w="med" len="med"/>
+                    </a:lnT>
+                    <a:lnB w="9525" cap="flat" cmpd="sng" algn="ctr">
+                      <a:solidFill>
+                        <a:srgbClr val="D9D9D9"/>
+                      </a:solidFill>
+                      <a:prstDash val="solid"/>
+                      <a:round/>
+                      <a:headEnd type="none" w="med" len="med"/>
+                      <a:tailEnd type="none" w="med" len="med"/>
+                    </a:lnB>
+                  </a:tcPr>
+                </a:tc>
+              </a:tr>
+              <a:tr h="658368">
+                <a:tc>
+                  <a:txBody>
+                    <a:bodyPr/>
+                    <a:lstStyle/>
+                    <a:p>
+                      <a:pPr indent="0" marL="0">
+                        <a:buNone/>
+                      </a:pPr>
+                      <a:r>
+                        <a:rPr lang="en-US" sz="1150" b="1" dirty="0">
+                          <a:solidFill>
+                            <a:srgbClr val="000000"/>
+                          </a:solidFill>
+                          <a:latin typeface="Yu Gothic" pitchFamily="34" charset="0"/>
+                          <a:ea typeface="Yu Gothic" pitchFamily="34" charset="-122"/>
+                          <a:cs typeface="Yu Gothic" pitchFamily="34" charset="-120"/>
+                        </a:rPr>
+                        <a:t>病院グループ</a:t>
+                      </a:r>
+                      <a:endParaRPr lang="en-US" sz="1150" dirty="0">
+                        <a:latin typeface="Yu Gothic" charset="0"/>
+                        <a:ea typeface="Yu Gothic" charset="0"/>
+                        <a:cs typeface="Yu Gothic" charset="0"/>
+                      </a:endParaRPr>
+                    </a:p>
+                  </a:txBody>
+                  <a:tcPr marL="91440" marR="91440" marT="45720" marB="45720" anchor="ctr">
+                    <a:lnL w="9525" cap="flat" cmpd="sng" algn="ctr">
+                      <a:solidFill>
+                        <a:srgbClr val="D9D9D9"/>
+                      </a:solidFill>
+                      <a:prstDash val="solid"/>
+                      <a:round/>
+                      <a:headEnd type="none" w="med" len="med"/>
+                      <a:tailEnd type="none" w="med" len="med"/>
+                    </a:lnL>
+                    <a:lnR w="9525" cap="flat" cmpd="sng" algn="ctr">
+                      <a:solidFill>
+                        <a:srgbClr val="D9D9D9"/>
+                      </a:solidFill>
+                      <a:prstDash val="solid"/>
+                      <a:round/>
+                      <a:headEnd type="none" w="med" len="med"/>
+                      <a:tailEnd type="none" w="med" len="med"/>
+                    </a:lnR>
+                    <a:lnT w="9525" cap="flat" cmpd="sng" algn="ctr">
+                      <a:solidFill>
+                        <a:srgbClr val="D9D9D9"/>
+                      </a:solidFill>
+                      <a:prstDash val="solid"/>
+                      <a:round/>
+                      <a:headEnd type="none" w="med" len="med"/>
+                      <a:tailEnd type="none" w="med" len="med"/>
+                    </a:lnT>
+                    <a:lnB w="9525" cap="flat" cmpd="sng" algn="ctr">
+                      <a:solidFill>
+                        <a:srgbClr val="D9D9D9"/>
+                      </a:solidFill>
+                      <a:prstDash val="solid"/>
+                      <a:round/>
+                      <a:headEnd type="none" w="med" len="med"/>
+                      <a:tailEnd type="none" w="med" len="med"/>
+                    </a:lnB>
+                  </a:tcPr>
+                </a:tc>
+                <a:tc>
+                  <a:txBody>
+                    <a:bodyPr/>
+                    <a:lstStyle/>
+                    <a:p>
+                      <a:pPr indent="0" marL="0">
+                        <a:buNone/>
+                      </a:pPr>
+                      <a:r>
+                        <a:rPr lang="en-US" sz="1050" dirty="0">
+                          <a:solidFill>
+                            <a:srgbClr val="000000"/>
+                          </a:solidFill>
+                          <a:latin typeface="Yu Gothic" pitchFamily="34" charset="0"/>
+                          <a:ea typeface="Yu Gothic" pitchFamily="34" charset="-122"/>
+                          <a:cs typeface="Yu Gothic" pitchFamily="34" charset="-120"/>
+                        </a:rPr>
+                        <a:t>日本赤十字社（全国90病院、多くが救急告示・三次救急）</a:t>
+                      </a:r>
+                      <a:endParaRPr lang="en-US" sz="1050" dirty="0">
+                        <a:latin typeface="Yu Gothic" charset="0"/>
+                        <a:ea typeface="Yu Gothic" charset="0"/>
+                        <a:cs typeface="Yu Gothic" charset="0"/>
+                      </a:endParaRPr>
+                    </a:p>
+                  </a:txBody>
+                  <a:tcPr marL="91440" marR="91440" marT="45720" marB="45720" anchor="ctr">
+                    <a:lnL w="9525" cap="flat" cmpd="sng" algn="ctr">
+                      <a:solidFill>
+                        <a:srgbClr val="D9D9D9"/>
+                      </a:solidFill>
+                      <a:prstDash val="solid"/>
+                      <a:round/>
+                      <a:headEnd type="none" w="med" len="med"/>
+                      <a:tailEnd type="none" w="med" len="med"/>
+                    </a:lnL>
+                    <a:lnR w="9525" cap="flat" cmpd="sng" algn="ctr">
+                      <a:solidFill>
+                        <a:srgbClr val="D9D9D9"/>
+                      </a:solidFill>
+                      <a:prstDash val="solid"/>
+                      <a:round/>
+                      <a:headEnd type="none" w="med" len="med"/>
+                      <a:tailEnd type="none" w="med" len="med"/>
+                    </a:lnR>
+                    <a:lnT w="9525" cap="flat" cmpd="sng" algn="ctr">
+                      <a:solidFill>
+                        <a:srgbClr val="D9D9D9"/>
+                      </a:solidFill>
+                      <a:prstDash val="solid"/>
+                      <a:round/>
+                      <a:headEnd type="none" w="med" len="med"/>
+                      <a:tailEnd type="none" w="med" len="med"/>
+                    </a:lnT>
+                    <a:lnB w="9525" cap="flat" cmpd="sng" algn="ctr">
+                      <a:solidFill>
+                        <a:srgbClr val="D9D9D9"/>
+                      </a:solidFill>
+                      <a:prstDash val="solid"/>
+                      <a:round/>
+                      <a:headEnd type="none" w="med" len="med"/>
+                      <a:tailEnd type="none" w="med" len="med"/>
+                    </a:lnB>
+                  </a:tcPr>
+                </a:tc>
+                <a:tc>
+                  <a:txBody>
+                    <a:bodyPr/>
+                    <a:lstStyle/>
+                    <a:p>
+                      <a:pPr indent="0" marL="0">
+                        <a:buNone/>
+                      </a:pPr>
+                      <a:r>
+                        <a:rPr lang="en-US" sz="1050" dirty="0">
+                          <a:solidFill>
+                            <a:srgbClr val="C00000"/>
+                          </a:solidFill>
+                          <a:latin typeface="Yu Gothic" pitchFamily="34" charset="0"/>
+                          <a:ea typeface="Yu Gothic" pitchFamily="34" charset="-122"/>
+                          <a:cs typeface="Yu Gothic" pitchFamily="34" charset="-120"/>
+                        </a:rPr>
+                        <a:t>グループ本部と1件契約し、傘下病院へ一括展開する</a:t>
+                      </a:r>
+                      <a:endParaRPr lang="en-US" sz="1050" dirty="0">
+                        <a:latin typeface="Yu Gothic" charset="0"/>
+                        <a:ea typeface="Yu Gothic" charset="0"/>
+                        <a:cs typeface="Yu Gothic" charset="0"/>
+                      </a:endParaRPr>
+                    </a:p>
+                  </a:txBody>
+                  <a:tcPr marL="91440" marR="91440" marT="45720" marB="45720" anchor="ctr">
+                    <a:lnL w="9525" cap="flat" cmpd="sng" algn="ctr">
+                      <a:solidFill>
+                        <a:srgbClr val="D9D9D9"/>
+                      </a:solidFill>
+                      <a:prstDash val="solid"/>
+                      <a:round/>
+                      <a:headEnd type="none" w="med" len="med"/>
+                      <a:tailEnd type="none" w="med" len="med"/>
+                    </a:lnL>
+                    <a:lnR w="9525" cap="flat" cmpd="sng" algn="ctr">
+                      <a:solidFill>
+                        <a:srgbClr val="D9D9D9"/>
+                      </a:solidFill>
+                      <a:prstDash val="solid"/>
+                      <a:round/>
+                      <a:headEnd type="none" w="med" len="med"/>
+                      <a:tailEnd type="none" w="med" len="med"/>
+                    </a:lnR>
+                    <a:lnT w="9525" cap="flat" cmpd="sng" algn="ctr">
+                      <a:solidFill>
+                        <a:srgbClr val="D9D9D9"/>
+                      </a:solidFill>
+                      <a:prstDash val="solid"/>
+                      <a:round/>
+                      <a:headEnd type="none" w="med" len="med"/>
+                      <a:tailEnd type="none" w="med" len="med"/>
+                    </a:lnT>
+                    <a:lnB w="9525" cap="flat" cmpd="sng" algn="ctr">
+                      <a:solidFill>
+                        <a:srgbClr val="D9D9D9"/>
+                      </a:solidFill>
+                      <a:prstDash val="solid"/>
+                      <a:round/>
+                      <a:headEnd type="none" w="med" len="med"/>
+                      <a:tailEnd type="none" w="med" len="med"/>
+                    </a:lnB>
+                  </a:tcPr>
+                </a:tc>
+              </a:tr>
+              <a:tr h="658368">
+                <a:tc>
+                  <a:txBody>
+                    <a:bodyPr/>
+                    <a:lstStyle/>
+                    <a:p>
+                      <a:pPr indent="0" marL="0">
+                        <a:buNone/>
+                      </a:pPr>
+                      <a:r>
+                        <a:rPr lang="en-US" sz="1150" b="1" dirty="0">
+                          <a:solidFill>
+                            <a:srgbClr val="000000"/>
+                          </a:solidFill>
+                          <a:latin typeface="Yu Gothic" pitchFamily="34" charset="0"/>
+                          <a:ea typeface="Yu Gothic" pitchFamily="34" charset="-122"/>
+                          <a:cs typeface="Yu Gothic" pitchFamily="34" charset="-120"/>
+                        </a:rPr>
+                        <a:t>資金・地域網</a:t>
+                      </a:r>
+                      <a:endParaRPr lang="en-US" sz="1150" dirty="0">
+                        <a:latin typeface="Yu Gothic" charset="0"/>
+                        <a:ea typeface="Yu Gothic" charset="0"/>
+                        <a:cs typeface="Yu Gothic" charset="0"/>
+                      </a:endParaRPr>
+                    </a:p>
+                  </a:txBody>
+                  <a:tcPr marL="91440" marR="91440" marT="45720" marB="45720" anchor="ctr">
+                    <a:lnL w="9525" cap="flat" cmpd="sng" algn="ctr">
+                      <a:solidFill>
+                        <a:srgbClr val="D9D9D9"/>
+                      </a:solidFill>
+                      <a:prstDash val="solid"/>
+                      <a:round/>
+                      <a:headEnd type="none" w="med" len="med"/>
+                      <a:tailEnd type="none" w="med" len="med"/>
+                    </a:lnL>
+                    <a:lnR w="9525" cap="flat" cmpd="sng" algn="ctr">
+                      <a:solidFill>
+                        <a:srgbClr val="D9D9D9"/>
+                      </a:solidFill>
+                      <a:prstDash val="solid"/>
+                      <a:round/>
+                      <a:headEnd type="none" w="med" len="med"/>
+                      <a:tailEnd type="none" w="med" len="med"/>
+                    </a:lnR>
+                    <a:lnT w="9525" cap="flat" cmpd="sng" algn="ctr">
+                      <a:solidFill>
+                        <a:srgbClr val="D9D9D9"/>
+                      </a:solidFill>
+                      <a:prstDash val="solid"/>
+                      <a:round/>
+                      <a:headEnd type="none" w="med" len="med"/>
+                      <a:tailEnd type="none" w="med" len="med"/>
+                    </a:lnT>
+                    <a:lnB w="9525" cap="flat" cmpd="sng" algn="ctr">
+                      <a:solidFill>
+                        <a:srgbClr val="D9D9D9"/>
+                      </a:solidFill>
+                      <a:prstDash val="solid"/>
+                      <a:round/>
+                      <a:headEnd type="none" w="med" len="med"/>
+                      <a:tailEnd type="none" w="med" len="med"/>
+                    </a:lnB>
+                  </a:tcPr>
+                </a:tc>
+                <a:tc>
+                  <a:txBody>
+                    <a:bodyPr/>
+                    <a:lstStyle/>
+                    <a:p>
+                      <a:pPr indent="0" marL="0">
+                        <a:buNone/>
+                      </a:pPr>
+                      <a:r>
+                        <a:rPr lang="en-US" sz="1050" dirty="0">
+                          <a:solidFill>
+                            <a:srgbClr val="000000"/>
+                          </a:solidFill>
+                          <a:latin typeface="Yu Gothic" pitchFamily="34" charset="0"/>
+                          <a:ea typeface="Yu Gothic" pitchFamily="34" charset="-122"/>
+                          <a:cs typeface="Yu Gothic" pitchFamily="34" charset="-120"/>
+                        </a:rPr>
+                        <a:t>SBIグループ（NTT×SBI資本提携 約4,200億円、SBI地方創生パートナーズ）</a:t>
+                      </a:r>
+                      <a:endParaRPr lang="en-US" sz="1050" dirty="0">
+                        <a:latin typeface="Yu Gothic" charset="0"/>
+                        <a:ea typeface="Yu Gothic" charset="0"/>
+                        <a:cs typeface="Yu Gothic" charset="0"/>
+                      </a:endParaRPr>
+                    </a:p>
+                  </a:txBody>
+                  <a:tcPr marL="91440" marR="91440" marT="45720" marB="45720" anchor="ctr">
+                    <a:lnL w="9525" cap="flat" cmpd="sng" algn="ctr">
+                      <a:solidFill>
+                        <a:srgbClr val="D9D9D9"/>
+                      </a:solidFill>
+                      <a:prstDash val="solid"/>
+                      <a:round/>
+                      <a:headEnd type="none" w="med" len="med"/>
+                      <a:tailEnd type="none" w="med" len="med"/>
+                    </a:lnL>
+                    <a:lnR w="9525" cap="flat" cmpd="sng" algn="ctr">
+                      <a:solidFill>
+                        <a:srgbClr val="D9D9D9"/>
+                      </a:solidFill>
+                      <a:prstDash val="solid"/>
+                      <a:round/>
+                      <a:headEnd type="none" w="med" len="med"/>
+                      <a:tailEnd type="none" w="med" len="med"/>
+                    </a:lnR>
+                    <a:lnT w="9525" cap="flat" cmpd="sng" algn="ctr">
+                      <a:solidFill>
+                        <a:srgbClr val="D9D9D9"/>
+                      </a:solidFill>
+                      <a:prstDash val="solid"/>
+                      <a:round/>
+                      <a:headEnd type="none" w="med" len="med"/>
+                      <a:tailEnd type="none" w="med" len="med"/>
+                    </a:lnT>
+                    <a:lnB w="9525" cap="flat" cmpd="sng" algn="ctr">
+                      <a:solidFill>
+                        <a:srgbClr val="D9D9D9"/>
+                      </a:solidFill>
+                      <a:prstDash val="solid"/>
+                      <a:round/>
+                      <a:headEnd type="none" w="med" len="med"/>
+                      <a:tailEnd type="none" w="med" len="med"/>
+                    </a:lnB>
+                  </a:tcPr>
+                </a:tc>
+                <a:tc>
+                  <a:txBody>
+                    <a:bodyPr/>
+                    <a:lstStyle/>
+                    <a:p>
+                      <a:pPr indent="0" marL="0">
+                        <a:buNone/>
+                      </a:pPr>
+                      <a:r>
+                        <a:rPr lang="en-US" sz="1050" dirty="0">
+                          <a:solidFill>
+                            <a:srgbClr val="C00000"/>
+                          </a:solidFill>
+                          <a:latin typeface="Yu Gothic" pitchFamily="34" charset="0"/>
+                          <a:ea typeface="Yu Gothic" pitchFamily="34" charset="-122"/>
+                          <a:cs typeface="Yu Gothic" pitchFamily="34" charset="-120"/>
+                        </a:rPr>
+                        <a:t>自治体・地方銀行への導線を確保し、導入資金の融資を組む</a:t>
+                      </a:r>
+                      <a:endParaRPr lang="en-US" sz="1050" dirty="0">
+                        <a:latin typeface="Yu Gothic" charset="0"/>
+                        <a:ea typeface="Yu Gothic" charset="0"/>
+                        <a:cs typeface="Yu Gothic" charset="0"/>
+                      </a:endParaRPr>
+                    </a:p>
+                  </a:txBody>
+                  <a:tcPr marL="91440" marR="91440" marT="45720" marB="45720" anchor="ctr">
+                    <a:lnL w="9525" cap="flat" cmpd="sng" algn="ctr">
+                      <a:solidFill>
+                        <a:srgbClr val="D9D9D9"/>
+                      </a:solidFill>
+                      <a:prstDash val="solid"/>
+                      <a:round/>
+                      <a:headEnd type="none" w="med" len="med"/>
+                      <a:tailEnd type="none" w="med" len="med"/>
+                    </a:lnL>
+                    <a:lnR w="9525" cap="flat" cmpd="sng" algn="ctr">
+                      <a:solidFill>
+                        <a:srgbClr val="D9D9D9"/>
+                      </a:solidFill>
+                      <a:prstDash val="solid"/>
+                      <a:round/>
+                      <a:headEnd type="none" w="med" len="med"/>
+                      <a:tailEnd type="none" w="med" len="med"/>
+                    </a:lnR>
+                    <a:lnT w="9525" cap="flat" cmpd="sng" algn="ctr">
+                      <a:solidFill>
+                        <a:srgbClr val="D9D9D9"/>
+                      </a:solidFill>
+                      <a:prstDash val="solid"/>
+                      <a:round/>
+                      <a:headEnd type="none" w="med" len="med"/>
+                      <a:tailEnd type="none" w="med" len="med"/>
+                    </a:lnT>
+                    <a:lnB w="9525" cap="flat" cmpd="sng" algn="ctr">
+                      <a:solidFill>
+                        <a:srgbClr val="D9D9D9"/>
+                      </a:solidFill>
+                      <a:prstDash val="solid"/>
+                      <a:round/>
+                      <a:headEnd type="none" w="med" len="med"/>
+                      <a:tailEnd type="none" w="med" len="med"/>
+                    </a:lnB>
+                  </a:tcPr>
+                </a:tc>
+              </a:tr>
+            </a:tbl>
+          </a:graphicData>
+        </a:graphic>
+      </p:graphicFrame>
+      <p:sp>
+        <p:nvSpPr>
+          <p:cNvPr id="6" name="Text 3"/>
           <p:cNvSpPr/>
           <p:nvPr/>
         </p:nvSpPr>
@@ -6156,7 +7201,7 @@
                 <a:ea typeface="Yu Gothic" pitchFamily="34" charset="-122"/>
                 <a:cs typeface="Yu Gothic" pitchFamily="34" charset="-120"/>
               </a:rPr>
-              <a:t>3C/4P</a:t>
+              <a:t>アライアンス候補 詳細</a:t>
             </a:r>
             <a:endParaRPr lang="en-US" sz="1300" dirty="0"/>
           </a:p>
@@ -6195,7 +7240,7 @@
                 <a:ea typeface="Yu Gothic" pitchFamily="34" charset="-122"/>
                 <a:cs typeface="Yu Gothic" pitchFamily="34" charset="-120"/>
               </a:rPr>
-              <a:t>4P分析 ― TXP Medical連携による優位性</a:t>
+              <a:t>Ubie株式会社との連携仮説</a:t>
             </a:r>
             <a:endParaRPr lang="en-US" sz="2800" dirty="0"/>
           </a:p>
@@ -6210,11 +7255,11 @@
         <p:spPr>
           <a:xfrm>
             <a:off x="548640" y="1691640"/>
-            <a:ext cx="5364328" cy="1783080"/>
+            <a:ext cx="11094415" cy="1828800"/>
           </a:xfrm>
           <a:prstGeom prst="roundRect">
             <a:avLst>
-              <a:gd name="adj" fmla="val 4103"/>
+              <a:gd name="adj" fmla="val 4000"/>
             </a:avLst>
           </a:prstGeom>
           <a:solidFill>
@@ -6243,8 +7288,8 @@
         </p:nvSpPr>
         <p:spPr>
           <a:xfrm>
-            <a:off x="822960" y="1856232"/>
-            <a:ext cx="4815688" cy="411480"/>
+            <a:off x="822960" y="1828800"/>
+            <a:ext cx="10545775" cy="365760"/>
           </a:xfrm>
           <a:prstGeom prst="rect">
             <a:avLst/>
@@ -6260,7 +7305,92 @@
               <a:buNone/>
             </a:pPr>
             <a:r>
-              <a:rPr lang="en-US" sz="1800" b="1" dirty="0">
+              <a:rPr lang="en-US" sz="1500" b="1" dirty="0">
+                <a:solidFill>
+                  <a:srgbClr val="000000"/>
+                </a:solidFill>
+                <a:latin typeface="Yu Gothic" pitchFamily="34" charset="0"/>
+                <a:ea typeface="Yu Gothic" pitchFamily="34" charset="-122"/>
+                <a:cs typeface="Yu Gothic" pitchFamily="34" charset="-120"/>
+              </a:rPr>
+              <a:t>ドコモ本体が直接、資本業務提携済み（2025年3月）</a:t>
+            </a:r>
+            <a:endParaRPr lang="en-US" sz="1500" dirty="0"/>
+          </a:p>
+        </p:txBody>
+      </p:sp>
+      <p:sp>
+        <p:nvSpPr>
+          <p:cNvPr id="6" name="Text 4"/>
+          <p:cNvSpPr/>
+          <p:nvPr/>
+        </p:nvSpPr>
+        <p:spPr>
+          <a:xfrm>
+            <a:off x="822960" y="2240280"/>
+            <a:ext cx="10545775" cy="1188720"/>
+          </a:xfrm>
+          <a:prstGeom prst="rect">
+            <a:avLst/>
+          </a:prstGeom>
+          <a:noFill/>
+          <a:ln/>
+        </p:spPr>
+        <p:txBody>
+          <a:bodyPr wrap="square" lIns="0" tIns="0" rIns="0" bIns="0" rtlCol="0" anchor="t"/>
+          <a:lstStyle/>
+          <a:p>
+            <a:pPr marL="342900" indent="-342900">
+              <a:spcAft>
+                <a:spcPts val="1000"/>
+              </a:spcAft>
+              <a:buSzPct val="100000"/>
+              <a:buChar char="•"/>
+            </a:pPr>
+            <a:r>
+              <a:rPr lang="en-US" sz="1300" dirty="0">
+                <a:solidFill>
+                  <a:srgbClr val="000000"/>
+                </a:solidFill>
+                <a:latin typeface="Yu Gothic" pitchFamily="34" charset="0"/>
+                <a:ea typeface="Yu Gothic" pitchFamily="34" charset="-122"/>
+                <a:cs typeface="Yu Gothic" pitchFamily="34" charset="-120"/>
+              </a:rPr>
+              <a:t>提携締結：2025年3月14日、出資完了は同27日。目的は「健康寿命の延伸」で、dアカウント（1億会員超）とユビーの症状検索エンジンを連携させることが提携の柱</a:t>
+            </a:r>
+            <a:endParaRPr lang="en-US" sz="1300" dirty="0"/>
+          </a:p>
+          <a:p>
+            <a:pPr marL="342900" indent="-342900">
+              <a:spcAft>
+                <a:spcPts val="1000"/>
+              </a:spcAft>
+              <a:buSzPct val="100000"/>
+              <a:buChar char="•"/>
+            </a:pPr>
+            <a:r>
+              <a:rPr lang="en-US" sz="1300" dirty="0">
+                <a:solidFill>
+                  <a:srgbClr val="000000"/>
+                </a:solidFill>
+                <a:latin typeface="Yu Gothic" pitchFamily="34" charset="0"/>
+                <a:ea typeface="Yu Gothic" pitchFamily="34" charset="-122"/>
+                <a:cs typeface="Yu Gothic" pitchFamily="34" charset="-120"/>
+              </a:rPr>
+              <a:t>事業規模：症状検索エンジン「ユビー」月間利用者1,200万人以上。AI問診「ユビーAI問診」は全国1,800以上の医療機関で採用済み</a:t>
+            </a:r>
+            <a:endParaRPr lang="en-US" sz="1300" dirty="0"/>
+          </a:p>
+          <a:p>
+            <a:pPr marL="342900" indent="-342900">
+              <a:spcAft>
+                <a:spcPts val="1000"/>
+              </a:spcAft>
+              <a:buSzPct val="100000"/>
+              <a:buChar char="•"/>
+            </a:pPr>
+            <a:r>
+              <a:rPr lang="en-US" sz="1300" b="1" dirty="0">
                 <a:solidFill>
                   <a:srgbClr val="C00000"/>
                 </a:solidFill>
@@ -6268,22 +7398,22 @@
                 <a:ea typeface="Yu Gothic" pitchFamily="34" charset="-122"/>
                 <a:cs typeface="Yu Gothic" pitchFamily="34" charset="-120"/>
               </a:rPr>
-              <a:t>Product</a:t>
-            </a:r>
-            <a:endParaRPr lang="en-US" sz="1800" dirty="0"/>
-          </a:p>
-        </p:txBody>
-      </p:sp>
-      <p:sp>
-        <p:nvSpPr>
-          <p:cNvPr id="6" name="Text 4"/>
-          <p:cNvSpPr/>
-          <p:nvPr/>
-        </p:nvSpPr>
-        <p:spPr>
-          <a:xfrm>
-            <a:off x="822960" y="2313432"/>
-            <a:ext cx="4815688" cy="1005840"/>
+              <a:t>技術の中身：症状からAIが疾患を推定し、適切な医療機関を検索・案内する仕組み――「症状→最適な医療機関を選ぶ」という発想自体が、搬送先病院選定AIと本質的に同じ構造</a:t>
+            </a:r>
+            <a:endParaRPr lang="en-US" sz="1300" dirty="0"/>
+          </a:p>
+        </p:txBody>
+      </p:sp>
+      <p:sp>
+        <p:nvSpPr>
+          <p:cNvPr id="7" name="Text 5"/>
+          <p:cNvSpPr/>
+          <p:nvPr/>
+        </p:nvSpPr>
+        <p:spPr>
+          <a:xfrm>
+            <a:off x="548640" y="3611880"/>
+            <a:ext cx="11094415" cy="320040"/>
           </a:xfrm>
           <a:prstGeom prst="rect">
             <a:avLst/>
@@ -6299,7 +7429,7 @@
               <a:buNone/>
             </a:pPr>
             <a:r>
-              <a:rPr lang="en-US" sz="1350" dirty="0">
+              <a:rPr lang="en-US" sz="1500" b="1" dirty="0">
                 <a:solidFill>
                   <a:srgbClr val="000000"/>
                 </a:solidFill>
@@ -6307,26 +7437,1040 @@
                 <a:ea typeface="Yu Gothic" pitchFamily="34" charset="-122"/>
                 <a:cs typeface="Yu Gothic" pitchFamily="34" charset="-120"/>
               </a:rPr>
-              <a:t>音声AI一次予測・搬送先優先度AI・5G高精細映像を追加。ゼロ開発ではなく既存プロダクト（NSER mobile）を強化</a:t>
-            </a:r>
-            <a:endParaRPr lang="en-US" sz="1350" dirty="0"/>
-          </a:p>
-        </p:txBody>
-      </p:sp>
-      <p:sp>
-        <p:nvSpPr>
-          <p:cNvPr id="7" name="Shape 5"/>
-          <p:cNvSpPr/>
-          <p:nvPr/>
-        </p:nvSpPr>
-        <p:spPr>
-          <a:xfrm>
-            <a:off x="6278728" y="1691640"/>
-            <a:ext cx="5364328" cy="1783080"/>
+              <a:t>TXP Medicalとの違い：競合ではなく、患者動線の前後で棲み分け</a:t>
+            </a:r>
+            <a:endParaRPr lang="en-US" sz="1500" dirty="0"/>
+          </a:p>
+        </p:txBody>
+      </p:sp>
+      <p:graphicFrame>
+        <p:nvGraphicFramePr>
+          <p:cNvPr id="15" name="Table 0"/>
+          <p:cNvGraphicFramePr>
+            <a:graphicFrameLocks noGrp="1"/>
+          </p:cNvGraphicFramePr>
+          <p:nvPr>
+            <p:extLst>
+              <p:ext uri="{D42A27DB-BD31-4B8C-83A1-F6EECF244321}">
+                <p14:modId xmlns:p14="http://schemas.microsoft.com/office/powerpoint/2010/main" val="1579011935"/>
+              </p:ext>
+            </p:extLst>
+          </p:nvPr>
+        </p:nvGraphicFramePr>
+        <p:xfrm>
+          <a:off x="548640" y="3977640"/>
+          <a:ext cx="11094415" cy="914400"/>
+        </p:xfrm>
+        <a:graphic>
+          <a:graphicData uri="http://schemas.openxmlformats.org/drawingml/2006/table">
+            <a:tbl>
+              <a:tblPr/>
+              <a:tblGrid>
+                <a:gridCol w="1645920"/>
+                <a:gridCol w="4572000"/>
+                <a:gridCol w="4389120"/>
+              </a:tblGrid>
+              <a:tr h="347472">
+                <a:tc>
+                  <a:txBody>
+                    <a:bodyPr/>
+                    <a:lstStyle/>
+                    <a:p>
+                      <a:pPr indent="0" marL="0">
+                        <a:buNone/>
+                      </a:pPr>
+                      <a:endParaRPr lang="en-US" sz="1200" dirty="0">
+                        <a:latin typeface="Yu Gothic" charset="0"/>
+                        <a:ea typeface="Yu Gothic" charset="0"/>
+                        <a:cs typeface="Yu Gothic" charset="0"/>
+                      </a:endParaRPr>
+                    </a:p>
+                  </a:txBody>
+                  <a:tcPr marL="91440" marR="91440" marT="45720" marB="45720">
+                    <a:lnL w="9525" cap="flat" cmpd="sng" algn="ctr">
+                      <a:solidFill>
+                        <a:srgbClr val="D9D9D9"/>
+                      </a:solidFill>
+                      <a:prstDash val="solid"/>
+                      <a:round/>
+                      <a:headEnd type="none" w="med" len="med"/>
+                      <a:tailEnd type="none" w="med" len="med"/>
+                    </a:lnL>
+                    <a:lnR w="9525" cap="flat" cmpd="sng" algn="ctr">
+                      <a:solidFill>
+                        <a:srgbClr val="D9D9D9"/>
+                      </a:solidFill>
+                      <a:prstDash val="solid"/>
+                      <a:round/>
+                      <a:headEnd type="none" w="med" len="med"/>
+                      <a:tailEnd type="none" w="med" len="med"/>
+                    </a:lnR>
+                    <a:lnT w="9525" cap="flat" cmpd="sng" algn="ctr">
+                      <a:solidFill>
+                        <a:srgbClr val="D9D9D9"/>
+                      </a:solidFill>
+                      <a:prstDash val="solid"/>
+                      <a:round/>
+                      <a:headEnd type="none" w="med" len="med"/>
+                      <a:tailEnd type="none" w="med" len="med"/>
+                    </a:lnT>
+                    <a:lnB w="9525" cap="flat" cmpd="sng" algn="ctr">
+                      <a:solidFill>
+                        <a:srgbClr val="D9D9D9"/>
+                      </a:solidFill>
+                      <a:prstDash val="solid"/>
+                      <a:round/>
+                      <a:headEnd type="none" w="med" len="med"/>
+                      <a:tailEnd type="none" w="med" len="med"/>
+                    </a:lnB>
+                    <a:solidFill>
+                      <a:srgbClr val="000000"/>
+                    </a:solidFill>
+                  </a:tcPr>
+                </a:tc>
+                <a:tc>
+                  <a:txBody>
+                    <a:bodyPr/>
+                    <a:lstStyle/>
+                    <a:p>
+                      <a:pPr indent="0" marL="0">
+                        <a:buNone/>
+                      </a:pPr>
+                      <a:r>
+                        <a:rPr lang="en-US" sz="1200" b="1" dirty="0">
+                          <a:solidFill>
+                            <a:srgbClr val="FFFFFF"/>
+                          </a:solidFill>
+                          <a:latin typeface="Yu Gothic" pitchFamily="34" charset="0"/>
+                          <a:ea typeface="Yu Gothic" pitchFamily="34" charset="-122"/>
+                          <a:cs typeface="Yu Gothic" pitchFamily="34" charset="-120"/>
+                        </a:rPr>
+                        <a:t>TXP Medical（NSER mobile）</a:t>
+                      </a:r>
+                      <a:endParaRPr lang="en-US" sz="1200" dirty="0">
+                        <a:latin typeface="Yu Gothic" charset="0"/>
+                        <a:ea typeface="Yu Gothic" charset="0"/>
+                        <a:cs typeface="Yu Gothic" charset="0"/>
+                      </a:endParaRPr>
+                    </a:p>
+                  </a:txBody>
+                  <a:tcPr marL="91440" marR="91440" marT="45720" marB="45720">
+                    <a:lnL w="9525" cap="flat" cmpd="sng" algn="ctr">
+                      <a:solidFill>
+                        <a:srgbClr val="D9D9D9"/>
+                      </a:solidFill>
+                      <a:prstDash val="solid"/>
+                      <a:round/>
+                      <a:headEnd type="none" w="med" len="med"/>
+                      <a:tailEnd type="none" w="med" len="med"/>
+                    </a:lnL>
+                    <a:lnR w="9525" cap="flat" cmpd="sng" algn="ctr">
+                      <a:solidFill>
+                        <a:srgbClr val="D9D9D9"/>
+                      </a:solidFill>
+                      <a:prstDash val="solid"/>
+                      <a:round/>
+                      <a:headEnd type="none" w="med" len="med"/>
+                      <a:tailEnd type="none" w="med" len="med"/>
+                    </a:lnR>
+                    <a:lnT w="9525" cap="flat" cmpd="sng" algn="ctr">
+                      <a:solidFill>
+                        <a:srgbClr val="D9D9D9"/>
+                      </a:solidFill>
+                      <a:prstDash val="solid"/>
+                      <a:round/>
+                      <a:headEnd type="none" w="med" len="med"/>
+                      <a:tailEnd type="none" w="med" len="med"/>
+                    </a:lnT>
+                    <a:lnB w="9525" cap="flat" cmpd="sng" algn="ctr">
+                      <a:solidFill>
+                        <a:srgbClr val="D9D9D9"/>
+                      </a:solidFill>
+                      <a:prstDash val="solid"/>
+                      <a:round/>
+                      <a:headEnd type="none" w="med" len="med"/>
+                      <a:tailEnd type="none" w="med" len="med"/>
+                    </a:lnB>
+                    <a:solidFill>
+                      <a:srgbClr val="000000"/>
+                    </a:solidFill>
+                  </a:tcPr>
+                </a:tc>
+                <a:tc>
+                  <a:txBody>
+                    <a:bodyPr/>
+                    <a:lstStyle/>
+                    <a:p>
+                      <a:pPr indent="0" marL="0">
+                        <a:buNone/>
+                      </a:pPr>
+                      <a:r>
+                        <a:rPr lang="en-US" sz="1200" b="1" dirty="0">
+                          <a:solidFill>
+                            <a:srgbClr val="FFFFFF"/>
+                          </a:solidFill>
+                          <a:latin typeface="Yu Gothic" pitchFamily="34" charset="0"/>
+                          <a:ea typeface="Yu Gothic" pitchFamily="34" charset="-122"/>
+                          <a:cs typeface="Yu Gothic" pitchFamily="34" charset="-120"/>
+                        </a:rPr>
+                        <a:t>Ubie</a:t>
+                      </a:r>
+                      <a:endParaRPr lang="en-US" sz="1200" dirty="0">
+                        <a:latin typeface="Yu Gothic" charset="0"/>
+                        <a:ea typeface="Yu Gothic" charset="0"/>
+                        <a:cs typeface="Yu Gothic" charset="0"/>
+                      </a:endParaRPr>
+                    </a:p>
+                  </a:txBody>
+                  <a:tcPr marL="91440" marR="91440" marT="45720" marB="45720">
+                    <a:lnL w="9525" cap="flat" cmpd="sng" algn="ctr">
+                      <a:solidFill>
+                        <a:srgbClr val="D9D9D9"/>
+                      </a:solidFill>
+                      <a:prstDash val="solid"/>
+                      <a:round/>
+                      <a:headEnd type="none" w="med" len="med"/>
+                      <a:tailEnd type="none" w="med" len="med"/>
+                    </a:lnL>
+                    <a:lnR w="9525" cap="flat" cmpd="sng" algn="ctr">
+                      <a:solidFill>
+                        <a:srgbClr val="D9D9D9"/>
+                      </a:solidFill>
+                      <a:prstDash val="solid"/>
+                      <a:round/>
+                      <a:headEnd type="none" w="med" len="med"/>
+                      <a:tailEnd type="none" w="med" len="med"/>
+                    </a:lnR>
+                    <a:lnT w="9525" cap="flat" cmpd="sng" algn="ctr">
+                      <a:solidFill>
+                        <a:srgbClr val="D9D9D9"/>
+                      </a:solidFill>
+                      <a:prstDash val="solid"/>
+                      <a:round/>
+                      <a:headEnd type="none" w="med" len="med"/>
+                      <a:tailEnd type="none" w="med" len="med"/>
+                    </a:lnT>
+                    <a:lnB w="9525" cap="flat" cmpd="sng" algn="ctr">
+                      <a:solidFill>
+                        <a:srgbClr val="D9D9D9"/>
+                      </a:solidFill>
+                      <a:prstDash val="solid"/>
+                      <a:round/>
+                      <a:headEnd type="none" w="med" len="med"/>
+                      <a:tailEnd type="none" w="med" len="med"/>
+                    </a:lnB>
+                    <a:solidFill>
+                      <a:srgbClr val="000000"/>
+                    </a:solidFill>
+                  </a:tcPr>
+                </a:tc>
+              </a:tr>
+              <a:tr h="347472">
+                <a:tc>
+                  <a:txBody>
+                    <a:bodyPr/>
+                    <a:lstStyle/>
+                    <a:p>
+                      <a:pPr indent="0" marL="0">
+                        <a:buNone/>
+                      </a:pPr>
+                      <a:r>
+                        <a:rPr lang="en-US" sz="1200" b="1" dirty="0">
+                          <a:solidFill>
+                            <a:srgbClr val="000000"/>
+                          </a:solidFill>
+                          <a:latin typeface="Yu Gothic" pitchFamily="34" charset="0"/>
+                          <a:ea typeface="Yu Gothic" pitchFamily="34" charset="-122"/>
+                          <a:cs typeface="Yu Gothic" pitchFamily="34" charset="-120"/>
+                        </a:rPr>
+                        <a:t>出資元</a:t>
+                      </a:r>
+                      <a:endParaRPr lang="en-US" sz="1200" dirty="0">
+                        <a:latin typeface="Yu Gothic" charset="0"/>
+                        <a:ea typeface="Yu Gothic" charset="0"/>
+                        <a:cs typeface="Yu Gothic" charset="0"/>
+                      </a:endParaRPr>
+                    </a:p>
+                  </a:txBody>
+                  <a:tcPr marL="91440" marR="91440" marT="45720" marB="45720">
+                    <a:lnL w="9525" cap="flat" cmpd="sng" algn="ctr">
+                      <a:solidFill>
+                        <a:srgbClr val="D9D9D9"/>
+                      </a:solidFill>
+                      <a:prstDash val="solid"/>
+                      <a:round/>
+                      <a:headEnd type="none" w="med" len="med"/>
+                      <a:tailEnd type="none" w="med" len="med"/>
+                    </a:lnL>
+                    <a:lnR w="9525" cap="flat" cmpd="sng" algn="ctr">
+                      <a:solidFill>
+                        <a:srgbClr val="D9D9D9"/>
+                      </a:solidFill>
+                      <a:prstDash val="solid"/>
+                      <a:round/>
+                      <a:headEnd type="none" w="med" len="med"/>
+                      <a:tailEnd type="none" w="med" len="med"/>
+                    </a:lnR>
+                    <a:lnT w="9525" cap="flat" cmpd="sng" algn="ctr">
+                      <a:solidFill>
+                        <a:srgbClr val="D9D9D9"/>
+                      </a:solidFill>
+                      <a:prstDash val="solid"/>
+                      <a:round/>
+                      <a:headEnd type="none" w="med" len="med"/>
+                      <a:tailEnd type="none" w="med" len="med"/>
+                    </a:lnT>
+                    <a:lnB w="9525" cap="flat" cmpd="sng" algn="ctr">
+                      <a:solidFill>
+                        <a:srgbClr val="D9D9D9"/>
+                      </a:solidFill>
+                      <a:prstDash val="solid"/>
+                      <a:round/>
+                      <a:headEnd type="none" w="med" len="med"/>
+                      <a:tailEnd type="none" w="med" len="med"/>
+                    </a:lnB>
+                  </a:tcPr>
+                </a:tc>
+                <a:tc>
+                  <a:txBody>
+                    <a:bodyPr/>
+                    <a:lstStyle/>
+                    <a:p>
+                      <a:pPr indent="0" marL="0">
+                        <a:buNone/>
+                      </a:pPr>
+                      <a:r>
+                        <a:rPr lang="en-US" sz="1200" dirty="0">
+                          <a:solidFill>
+                            <a:srgbClr val="000000"/>
+                          </a:solidFill>
+                          <a:latin typeface="Yu Gothic" pitchFamily="34" charset="0"/>
+                          <a:ea typeface="Yu Gothic" pitchFamily="34" charset="-122"/>
+                          <a:cs typeface="Yu Gothic" pitchFamily="34" charset="-120"/>
+                        </a:rPr>
+                        <a:t>NTT Com（NTT子会社）</a:t>
+                      </a:r>
+                      <a:endParaRPr lang="en-US" sz="1200" dirty="0">
+                        <a:latin typeface="Yu Gothic" charset="0"/>
+                        <a:ea typeface="Yu Gothic" charset="0"/>
+                        <a:cs typeface="Yu Gothic" charset="0"/>
+                      </a:endParaRPr>
+                    </a:p>
+                  </a:txBody>
+                  <a:tcPr marL="91440" marR="91440" marT="45720" marB="45720">
+                    <a:lnL w="9525" cap="flat" cmpd="sng" algn="ctr">
+                      <a:solidFill>
+                        <a:srgbClr val="D9D9D9"/>
+                      </a:solidFill>
+                      <a:prstDash val="solid"/>
+                      <a:round/>
+                      <a:headEnd type="none" w="med" len="med"/>
+                      <a:tailEnd type="none" w="med" len="med"/>
+                    </a:lnL>
+                    <a:lnR w="9525" cap="flat" cmpd="sng" algn="ctr">
+                      <a:solidFill>
+                        <a:srgbClr val="D9D9D9"/>
+                      </a:solidFill>
+                      <a:prstDash val="solid"/>
+                      <a:round/>
+                      <a:headEnd type="none" w="med" len="med"/>
+                      <a:tailEnd type="none" w="med" len="med"/>
+                    </a:lnR>
+                    <a:lnT w="9525" cap="flat" cmpd="sng" algn="ctr">
+                      <a:solidFill>
+                        <a:srgbClr val="D9D9D9"/>
+                      </a:solidFill>
+                      <a:prstDash val="solid"/>
+                      <a:round/>
+                      <a:headEnd type="none" w="med" len="med"/>
+                      <a:tailEnd type="none" w="med" len="med"/>
+                    </a:lnT>
+                    <a:lnB w="9525" cap="flat" cmpd="sng" algn="ctr">
+                      <a:solidFill>
+                        <a:srgbClr val="D9D9D9"/>
+                      </a:solidFill>
+                      <a:prstDash val="solid"/>
+                      <a:round/>
+                      <a:headEnd type="none" w="med" len="med"/>
+                      <a:tailEnd type="none" w="med" len="med"/>
+                    </a:lnB>
+                  </a:tcPr>
+                </a:tc>
+                <a:tc>
+                  <a:txBody>
+                    <a:bodyPr/>
+                    <a:lstStyle/>
+                    <a:p>
+                      <a:pPr indent="0" marL="0">
+                        <a:buNone/>
+                      </a:pPr>
+                      <a:r>
+                        <a:rPr lang="en-US" sz="1200" b="1" dirty="0">
+                          <a:solidFill>
+                            <a:srgbClr val="C00000"/>
+                          </a:solidFill>
+                          <a:latin typeface="Yu Gothic" pitchFamily="34" charset="0"/>
+                          <a:ea typeface="Yu Gothic" pitchFamily="34" charset="-122"/>
+                          <a:cs typeface="Yu Gothic" pitchFamily="34" charset="-120"/>
+                        </a:rPr>
+                        <a:t>ドコモ本体</a:t>
+                      </a:r>
+                      <a:endParaRPr lang="en-US" sz="1200" dirty="0">
+                        <a:latin typeface="Yu Gothic" charset="0"/>
+                        <a:ea typeface="Yu Gothic" charset="0"/>
+                        <a:cs typeface="Yu Gothic" charset="0"/>
+                      </a:endParaRPr>
+                    </a:p>
+                  </a:txBody>
+                  <a:tcPr marL="91440" marR="91440" marT="45720" marB="45720">
+                    <a:lnL w="9525" cap="flat" cmpd="sng" algn="ctr">
+                      <a:solidFill>
+                        <a:srgbClr val="D9D9D9"/>
+                      </a:solidFill>
+                      <a:prstDash val="solid"/>
+                      <a:round/>
+                      <a:headEnd type="none" w="med" len="med"/>
+                      <a:tailEnd type="none" w="med" len="med"/>
+                    </a:lnL>
+                    <a:lnR w="9525" cap="flat" cmpd="sng" algn="ctr">
+                      <a:solidFill>
+                        <a:srgbClr val="D9D9D9"/>
+                      </a:solidFill>
+                      <a:prstDash val="solid"/>
+                      <a:round/>
+                      <a:headEnd type="none" w="med" len="med"/>
+                      <a:tailEnd type="none" w="med" len="med"/>
+                    </a:lnR>
+                    <a:lnT w="9525" cap="flat" cmpd="sng" algn="ctr">
+                      <a:solidFill>
+                        <a:srgbClr val="D9D9D9"/>
+                      </a:solidFill>
+                      <a:prstDash val="solid"/>
+                      <a:round/>
+                      <a:headEnd type="none" w="med" len="med"/>
+                      <a:tailEnd type="none" w="med" len="med"/>
+                    </a:lnT>
+                    <a:lnB w="9525" cap="flat" cmpd="sng" algn="ctr">
+                      <a:solidFill>
+                        <a:srgbClr val="D9D9D9"/>
+                      </a:solidFill>
+                      <a:prstDash val="solid"/>
+                      <a:round/>
+                      <a:headEnd type="none" w="med" len="med"/>
+                      <a:tailEnd type="none" w="med" len="med"/>
+                    </a:lnB>
+                  </a:tcPr>
+                </a:tc>
+              </a:tr>
+              <a:tr h="347472">
+                <a:tc>
+                  <a:txBody>
+                    <a:bodyPr/>
+                    <a:lstStyle/>
+                    <a:p>
+                      <a:pPr indent="0" marL="0">
+                        <a:buNone/>
+                      </a:pPr>
+                      <a:r>
+                        <a:rPr lang="en-US" sz="1200" b="1" dirty="0">
+                          <a:solidFill>
+                            <a:srgbClr val="000000"/>
+                          </a:solidFill>
+                          <a:latin typeface="Yu Gothic" pitchFamily="34" charset="0"/>
+                          <a:ea typeface="Yu Gothic" pitchFamily="34" charset="-122"/>
+                          <a:cs typeface="Yu Gothic" pitchFamily="34" charset="-120"/>
+                        </a:rPr>
+                        <a:t>使う場面</a:t>
+                      </a:r>
+                      <a:endParaRPr lang="en-US" sz="1200" dirty="0">
+                        <a:latin typeface="Yu Gothic" charset="0"/>
+                        <a:ea typeface="Yu Gothic" charset="0"/>
+                        <a:cs typeface="Yu Gothic" charset="0"/>
+                      </a:endParaRPr>
+                    </a:p>
+                  </a:txBody>
+                  <a:tcPr marL="91440" marR="91440" marT="45720" marB="45720">
+                    <a:lnL w="9525" cap="flat" cmpd="sng" algn="ctr">
+                      <a:solidFill>
+                        <a:srgbClr val="D9D9D9"/>
+                      </a:solidFill>
+                      <a:prstDash val="solid"/>
+                      <a:round/>
+                      <a:headEnd type="none" w="med" len="med"/>
+                      <a:tailEnd type="none" w="med" len="med"/>
+                    </a:lnL>
+                    <a:lnR w="9525" cap="flat" cmpd="sng" algn="ctr">
+                      <a:solidFill>
+                        <a:srgbClr val="D9D9D9"/>
+                      </a:solidFill>
+                      <a:prstDash val="solid"/>
+                      <a:round/>
+                      <a:headEnd type="none" w="med" len="med"/>
+                      <a:tailEnd type="none" w="med" len="med"/>
+                    </a:lnR>
+                    <a:lnT w="9525" cap="flat" cmpd="sng" algn="ctr">
+                      <a:solidFill>
+                        <a:srgbClr val="D9D9D9"/>
+                      </a:solidFill>
+                      <a:prstDash val="solid"/>
+                      <a:round/>
+                      <a:headEnd type="none" w="med" len="med"/>
+                      <a:tailEnd type="none" w="med" len="med"/>
+                    </a:lnT>
+                    <a:lnB w="9525" cap="flat" cmpd="sng" algn="ctr">
+                      <a:solidFill>
+                        <a:srgbClr val="D9D9D9"/>
+                      </a:solidFill>
+                      <a:prstDash val="solid"/>
+                      <a:round/>
+                      <a:headEnd type="none" w="med" len="med"/>
+                      <a:tailEnd type="none" w="med" len="med"/>
+                    </a:lnB>
+                  </a:tcPr>
+                </a:tc>
+                <a:tc>
+                  <a:txBody>
+                    <a:bodyPr/>
+                    <a:lstStyle/>
+                    <a:p>
+                      <a:pPr indent="0" marL="0">
+                        <a:buNone/>
+                      </a:pPr>
+                      <a:r>
+                        <a:rPr lang="en-US" sz="1200" dirty="0">
+                          <a:solidFill>
+                            <a:srgbClr val="000000"/>
+                          </a:solidFill>
+                          <a:latin typeface="Yu Gothic" pitchFamily="34" charset="0"/>
+                          <a:ea typeface="Yu Gothic" pitchFamily="34" charset="-122"/>
+                          <a:cs typeface="Yu Gothic" pitchFamily="34" charset="-120"/>
+                        </a:rPr>
+                        <a:t>救急隊が現場で使う（プロ向け）</a:t>
+                      </a:r>
+                      <a:endParaRPr lang="en-US" sz="1200" dirty="0">
+                        <a:latin typeface="Yu Gothic" charset="0"/>
+                        <a:ea typeface="Yu Gothic" charset="0"/>
+                        <a:cs typeface="Yu Gothic" charset="0"/>
+                      </a:endParaRPr>
+                    </a:p>
+                  </a:txBody>
+                  <a:tcPr marL="91440" marR="91440" marT="45720" marB="45720">
+                    <a:lnL w="9525" cap="flat" cmpd="sng" algn="ctr">
+                      <a:solidFill>
+                        <a:srgbClr val="D9D9D9"/>
+                      </a:solidFill>
+                      <a:prstDash val="solid"/>
+                      <a:round/>
+                      <a:headEnd type="none" w="med" len="med"/>
+                      <a:tailEnd type="none" w="med" len="med"/>
+                    </a:lnL>
+                    <a:lnR w="9525" cap="flat" cmpd="sng" algn="ctr">
+                      <a:solidFill>
+                        <a:srgbClr val="D9D9D9"/>
+                      </a:solidFill>
+                      <a:prstDash val="solid"/>
+                      <a:round/>
+                      <a:headEnd type="none" w="med" len="med"/>
+                      <a:tailEnd type="none" w="med" len="med"/>
+                    </a:lnR>
+                    <a:lnT w="9525" cap="flat" cmpd="sng" algn="ctr">
+                      <a:solidFill>
+                        <a:srgbClr val="D9D9D9"/>
+                      </a:solidFill>
+                      <a:prstDash val="solid"/>
+                      <a:round/>
+                      <a:headEnd type="none" w="med" len="med"/>
+                      <a:tailEnd type="none" w="med" len="med"/>
+                    </a:lnT>
+                    <a:lnB w="9525" cap="flat" cmpd="sng" algn="ctr">
+                      <a:solidFill>
+                        <a:srgbClr val="D9D9D9"/>
+                      </a:solidFill>
+                      <a:prstDash val="solid"/>
+                      <a:round/>
+                      <a:headEnd type="none" w="med" len="med"/>
+                      <a:tailEnd type="none" w="med" len="med"/>
+                    </a:lnB>
+                  </a:tcPr>
+                </a:tc>
+                <a:tc>
+                  <a:txBody>
+                    <a:bodyPr/>
+                    <a:lstStyle/>
+                    <a:p>
+                      <a:pPr indent="0" marL="0">
+                        <a:buNone/>
+                      </a:pPr>
+                      <a:r>
+                        <a:rPr lang="en-US" sz="1200" dirty="0">
+                          <a:solidFill>
+                            <a:srgbClr val="000000"/>
+                          </a:solidFill>
+                          <a:latin typeface="Yu Gothic" pitchFamily="34" charset="0"/>
+                          <a:ea typeface="Yu Gothic" pitchFamily="34" charset="-122"/>
+                          <a:cs typeface="Yu Gothic" pitchFamily="34" charset="-120"/>
+                        </a:rPr>
+                        <a:t>市民が症状を調べる（一般向け）</a:t>
+                      </a:r>
+                      <a:endParaRPr lang="en-US" sz="1200" dirty="0">
+                        <a:latin typeface="Yu Gothic" charset="0"/>
+                        <a:ea typeface="Yu Gothic" charset="0"/>
+                        <a:cs typeface="Yu Gothic" charset="0"/>
+                      </a:endParaRPr>
+                    </a:p>
+                  </a:txBody>
+                  <a:tcPr marL="91440" marR="91440" marT="45720" marB="45720">
+                    <a:lnL w="9525" cap="flat" cmpd="sng" algn="ctr">
+                      <a:solidFill>
+                        <a:srgbClr val="D9D9D9"/>
+                      </a:solidFill>
+                      <a:prstDash val="solid"/>
+                      <a:round/>
+                      <a:headEnd type="none" w="med" len="med"/>
+                      <a:tailEnd type="none" w="med" len="med"/>
+                    </a:lnL>
+                    <a:lnR w="9525" cap="flat" cmpd="sng" algn="ctr">
+                      <a:solidFill>
+                        <a:srgbClr val="D9D9D9"/>
+                      </a:solidFill>
+                      <a:prstDash val="solid"/>
+                      <a:round/>
+                      <a:headEnd type="none" w="med" len="med"/>
+                      <a:tailEnd type="none" w="med" len="med"/>
+                    </a:lnR>
+                    <a:lnT w="9525" cap="flat" cmpd="sng" algn="ctr">
+                      <a:solidFill>
+                        <a:srgbClr val="D9D9D9"/>
+                      </a:solidFill>
+                      <a:prstDash val="solid"/>
+                      <a:round/>
+                      <a:headEnd type="none" w="med" len="med"/>
+                      <a:tailEnd type="none" w="med" len="med"/>
+                    </a:lnT>
+                    <a:lnB w="9525" cap="flat" cmpd="sng" algn="ctr">
+                      <a:solidFill>
+                        <a:srgbClr val="D9D9D9"/>
+                      </a:solidFill>
+                      <a:prstDash val="solid"/>
+                      <a:round/>
+                      <a:headEnd type="none" w="med" len="med"/>
+                      <a:tailEnd type="none" w="med" len="med"/>
+                    </a:lnB>
+                  </a:tcPr>
+                </a:tc>
+              </a:tr>
+              <a:tr h="347472">
+                <a:tc>
+                  <a:txBody>
+                    <a:bodyPr/>
+                    <a:lstStyle/>
+                    <a:p>
+                      <a:pPr indent="0" marL="0">
+                        <a:buNone/>
+                      </a:pPr>
+                      <a:r>
+                        <a:rPr lang="en-US" sz="1200" b="1" dirty="0">
+                          <a:solidFill>
+                            <a:srgbClr val="000000"/>
+                          </a:solidFill>
+                          <a:latin typeface="Yu Gothic" pitchFamily="34" charset="0"/>
+                          <a:ea typeface="Yu Gothic" pitchFamily="34" charset="-122"/>
+                          <a:cs typeface="Yu Gothic" pitchFamily="34" charset="-120"/>
+                        </a:rPr>
+                        <a:t>フェーズ</a:t>
+                      </a:r>
+                      <a:endParaRPr lang="en-US" sz="1200" dirty="0">
+                        <a:latin typeface="Yu Gothic" charset="0"/>
+                        <a:ea typeface="Yu Gothic" charset="0"/>
+                        <a:cs typeface="Yu Gothic" charset="0"/>
+                      </a:endParaRPr>
+                    </a:p>
+                  </a:txBody>
+                  <a:tcPr marL="91440" marR="91440" marT="45720" marB="45720">
+                    <a:lnL w="9525" cap="flat" cmpd="sng" algn="ctr">
+                      <a:solidFill>
+                        <a:srgbClr val="D9D9D9"/>
+                      </a:solidFill>
+                      <a:prstDash val="solid"/>
+                      <a:round/>
+                      <a:headEnd type="none" w="med" len="med"/>
+                      <a:tailEnd type="none" w="med" len="med"/>
+                    </a:lnL>
+                    <a:lnR w="9525" cap="flat" cmpd="sng" algn="ctr">
+                      <a:solidFill>
+                        <a:srgbClr val="D9D9D9"/>
+                      </a:solidFill>
+                      <a:prstDash val="solid"/>
+                      <a:round/>
+                      <a:headEnd type="none" w="med" len="med"/>
+                      <a:tailEnd type="none" w="med" len="med"/>
+                    </a:lnR>
+                    <a:lnT w="9525" cap="flat" cmpd="sng" algn="ctr">
+                      <a:solidFill>
+                        <a:srgbClr val="D9D9D9"/>
+                      </a:solidFill>
+                      <a:prstDash val="solid"/>
+                      <a:round/>
+                      <a:headEnd type="none" w="med" len="med"/>
+                      <a:tailEnd type="none" w="med" len="med"/>
+                    </a:lnT>
+                    <a:lnB w="9525" cap="flat" cmpd="sng" algn="ctr">
+                      <a:solidFill>
+                        <a:srgbClr val="D9D9D9"/>
+                      </a:solidFill>
+                      <a:prstDash val="solid"/>
+                      <a:round/>
+                      <a:headEnd type="none" w="med" len="med"/>
+                      <a:tailEnd type="none" w="med" len="med"/>
+                    </a:lnB>
+                  </a:tcPr>
+                </a:tc>
+                <a:tc>
+                  <a:txBody>
+                    <a:bodyPr/>
+                    <a:lstStyle/>
+                    <a:p>
+                      <a:pPr indent="0" marL="0">
+                        <a:buNone/>
+                      </a:pPr>
+                      <a:r>
+                        <a:rPr lang="en-US" sz="1200" dirty="0">
+                          <a:solidFill>
+                            <a:srgbClr val="000000"/>
+                          </a:solidFill>
+                          <a:latin typeface="Yu Gothic" pitchFamily="34" charset="0"/>
+                          <a:ea typeface="Yu Gothic" pitchFamily="34" charset="-122"/>
+                          <a:cs typeface="Yu Gothic" pitchFamily="34" charset="-120"/>
+                        </a:rPr>
+                        <a:t>搬送中〜病院到着</a:t>
+                      </a:r>
+                      <a:endParaRPr lang="en-US" sz="1200" dirty="0">
+                        <a:latin typeface="Yu Gothic" charset="0"/>
+                        <a:ea typeface="Yu Gothic" charset="0"/>
+                        <a:cs typeface="Yu Gothic" charset="0"/>
+                      </a:endParaRPr>
+                    </a:p>
+                  </a:txBody>
+                  <a:tcPr marL="91440" marR="91440" marT="45720" marB="45720">
+                    <a:lnL w="9525" cap="flat" cmpd="sng" algn="ctr">
+                      <a:solidFill>
+                        <a:srgbClr val="D9D9D9"/>
+                      </a:solidFill>
+                      <a:prstDash val="solid"/>
+                      <a:round/>
+                      <a:headEnd type="none" w="med" len="med"/>
+                      <a:tailEnd type="none" w="med" len="med"/>
+                    </a:lnL>
+                    <a:lnR w="9525" cap="flat" cmpd="sng" algn="ctr">
+                      <a:solidFill>
+                        <a:srgbClr val="D9D9D9"/>
+                      </a:solidFill>
+                      <a:prstDash val="solid"/>
+                      <a:round/>
+                      <a:headEnd type="none" w="med" len="med"/>
+                      <a:tailEnd type="none" w="med" len="med"/>
+                    </a:lnR>
+                    <a:lnT w="9525" cap="flat" cmpd="sng" algn="ctr">
+                      <a:solidFill>
+                        <a:srgbClr val="D9D9D9"/>
+                      </a:solidFill>
+                      <a:prstDash val="solid"/>
+                      <a:round/>
+                      <a:headEnd type="none" w="med" len="med"/>
+                      <a:tailEnd type="none" w="med" len="med"/>
+                    </a:lnT>
+                    <a:lnB w="9525" cap="flat" cmpd="sng" algn="ctr">
+                      <a:solidFill>
+                        <a:srgbClr val="D9D9D9"/>
+                      </a:solidFill>
+                      <a:prstDash val="solid"/>
+                      <a:round/>
+                      <a:headEnd type="none" w="med" len="med"/>
+                      <a:tailEnd type="none" w="med" len="med"/>
+                    </a:lnB>
+                  </a:tcPr>
+                </a:tc>
+                <a:tc>
+                  <a:txBody>
+                    <a:bodyPr/>
+                    <a:lstStyle/>
+                    <a:p>
+                      <a:pPr indent="0" marL="0">
+                        <a:buNone/>
+                      </a:pPr>
+                      <a:r>
+                        <a:rPr lang="en-US" sz="1200" dirty="0">
+                          <a:solidFill>
+                            <a:srgbClr val="000000"/>
+                          </a:solidFill>
+                          <a:latin typeface="Yu Gothic" pitchFamily="34" charset="0"/>
+                          <a:ea typeface="Yu Gothic" pitchFamily="34" charset="-122"/>
+                          <a:cs typeface="Yu Gothic" pitchFamily="34" charset="-120"/>
+                        </a:rPr>
+                        <a:t>発症〜受診判断（覚知の手前）</a:t>
+                      </a:r>
+                      <a:endParaRPr lang="en-US" sz="1200" dirty="0">
+                        <a:latin typeface="Yu Gothic" charset="0"/>
+                        <a:ea typeface="Yu Gothic" charset="0"/>
+                        <a:cs typeface="Yu Gothic" charset="0"/>
+                      </a:endParaRPr>
+                    </a:p>
+                  </a:txBody>
+                  <a:tcPr marL="91440" marR="91440" marT="45720" marB="45720">
+                    <a:lnL w="9525" cap="flat" cmpd="sng" algn="ctr">
+                      <a:solidFill>
+                        <a:srgbClr val="D9D9D9"/>
+                      </a:solidFill>
+                      <a:prstDash val="solid"/>
+                      <a:round/>
+                      <a:headEnd type="none" w="med" len="med"/>
+                      <a:tailEnd type="none" w="med" len="med"/>
+                    </a:lnL>
+                    <a:lnR w="9525" cap="flat" cmpd="sng" algn="ctr">
+                      <a:solidFill>
+                        <a:srgbClr val="D9D9D9"/>
+                      </a:solidFill>
+                      <a:prstDash val="solid"/>
+                      <a:round/>
+                      <a:headEnd type="none" w="med" len="med"/>
+                      <a:tailEnd type="none" w="med" len="med"/>
+                    </a:lnR>
+                    <a:lnT w="9525" cap="flat" cmpd="sng" algn="ctr">
+                      <a:solidFill>
+                        <a:srgbClr val="D9D9D9"/>
+                      </a:solidFill>
+                      <a:prstDash val="solid"/>
+                      <a:round/>
+                      <a:headEnd type="none" w="med" len="med"/>
+                      <a:tailEnd type="none" w="med" len="med"/>
+                    </a:lnT>
+                    <a:lnB w="9525" cap="flat" cmpd="sng" algn="ctr">
+                      <a:solidFill>
+                        <a:srgbClr val="D9D9D9"/>
+                      </a:solidFill>
+                      <a:prstDash val="solid"/>
+                      <a:round/>
+                      <a:headEnd type="none" w="med" len="med"/>
+                      <a:tailEnd type="none" w="med" len="med"/>
+                    </a:lnB>
+                  </a:tcPr>
+                </a:tc>
+              </a:tr>
+              <a:tr h="347472">
+                <a:tc>
+                  <a:txBody>
+                    <a:bodyPr/>
+                    <a:lstStyle/>
+                    <a:p>
+                      <a:pPr indent="0" marL="0">
+                        <a:buNone/>
+                      </a:pPr>
+                      <a:r>
+                        <a:rPr lang="en-US" sz="1200" b="1" dirty="0">
+                          <a:solidFill>
+                            <a:srgbClr val="000000"/>
+                          </a:solidFill>
+                          <a:latin typeface="Yu Gothic" pitchFamily="34" charset="0"/>
+                          <a:ea typeface="Yu Gothic" pitchFamily="34" charset="-122"/>
+                          <a:cs typeface="Yu Gothic" pitchFamily="34" charset="-120"/>
+                        </a:rPr>
+                        <a:t>医療機関接点</a:t>
+                      </a:r>
+                      <a:endParaRPr lang="en-US" sz="1200" dirty="0">
+                        <a:latin typeface="Yu Gothic" charset="0"/>
+                        <a:ea typeface="Yu Gothic" charset="0"/>
+                        <a:cs typeface="Yu Gothic" charset="0"/>
+                      </a:endParaRPr>
+                    </a:p>
+                  </a:txBody>
+                  <a:tcPr marL="91440" marR="91440" marT="45720" marB="45720">
+                    <a:lnL w="9525" cap="flat" cmpd="sng" algn="ctr">
+                      <a:solidFill>
+                        <a:srgbClr val="D9D9D9"/>
+                      </a:solidFill>
+                      <a:prstDash val="solid"/>
+                      <a:round/>
+                      <a:headEnd type="none" w="med" len="med"/>
+                      <a:tailEnd type="none" w="med" len="med"/>
+                    </a:lnL>
+                    <a:lnR w="9525" cap="flat" cmpd="sng" algn="ctr">
+                      <a:solidFill>
+                        <a:srgbClr val="D9D9D9"/>
+                      </a:solidFill>
+                      <a:prstDash val="solid"/>
+                      <a:round/>
+                      <a:headEnd type="none" w="med" len="med"/>
+                      <a:tailEnd type="none" w="med" len="med"/>
+                    </a:lnR>
+                    <a:lnT w="9525" cap="flat" cmpd="sng" algn="ctr">
+                      <a:solidFill>
+                        <a:srgbClr val="D9D9D9"/>
+                      </a:solidFill>
+                      <a:prstDash val="solid"/>
+                      <a:round/>
+                      <a:headEnd type="none" w="med" len="med"/>
+                      <a:tailEnd type="none" w="med" len="med"/>
+                    </a:lnT>
+                    <a:lnB w="9525" cap="flat" cmpd="sng" algn="ctr">
+                      <a:solidFill>
+                        <a:srgbClr val="D9D9D9"/>
+                      </a:solidFill>
+                      <a:prstDash val="solid"/>
+                      <a:round/>
+                      <a:headEnd type="none" w="med" len="med"/>
+                      <a:tailEnd type="none" w="med" len="med"/>
+                    </a:lnB>
+                  </a:tcPr>
+                </a:tc>
+                <a:tc>
+                  <a:txBody>
+                    <a:bodyPr/>
+                    <a:lstStyle/>
+                    <a:p>
+                      <a:pPr indent="0" marL="0">
+                        <a:buNone/>
+                      </a:pPr>
+                      <a:r>
+                        <a:rPr lang="en-US" sz="1200" dirty="0">
+                          <a:solidFill>
+                            <a:srgbClr val="000000"/>
+                          </a:solidFill>
+                          <a:latin typeface="Yu Gothic" pitchFamily="34" charset="0"/>
+                          <a:ea typeface="Yu Gothic" pitchFamily="34" charset="-122"/>
+                          <a:cs typeface="Yu Gothic" pitchFamily="34" charset="-120"/>
+                        </a:rPr>
+                        <a:t>消防本部経由</a:t>
+                      </a:r>
+                      <a:endParaRPr lang="en-US" sz="1200" dirty="0">
+                        <a:latin typeface="Yu Gothic" charset="0"/>
+                        <a:ea typeface="Yu Gothic" charset="0"/>
+                        <a:cs typeface="Yu Gothic" charset="0"/>
+                      </a:endParaRPr>
+                    </a:p>
+                  </a:txBody>
+                  <a:tcPr marL="91440" marR="91440" marT="45720" marB="45720">
+                    <a:lnL w="9525" cap="flat" cmpd="sng" algn="ctr">
+                      <a:solidFill>
+                        <a:srgbClr val="D9D9D9"/>
+                      </a:solidFill>
+                      <a:prstDash val="solid"/>
+                      <a:round/>
+                      <a:headEnd type="none" w="med" len="med"/>
+                      <a:tailEnd type="none" w="med" len="med"/>
+                    </a:lnL>
+                    <a:lnR w="9525" cap="flat" cmpd="sng" algn="ctr">
+                      <a:solidFill>
+                        <a:srgbClr val="D9D9D9"/>
+                      </a:solidFill>
+                      <a:prstDash val="solid"/>
+                      <a:round/>
+                      <a:headEnd type="none" w="med" len="med"/>
+                      <a:tailEnd type="none" w="med" len="med"/>
+                    </a:lnR>
+                    <a:lnT w="9525" cap="flat" cmpd="sng" algn="ctr">
+                      <a:solidFill>
+                        <a:srgbClr val="D9D9D9"/>
+                      </a:solidFill>
+                      <a:prstDash val="solid"/>
+                      <a:round/>
+                      <a:headEnd type="none" w="med" len="med"/>
+                      <a:tailEnd type="none" w="med" len="med"/>
+                    </a:lnT>
+                    <a:lnB w="9525" cap="flat" cmpd="sng" algn="ctr">
+                      <a:solidFill>
+                        <a:srgbClr val="D9D9D9"/>
+                      </a:solidFill>
+                      <a:prstDash val="solid"/>
+                      <a:round/>
+                      <a:headEnd type="none" w="med" len="med"/>
+                      <a:tailEnd type="none" w="med" len="med"/>
+                    </a:lnB>
+                  </a:tcPr>
+                </a:tc>
+                <a:tc>
+                  <a:txBody>
+                    <a:bodyPr/>
+                    <a:lstStyle/>
+                    <a:p>
+                      <a:pPr indent="0" marL="0">
+                        <a:buNone/>
+                      </a:pPr>
+                      <a:r>
+                        <a:rPr lang="en-US" sz="1200" b="1" dirty="0">
+                          <a:solidFill>
+                            <a:srgbClr val="C00000"/>
+                          </a:solidFill>
+                          <a:latin typeface="Yu Gothic" pitchFamily="34" charset="0"/>
+                          <a:ea typeface="Yu Gothic" pitchFamily="34" charset="-122"/>
+                          <a:cs typeface="Yu Gothic" pitchFamily="34" charset="-120"/>
+                        </a:rPr>
+                        <a:t>全国1,800医療機関に直接導入済み</a:t>
+                      </a:r>
+                      <a:endParaRPr lang="en-US" sz="1200" dirty="0">
+                        <a:latin typeface="Yu Gothic" charset="0"/>
+                        <a:ea typeface="Yu Gothic" charset="0"/>
+                        <a:cs typeface="Yu Gothic" charset="0"/>
+                      </a:endParaRPr>
+                    </a:p>
+                  </a:txBody>
+                  <a:tcPr marL="91440" marR="91440" marT="45720" marB="45720">
+                    <a:lnL w="9525" cap="flat" cmpd="sng" algn="ctr">
+                      <a:solidFill>
+                        <a:srgbClr val="D9D9D9"/>
+                      </a:solidFill>
+                      <a:prstDash val="solid"/>
+                      <a:round/>
+                      <a:headEnd type="none" w="med" len="med"/>
+                      <a:tailEnd type="none" w="med" len="med"/>
+                    </a:lnL>
+                    <a:lnR w="9525" cap="flat" cmpd="sng" algn="ctr">
+                      <a:solidFill>
+                        <a:srgbClr val="D9D9D9"/>
+                      </a:solidFill>
+                      <a:prstDash val="solid"/>
+                      <a:round/>
+                      <a:headEnd type="none" w="med" len="med"/>
+                      <a:tailEnd type="none" w="med" len="med"/>
+                    </a:lnR>
+                    <a:lnT w="9525" cap="flat" cmpd="sng" algn="ctr">
+                      <a:solidFill>
+                        <a:srgbClr val="D9D9D9"/>
+                      </a:solidFill>
+                      <a:prstDash val="solid"/>
+                      <a:round/>
+                      <a:headEnd type="none" w="med" len="med"/>
+                      <a:tailEnd type="none" w="med" len="med"/>
+                    </a:lnT>
+                    <a:lnB w="9525" cap="flat" cmpd="sng" algn="ctr">
+                      <a:solidFill>
+                        <a:srgbClr val="D9D9D9"/>
+                      </a:solidFill>
+                      <a:prstDash val="solid"/>
+                      <a:round/>
+                      <a:headEnd type="none" w="med" len="med"/>
+                      <a:tailEnd type="none" w="med" len="med"/>
+                    </a:lnB>
+                  </a:tcPr>
+                </a:tc>
+              </a:tr>
+            </a:tbl>
+          </a:graphicData>
+        </a:graphic>
+      </p:graphicFrame>
+      <p:sp>
+        <p:nvSpPr>
+          <p:cNvPr id="9" name="Shape 6"/>
+          <p:cNvSpPr/>
+          <p:nvPr/>
+        </p:nvSpPr>
+        <p:spPr>
+          <a:xfrm>
+            <a:off x="548640" y="5806440"/>
+            <a:ext cx="11094415" cy="457200"/>
           </a:xfrm>
           <a:prstGeom prst="roundRect">
             <a:avLst>
-              <a:gd name="adj" fmla="val 4103"/>
+              <a:gd name="adj" fmla="val 16000"/>
             </a:avLst>
           </a:prstGeom>
           <a:solidFill>
@@ -6338,25 +8482,18 @@
             </a:solidFill>
             <a:prstDash val="solid"/>
           </a:ln>
-          <a:effectLst>
-            <a:outerShdw sx="100000" sy="100000" kx="0" ky="0" algn="bl" rotWithShape="0" blurRad="76200" dist="25400" dir="5400000">
-              <a:srgbClr val="000000">
-                <a:alpha val="12000"/>
-              </a:srgbClr>
-            </a:outerShdw>
-          </a:effectLst>
-        </p:spPr>
-      </p:sp>
-      <p:sp>
-        <p:nvSpPr>
-          <p:cNvPr id="8" name="Text 6"/>
-          <p:cNvSpPr/>
-          <p:nvPr/>
-        </p:nvSpPr>
-        <p:spPr>
-          <a:xfrm>
-            <a:off x="6553048" y="1856232"/>
-            <a:ext cx="4815688" cy="411480"/>
+        </p:spPr>
+      </p:sp>
+      <p:sp>
+        <p:nvSpPr>
+          <p:cNvPr id="10" name="Text 7"/>
+          <p:cNvSpPr/>
+          <p:nvPr/>
+        </p:nvSpPr>
+        <p:spPr>
+          <a:xfrm>
+            <a:off x="777240" y="5806440"/>
+            <a:ext cx="10637215" cy="457200"/>
           </a:xfrm>
           <a:prstGeom prst="rect">
             <a:avLst/>
@@ -6372,46 +8509,7 @@
               <a:buNone/>
             </a:pPr>
             <a:r>
-              <a:rPr lang="en-US" sz="1800" b="1" dirty="0">
-                <a:solidFill>
-                  <a:srgbClr val="C00000"/>
-                </a:solidFill>
-                <a:latin typeface="Yu Gothic" pitchFamily="34" charset="0"/>
-                <a:ea typeface="Yu Gothic" pitchFamily="34" charset="-122"/>
-                <a:cs typeface="Yu Gothic" pitchFamily="34" charset="-120"/>
-              </a:rPr>
-              <a:t>Price</a:t>
-            </a:r>
-            <a:endParaRPr lang="en-US" sz="1800" dirty="0"/>
-          </a:p>
-        </p:txBody>
-      </p:sp>
-      <p:sp>
-        <p:nvSpPr>
-          <p:cNvPr id="9" name="Text 7"/>
-          <p:cNvSpPr/>
-          <p:nvPr/>
-        </p:nvSpPr>
-        <p:spPr>
-          <a:xfrm>
-            <a:off x="6553048" y="2313432"/>
-            <a:ext cx="4815688" cy="1005840"/>
-          </a:xfrm>
-          <a:prstGeom prst="rect">
-            <a:avLst/>
-          </a:prstGeom>
-          <a:noFill/>
-          <a:ln/>
-        </p:spPr>
-        <p:txBody>
-          <a:bodyPr wrap="square" lIns="0" tIns="0" rIns="0" bIns="0" rtlCol="0" anchor="ctr"/>
-          <a:lstStyle/>
-          <a:p>
-            <a:pPr indent="0" marL="0">
-              <a:buNone/>
-            </a:pPr>
-            <a:r>
-              <a:rPr lang="en-US" sz="1350" dirty="0">
+              <a:rPr lang="en-US" sz="1200" b="1" dirty="0">
                 <a:solidFill>
                   <a:srgbClr val="000000"/>
                 </a:solidFill>
@@ -6419,270 +8517,7 @@
                 <a:ea typeface="Yu Gothic" pitchFamily="34" charset="-122"/>
                 <a:cs typeface="Yu Gothic" pitchFamily="34" charset="-120"/>
               </a:rPr>
-              <a:t>ドコモの既存通信アセットを活用するため、新規開発より低コストで提供可能</a:t>
-            </a:r>
-            <a:endParaRPr lang="en-US" sz="1350" dirty="0"/>
-          </a:p>
-        </p:txBody>
-      </p:sp>
-      <p:sp>
-        <p:nvSpPr>
-          <p:cNvPr id="10" name="Shape 8"/>
-          <p:cNvSpPr/>
-          <p:nvPr/>
-        </p:nvSpPr>
-        <p:spPr>
-          <a:xfrm>
-            <a:off x="548640" y="3749040"/>
-            <a:ext cx="5364328" cy="1783080"/>
-          </a:xfrm>
-          <a:prstGeom prst="roundRect">
-            <a:avLst>
-              <a:gd name="adj" fmla="val 4103"/>
-            </a:avLst>
-          </a:prstGeom>
-          <a:solidFill>
-            <a:srgbClr val="F2F2F2"/>
-          </a:solidFill>
-          <a:ln w="9525">
-            <a:solidFill>
-              <a:srgbClr val="D9D9D9"/>
-            </a:solidFill>
-            <a:prstDash val="solid"/>
-          </a:ln>
-          <a:effectLst>
-            <a:outerShdw sx="100000" sy="100000" kx="0" ky="0" algn="bl" rotWithShape="0" blurRad="76200" dist="25400" dir="5400000">
-              <a:srgbClr val="000000">
-                <a:alpha val="12000"/>
-              </a:srgbClr>
-            </a:outerShdw>
-          </a:effectLst>
-        </p:spPr>
-      </p:sp>
-      <p:sp>
-        <p:nvSpPr>
-          <p:cNvPr id="11" name="Text 9"/>
-          <p:cNvSpPr/>
-          <p:nvPr/>
-        </p:nvSpPr>
-        <p:spPr>
-          <a:xfrm>
-            <a:off x="822960" y="3913632"/>
-            <a:ext cx="4815688" cy="411480"/>
-          </a:xfrm>
-          <a:prstGeom prst="rect">
-            <a:avLst/>
-          </a:prstGeom>
-          <a:noFill/>
-          <a:ln/>
-        </p:spPr>
-        <p:txBody>
-          <a:bodyPr wrap="square" lIns="0" tIns="0" rIns="0" bIns="0" rtlCol="0" anchor="ctr"/>
-          <a:lstStyle/>
-          <a:p>
-            <a:pPr indent="0" marL="0">
-              <a:buNone/>
-            </a:pPr>
-            <a:r>
-              <a:rPr lang="en-US" sz="1800" b="1" dirty="0">
-                <a:solidFill>
-                  <a:srgbClr val="C00000"/>
-                </a:solidFill>
-                <a:latin typeface="Yu Gothic" pitchFamily="34" charset="0"/>
-                <a:ea typeface="Yu Gothic" pitchFamily="34" charset="-122"/>
-                <a:cs typeface="Yu Gothic" pitchFamily="34" charset="-120"/>
-              </a:rPr>
-              <a:t>Place</a:t>
-            </a:r>
-            <a:endParaRPr lang="en-US" sz="1800" dirty="0"/>
-          </a:p>
-        </p:txBody>
-      </p:sp>
-      <p:sp>
-        <p:nvSpPr>
-          <p:cNvPr id="12" name="Text 10"/>
-          <p:cNvSpPr/>
-          <p:nvPr/>
-        </p:nvSpPr>
-        <p:spPr>
-          <a:xfrm>
-            <a:off x="822960" y="4370832"/>
-            <a:ext cx="4815688" cy="1005840"/>
-          </a:xfrm>
-          <a:prstGeom prst="rect">
-            <a:avLst/>
-          </a:prstGeom>
-          <a:noFill/>
-          <a:ln/>
-        </p:spPr>
-        <p:txBody>
-          <a:bodyPr wrap="square" lIns="0" tIns="0" rIns="0" bIns="0" rtlCol="0" anchor="ctr"/>
-          <a:lstStyle/>
-          <a:p>
-            <a:pPr indent="0" marL="0">
-              <a:buNone/>
-            </a:pPr>
-            <a:r>
-              <a:rPr lang="en-US" sz="1350" dirty="0">
-                <a:solidFill>
-                  <a:srgbClr val="000000"/>
-                </a:solidFill>
-                <a:latin typeface="Yu Gothic" pitchFamily="34" charset="0"/>
-                <a:ea typeface="Yu Gothic" pitchFamily="34" charset="-122"/>
-                <a:cs typeface="Yu Gothic" pitchFamily="34" charset="-120"/>
-              </a:rPr>
-              <a:t>TXP Medicalが持つ病院・自治体との既存契約関係を、そのまま販売経路として活用</a:t>
-            </a:r>
-            <a:endParaRPr lang="en-US" sz="1350" dirty="0"/>
-          </a:p>
-        </p:txBody>
-      </p:sp>
-      <p:sp>
-        <p:nvSpPr>
-          <p:cNvPr id="13" name="Shape 11"/>
-          <p:cNvSpPr/>
-          <p:nvPr/>
-        </p:nvSpPr>
-        <p:spPr>
-          <a:xfrm>
-            <a:off x="6278728" y="3749040"/>
-            <a:ext cx="5364328" cy="1783080"/>
-          </a:xfrm>
-          <a:prstGeom prst="roundRect">
-            <a:avLst>
-              <a:gd name="adj" fmla="val 4103"/>
-            </a:avLst>
-          </a:prstGeom>
-          <a:solidFill>
-            <a:srgbClr val="F2F2F2"/>
-          </a:solidFill>
-          <a:ln w="9525">
-            <a:solidFill>
-              <a:srgbClr val="D9D9D9"/>
-            </a:solidFill>
-            <a:prstDash val="solid"/>
-          </a:ln>
-          <a:effectLst>
-            <a:outerShdw sx="100000" sy="100000" kx="0" ky="0" algn="bl" rotWithShape="0" blurRad="76200" dist="25400" dir="5400000">
-              <a:srgbClr val="000000">
-                <a:alpha val="12000"/>
-              </a:srgbClr>
-            </a:outerShdw>
-          </a:effectLst>
-        </p:spPr>
-      </p:sp>
-      <p:sp>
-        <p:nvSpPr>
-          <p:cNvPr id="14" name="Text 12"/>
-          <p:cNvSpPr/>
-          <p:nvPr/>
-        </p:nvSpPr>
-        <p:spPr>
-          <a:xfrm>
-            <a:off x="6553048" y="3913632"/>
-            <a:ext cx="4815688" cy="411480"/>
-          </a:xfrm>
-          <a:prstGeom prst="rect">
-            <a:avLst/>
-          </a:prstGeom>
-          <a:noFill/>
-          <a:ln/>
-        </p:spPr>
-        <p:txBody>
-          <a:bodyPr wrap="square" lIns="0" tIns="0" rIns="0" bIns="0" rtlCol="0" anchor="ctr"/>
-          <a:lstStyle/>
-          <a:p>
-            <a:pPr indent="0" marL="0">
-              <a:buNone/>
-            </a:pPr>
-            <a:r>
-              <a:rPr lang="en-US" sz="1800" b="1" dirty="0">
-                <a:solidFill>
-                  <a:srgbClr val="C00000"/>
-                </a:solidFill>
-                <a:latin typeface="Yu Gothic" pitchFamily="34" charset="0"/>
-                <a:ea typeface="Yu Gothic" pitchFamily="34" charset="-122"/>
-                <a:cs typeface="Yu Gothic" pitchFamily="34" charset="-120"/>
-              </a:rPr>
-              <a:t>Promotion</a:t>
-            </a:r>
-            <a:endParaRPr lang="en-US" sz="1800" dirty="0"/>
-          </a:p>
-        </p:txBody>
-      </p:sp>
-      <p:sp>
-        <p:nvSpPr>
-          <p:cNvPr id="15" name="Text 13"/>
-          <p:cNvSpPr/>
-          <p:nvPr/>
-        </p:nvSpPr>
-        <p:spPr>
-          <a:xfrm>
-            <a:off x="6553048" y="4370832"/>
-            <a:ext cx="4815688" cy="1005840"/>
-          </a:xfrm>
-          <a:prstGeom prst="rect">
-            <a:avLst/>
-          </a:prstGeom>
-          <a:noFill/>
-          <a:ln/>
-        </p:spPr>
-        <p:txBody>
-          <a:bodyPr wrap="square" lIns="0" tIns="0" rIns="0" bIns="0" rtlCol="0" anchor="ctr"/>
-          <a:lstStyle/>
-          <a:p>
-            <a:pPr indent="0" marL="0">
-              <a:buNone/>
-            </a:pPr>
-            <a:r>
-              <a:rPr lang="en-US" sz="1350" dirty="0">
-                <a:solidFill>
-                  <a:srgbClr val="000000"/>
-                </a:solidFill>
-                <a:latin typeface="Yu Gothic" pitchFamily="34" charset="0"/>
-                <a:ea typeface="Yu Gothic" pitchFamily="34" charset="-122"/>
-                <a:cs typeface="Yu Gothic" pitchFamily="34" charset="-120"/>
-              </a:rPr>
-              <a:t>ドコモの知名度 × TXP Medicalの導入実績（51自治体）を掛け合わせて訴求</a:t>
-            </a:r>
-            <a:endParaRPr lang="en-US" sz="1350" dirty="0"/>
-          </a:p>
-        </p:txBody>
-      </p:sp>
-      <p:sp>
-        <p:nvSpPr>
-          <p:cNvPr id="16" name="Text 14"/>
-          <p:cNvSpPr/>
-          <p:nvPr/>
-        </p:nvSpPr>
-        <p:spPr>
-          <a:xfrm>
-            <a:off x="548640" y="5897880"/>
-            <a:ext cx="10545775" cy="365760"/>
-          </a:xfrm>
-          <a:prstGeom prst="rect">
-            <a:avLst/>
-          </a:prstGeom>
-          <a:noFill/>
-          <a:ln/>
-        </p:spPr>
-        <p:txBody>
-          <a:bodyPr wrap="square" lIns="0" tIns="0" rIns="0" bIns="0" rtlCol="0" anchor="ctr"/>
-          <a:lstStyle/>
-          <a:p>
-            <a:pPr indent="0" marL="0">
-              <a:buNone/>
-            </a:pPr>
-            <a:r>
-              <a:rPr lang="en-US" sz="1200" i="1" dirty="0">
-                <a:solidFill>
-                  <a:srgbClr val="595959"/>
-                </a:solidFill>
-                <a:latin typeface="Yu Gothic" pitchFamily="34" charset="0"/>
-                <a:ea typeface="Yu Gothic" pitchFamily="34" charset="-122"/>
-                <a:cs typeface="Yu Gothic" pitchFamily="34" charset="-120"/>
-              </a:rPr>
-              <a:t>① Product ～ ④ Promotion のいずれも、TXP Medicalとの連携によって「ゼロからのスタート」ではなく「既存アセットの強化」として設計できる</a:t>
+              <a:t>示唆：Ubie（発症〜受診判断）× TXP Medical陣営（搬送〜病院収容）を組み合わせれば、動線全体をドコモがカバーできる</a:t>
             </a:r>
             <a:endParaRPr lang="en-US" sz="1200" dirty="0"/>
           </a:p>
@@ -6690,7 +8525,7 @@
       </p:sp>
       <p:sp>
         <p:nvSpPr>
-          <p:cNvPr id="17" name="Text 15"/>
+          <p:cNvPr id="11" name="Text 8"/>
           <p:cNvSpPr/>
           <p:nvPr/>
         </p:nvSpPr>
@@ -6792,7 +8627,7 @@
                 <a:ea typeface="Yu Gothic" pitchFamily="34" charset="-122"/>
                 <a:cs typeface="Yu Gothic" pitchFamily="34" charset="-120"/>
               </a:rPr>
-              <a:t>まとめ</a:t>
+              <a:t>3C ②</a:t>
             </a:r>
             <a:endParaRPr lang="en-US" sz="1300" dirty="0"/>
           </a:p>
@@ -6831,7 +8666,7 @@
                 <a:ea typeface="Yu Gothic" pitchFamily="34" charset="-122"/>
                 <a:cs typeface="Yu Gothic" pitchFamily="34" charset="-120"/>
               </a:rPr>
-              <a:t>残された機会とネクストアクション</a:t>
+              <a:t>3C分析</a:t>
             </a:r>
             <a:endParaRPr lang="en-US" sz="2800" dirty="0"/>
           </a:p>
@@ -6846,11 +8681,405 @@
         <p:spPr>
           <a:xfrm>
             <a:off x="548640" y="1691640"/>
-            <a:ext cx="11094415" cy="1188720"/>
+            <a:ext cx="3515258" cy="3931920"/>
           </a:xfrm>
           <a:prstGeom prst="roundRect">
             <a:avLst>
-              <a:gd name="adj" fmla="val 6154"/>
+              <a:gd name="adj" fmla="val 2081"/>
+            </a:avLst>
+          </a:prstGeom>
+          <a:solidFill>
+            <a:srgbClr val="FFFFFF"/>
+          </a:solidFill>
+          <a:ln w="9525">
+            <a:solidFill>
+              <a:srgbClr val="D9D9D9"/>
+            </a:solidFill>
+            <a:prstDash val="solid"/>
+          </a:ln>
+          <a:effectLst>
+            <a:outerShdw sx="100000" sy="100000" kx="0" ky="0" algn="bl" rotWithShape="0" blurRad="76200" dist="25400" dir="5400000">
+              <a:srgbClr val="000000">
+                <a:alpha val="12000"/>
+              </a:srgbClr>
+            </a:outerShdw>
+          </a:effectLst>
+        </p:spPr>
+      </p:sp>
+      <p:sp>
+        <p:nvSpPr>
+          <p:cNvPr id="5" name="Text 3"/>
+          <p:cNvSpPr/>
+          <p:nvPr/>
+        </p:nvSpPr>
+        <p:spPr>
+          <a:xfrm>
+            <a:off x="777240" y="1874520"/>
+            <a:ext cx="3058058" cy="365760"/>
+          </a:xfrm>
+          <a:prstGeom prst="rect">
+            <a:avLst/>
+          </a:prstGeom>
+          <a:noFill/>
+          <a:ln/>
+        </p:spPr>
+        <p:txBody>
+          <a:bodyPr wrap="square" lIns="0" tIns="0" rIns="0" bIns="0" rtlCol="0" anchor="ctr"/>
+          <a:lstStyle/>
+          <a:p>
+            <a:pPr indent="0" marL="0">
+              <a:buNone/>
+            </a:pPr>
+            <a:r>
+              <a:rPr lang="en-US" sz="1700" b="1" dirty="0">
+                <a:solidFill>
+                  <a:srgbClr val="C00000"/>
+                </a:solidFill>
+                <a:latin typeface="Yu Gothic" pitchFamily="34" charset="0"/>
+                <a:ea typeface="Yu Gothic" pitchFamily="34" charset="-122"/>
+                <a:cs typeface="Yu Gothic" pitchFamily="34" charset="-120"/>
+              </a:rPr>
+              <a:t>Customer</a:t>
+            </a:r>
+            <a:endParaRPr lang="en-US" sz="1700" dirty="0"/>
+          </a:p>
+        </p:txBody>
+      </p:sp>
+      <p:sp>
+        <p:nvSpPr>
+          <p:cNvPr id="6" name="Text 4"/>
+          <p:cNvSpPr/>
+          <p:nvPr/>
+        </p:nvSpPr>
+        <p:spPr>
+          <a:xfrm>
+            <a:off x="777240" y="2240280"/>
+            <a:ext cx="3058058" cy="320040"/>
+          </a:xfrm>
+          <a:prstGeom prst="rect">
+            <a:avLst/>
+          </a:prstGeom>
+          <a:noFill/>
+          <a:ln/>
+        </p:spPr>
+        <p:txBody>
+          <a:bodyPr wrap="square" lIns="0" tIns="0" rIns="0" bIns="0" rtlCol="0" anchor="ctr"/>
+          <a:lstStyle/>
+          <a:p>
+            <a:pPr indent="0" marL="0">
+              <a:buNone/>
+            </a:pPr>
+            <a:r>
+              <a:rPr lang="en-US" sz="1200" dirty="0">
+                <a:solidFill>
+                  <a:srgbClr val="595959"/>
+                </a:solidFill>
+                <a:latin typeface="Yu Gothic" pitchFamily="34" charset="0"/>
+                <a:ea typeface="Yu Gothic" pitchFamily="34" charset="-122"/>
+                <a:cs typeface="Yu Gothic" pitchFamily="34" charset="-120"/>
+              </a:rPr>
+              <a:t>顧客・市場</a:t>
+            </a:r>
+            <a:endParaRPr lang="en-US" sz="1200" dirty="0"/>
+          </a:p>
+        </p:txBody>
+      </p:sp>
+      <p:sp>
+        <p:nvSpPr>
+          <p:cNvPr id="7" name="Text 5"/>
+          <p:cNvSpPr/>
+          <p:nvPr/>
+        </p:nvSpPr>
+        <p:spPr>
+          <a:xfrm>
+            <a:off x="777240" y="2651760"/>
+            <a:ext cx="3058058" cy="2834640"/>
+          </a:xfrm>
+          <a:prstGeom prst="rect">
+            <a:avLst/>
+          </a:prstGeom>
+          <a:noFill/>
+          <a:ln/>
+        </p:spPr>
+        <p:txBody>
+          <a:bodyPr wrap="square" lIns="0" tIns="0" rIns="0" bIns="0" rtlCol="0" anchor="t"/>
+          <a:lstStyle/>
+          <a:p>
+            <a:pPr marL="342900" indent="-342900">
+              <a:spcAft>
+                <a:spcPts val="1000"/>
+              </a:spcAft>
+              <a:buSzPct val="100000"/>
+              <a:buChar char="•"/>
+            </a:pPr>
+            <a:r>
+              <a:rPr lang="en-US" sz="1250" dirty="0">
+                <a:solidFill>
+                  <a:srgbClr val="000000"/>
+                </a:solidFill>
+                <a:latin typeface="Yu Gothic" pitchFamily="34" charset="0"/>
+                <a:ea typeface="Yu Gothic" pitchFamily="34" charset="-122"/>
+                <a:cs typeface="Yu Gothic" pitchFamily="34" charset="-120"/>
+              </a:rPr>
+              <a:t>顧客（払う人）：消防本部／自治体／厚労省</a:t>
+            </a:r>
+            <a:endParaRPr lang="en-US" sz="1250" dirty="0"/>
+          </a:p>
+          <a:p>
+            <a:pPr marL="342900" indent="-342900">
+              <a:spcAft>
+                <a:spcPts val="1000"/>
+              </a:spcAft>
+              <a:buSzPct val="100000"/>
+              <a:buChar char="•"/>
+            </a:pPr>
+            <a:r>
+              <a:rPr lang="en-US" sz="1250" dirty="0">
+                <a:solidFill>
+                  <a:srgbClr val="000000"/>
+                </a:solidFill>
+                <a:latin typeface="Yu Gothic" pitchFamily="34" charset="0"/>
+                <a:ea typeface="Yu Gothic" pitchFamily="34" charset="-122"/>
+                <a:cs typeface="Yu Gothic" pitchFamily="34" charset="-120"/>
+              </a:rPr>
+              <a:t>ユーザー（困っている人）：患者</a:t>
+            </a:r>
+            <a:endParaRPr lang="en-US" sz="1250" dirty="0"/>
+          </a:p>
+          <a:p>
+            <a:pPr marL="342900" indent="-342900">
+              <a:spcAft>
+                <a:spcPts val="1000"/>
+              </a:spcAft>
+              <a:buSzPct val="100000"/>
+              <a:buChar char="•"/>
+            </a:pPr>
+            <a:r>
+              <a:rPr lang="en-US" sz="1250" dirty="0">
+                <a:solidFill>
+                  <a:srgbClr val="000000"/>
+                </a:solidFill>
+                <a:latin typeface="Yu Gothic" pitchFamily="34" charset="0"/>
+                <a:ea typeface="Yu Gothic" pitchFamily="34" charset="-122"/>
+                <a:cs typeface="Yu Gothic" pitchFamily="34" charset="-120"/>
+              </a:rPr>
+              <a:t>顧客とユーザーが分離した市場構造</a:t>
+            </a:r>
+            <a:endParaRPr lang="en-US" sz="1250" dirty="0"/>
+          </a:p>
+        </p:txBody>
+      </p:sp>
+      <p:sp>
+        <p:nvSpPr>
+          <p:cNvPr id="8" name="Shape 6"/>
+          <p:cNvSpPr/>
+          <p:nvPr/>
+        </p:nvSpPr>
+        <p:spPr>
+          <a:xfrm>
+            <a:off x="4338218" y="1691640"/>
+            <a:ext cx="3515258" cy="3931920"/>
+          </a:xfrm>
+          <a:prstGeom prst="roundRect">
+            <a:avLst>
+              <a:gd name="adj" fmla="val 2081"/>
+            </a:avLst>
+          </a:prstGeom>
+          <a:solidFill>
+            <a:srgbClr val="FFFFFF"/>
+          </a:solidFill>
+          <a:ln w="9525">
+            <a:solidFill>
+              <a:srgbClr val="D9D9D9"/>
+            </a:solidFill>
+            <a:prstDash val="solid"/>
+          </a:ln>
+          <a:effectLst>
+            <a:outerShdw sx="100000" sy="100000" kx="0" ky="0" algn="bl" rotWithShape="0" blurRad="76200" dist="25400" dir="5400000">
+              <a:srgbClr val="000000">
+                <a:alpha val="12000"/>
+              </a:srgbClr>
+            </a:outerShdw>
+          </a:effectLst>
+        </p:spPr>
+      </p:sp>
+      <p:sp>
+        <p:nvSpPr>
+          <p:cNvPr id="9" name="Text 7"/>
+          <p:cNvSpPr/>
+          <p:nvPr/>
+        </p:nvSpPr>
+        <p:spPr>
+          <a:xfrm>
+            <a:off x="4566818" y="1874520"/>
+            <a:ext cx="3058058" cy="365760"/>
+          </a:xfrm>
+          <a:prstGeom prst="rect">
+            <a:avLst/>
+          </a:prstGeom>
+          <a:noFill/>
+          <a:ln/>
+        </p:spPr>
+        <p:txBody>
+          <a:bodyPr wrap="square" lIns="0" tIns="0" rIns="0" bIns="0" rtlCol="0" anchor="ctr"/>
+          <a:lstStyle/>
+          <a:p>
+            <a:pPr indent="0" marL="0">
+              <a:buNone/>
+            </a:pPr>
+            <a:r>
+              <a:rPr lang="en-US" sz="1700" b="1" dirty="0">
+                <a:solidFill>
+                  <a:srgbClr val="C00000"/>
+                </a:solidFill>
+                <a:latin typeface="Yu Gothic" pitchFamily="34" charset="0"/>
+                <a:ea typeface="Yu Gothic" pitchFamily="34" charset="-122"/>
+                <a:cs typeface="Yu Gothic" pitchFamily="34" charset="-120"/>
+              </a:rPr>
+              <a:t>Competitor</a:t>
+            </a:r>
+            <a:endParaRPr lang="en-US" sz="1700" dirty="0"/>
+          </a:p>
+        </p:txBody>
+      </p:sp>
+      <p:sp>
+        <p:nvSpPr>
+          <p:cNvPr id="10" name="Text 8"/>
+          <p:cNvSpPr/>
+          <p:nvPr/>
+        </p:nvSpPr>
+        <p:spPr>
+          <a:xfrm>
+            <a:off x="4566818" y="2240280"/>
+            <a:ext cx="3058058" cy="320040"/>
+          </a:xfrm>
+          <a:prstGeom prst="rect">
+            <a:avLst/>
+          </a:prstGeom>
+          <a:noFill/>
+          <a:ln/>
+        </p:spPr>
+        <p:txBody>
+          <a:bodyPr wrap="square" lIns="0" tIns="0" rIns="0" bIns="0" rtlCol="0" anchor="ctr"/>
+          <a:lstStyle/>
+          <a:p>
+            <a:pPr indent="0" marL="0">
+              <a:buNone/>
+            </a:pPr>
+            <a:r>
+              <a:rPr lang="en-US" sz="1200" dirty="0">
+                <a:solidFill>
+                  <a:srgbClr val="595959"/>
+                </a:solidFill>
+                <a:latin typeface="Yu Gothic" pitchFamily="34" charset="0"/>
+                <a:ea typeface="Yu Gothic" pitchFamily="34" charset="-122"/>
+                <a:cs typeface="Yu Gothic" pitchFamily="34" charset="-120"/>
+              </a:rPr>
+              <a:t>競合</a:t>
+            </a:r>
+            <a:endParaRPr lang="en-US" sz="1200" dirty="0"/>
+          </a:p>
+        </p:txBody>
+      </p:sp>
+      <p:sp>
+        <p:nvSpPr>
+          <p:cNvPr id="11" name="Text 9"/>
+          <p:cNvSpPr/>
+          <p:nvPr/>
+        </p:nvSpPr>
+        <p:spPr>
+          <a:xfrm>
+            <a:off x="4566818" y="2651760"/>
+            <a:ext cx="3058058" cy="2834640"/>
+          </a:xfrm>
+          <a:prstGeom prst="rect">
+            <a:avLst/>
+          </a:prstGeom>
+          <a:noFill/>
+          <a:ln/>
+        </p:spPr>
+        <p:txBody>
+          <a:bodyPr wrap="square" lIns="0" tIns="0" rIns="0" bIns="0" rtlCol="0" anchor="t"/>
+          <a:lstStyle/>
+          <a:p>
+            <a:pPr marL="342900" indent="-342900">
+              <a:spcAft>
+                <a:spcPts val="1000"/>
+              </a:spcAft>
+              <a:buSzPct val="100000"/>
+              <a:buChar char="•"/>
+            </a:pPr>
+            <a:r>
+              <a:rPr lang="en-US" sz="1250" dirty="0">
+                <a:solidFill>
+                  <a:srgbClr val="000000"/>
+                </a:solidFill>
+                <a:latin typeface="Yu Gothic" pitchFamily="34" charset="0"/>
+                <a:ea typeface="Yu Gothic" pitchFamily="34" charset="-122"/>
+                <a:cs typeface="Yu Gothic" pitchFamily="34" charset="-120"/>
+              </a:rPr>
+              <a:t>TXP Medical（NSER mobile）：資金力24.6億円、51自治体で実績</a:t>
+            </a:r>
+            <a:endParaRPr lang="en-US" sz="1250" dirty="0"/>
+          </a:p>
+          <a:p>
+            <a:pPr marL="342900" indent="-342900">
+              <a:spcAft>
+                <a:spcPts val="1000"/>
+              </a:spcAft>
+              <a:buSzPct val="100000"/>
+              <a:buChar char="•"/>
+            </a:pPr>
+            <a:r>
+              <a:rPr lang="en-US" sz="1250" dirty="0">
+                <a:solidFill>
+                  <a:srgbClr val="000000"/>
+                </a:solidFill>
+                <a:latin typeface="Yu Gothic" pitchFamily="34" charset="0"/>
+                <a:ea typeface="Yu Gothic" pitchFamily="34" charset="-122"/>
+                <a:cs typeface="Yu Gothic" pitchFamily="34" charset="-120"/>
+              </a:rPr>
+              <a:t>Smart119・消防庁直轄AI実証</a:t>
+            </a:r>
+            <a:endParaRPr lang="en-US" sz="1250" dirty="0"/>
+          </a:p>
+          <a:p>
+            <a:pPr marL="342900" indent="-342900">
+              <a:spcAft>
+                <a:spcPts val="1000"/>
+              </a:spcAft>
+              <a:buSzPct val="100000"/>
+              <a:buChar char="•"/>
+            </a:pPr>
+            <a:r>
+              <a:rPr lang="en-US" sz="1250" dirty="0">
+                <a:solidFill>
+                  <a:srgbClr val="000000"/>
+                </a:solidFill>
+                <a:latin typeface="Yu Gothic" pitchFamily="34" charset="0"/>
+                <a:ea typeface="Yu Gothic" pitchFamily="34" charset="-122"/>
+                <a:cs typeface="Yu Gothic" pitchFamily="34" charset="-120"/>
+              </a:rPr>
+              <a:t>情報共有レイヤーは競合が先行</a:t>
+            </a:r>
+            <a:endParaRPr lang="en-US" sz="1250" dirty="0"/>
+          </a:p>
+        </p:txBody>
+      </p:sp>
+      <p:sp>
+        <p:nvSpPr>
+          <p:cNvPr id="12" name="Shape 10"/>
+          <p:cNvSpPr/>
+          <p:nvPr/>
+        </p:nvSpPr>
+        <p:spPr>
+          <a:xfrm>
+            <a:off x="8127797" y="1691640"/>
+            <a:ext cx="3515258" cy="3931920"/>
+          </a:xfrm>
+          <a:prstGeom prst="roundRect">
+            <a:avLst>
+              <a:gd name="adj" fmla="val 2081"/>
             </a:avLst>
           </a:prstGeom>
           <a:solidFill>
@@ -6873,14 +9102,14 @@
       </p:sp>
       <p:sp>
         <p:nvSpPr>
-          <p:cNvPr id="5" name="Text 3"/>
-          <p:cNvSpPr/>
-          <p:nvPr/>
-        </p:nvSpPr>
-        <p:spPr>
-          <a:xfrm>
-            <a:off x="822960" y="1828800"/>
-            <a:ext cx="10545775" cy="320040"/>
+          <p:cNvPr id="13" name="Text 11"/>
+          <p:cNvSpPr/>
+          <p:nvPr/>
+        </p:nvSpPr>
+        <p:spPr>
+          <a:xfrm>
+            <a:off x="8356397" y="1874520"/>
+            <a:ext cx="3058058" cy="365760"/>
           </a:xfrm>
           <a:prstGeom prst="rect">
             <a:avLst/>
@@ -6896,30 +9125,30 @@
               <a:buNone/>
             </a:pPr>
             <a:r>
-              <a:rPr lang="en-US" sz="1500" b="1" dirty="0">
-                <a:solidFill>
-                  <a:srgbClr val="000000"/>
-                </a:solidFill>
-                <a:latin typeface="Yu Gothic" pitchFamily="34" charset="0"/>
-                <a:ea typeface="Yu Gothic" pitchFamily="34" charset="-122"/>
-                <a:cs typeface="Yu Gothic" pitchFamily="34" charset="-120"/>
-              </a:rPr>
-              <a:t>残された機会</a:t>
-            </a:r>
-            <a:endParaRPr lang="en-US" sz="1500" dirty="0"/>
-          </a:p>
-        </p:txBody>
-      </p:sp>
-      <p:sp>
-        <p:nvSpPr>
-          <p:cNvPr id="6" name="Text 4"/>
-          <p:cNvSpPr/>
-          <p:nvPr/>
-        </p:nvSpPr>
-        <p:spPr>
-          <a:xfrm>
-            <a:off x="822960" y="2148840"/>
-            <a:ext cx="10545775" cy="640080"/>
+              <a:rPr lang="en-US" sz="1700" b="1" dirty="0">
+                <a:solidFill>
+                  <a:srgbClr val="C00000"/>
+                </a:solidFill>
+                <a:latin typeface="Yu Gothic" pitchFamily="34" charset="0"/>
+                <a:ea typeface="Yu Gothic" pitchFamily="34" charset="-122"/>
+                <a:cs typeface="Yu Gothic" pitchFamily="34" charset="-120"/>
+              </a:rPr>
+              <a:t>Company</a:t>
+            </a:r>
+            <a:endParaRPr lang="en-US" sz="1700" dirty="0"/>
+          </a:p>
+        </p:txBody>
+      </p:sp>
+      <p:sp>
+        <p:nvSpPr>
+          <p:cNvPr id="14" name="Text 12"/>
+          <p:cNvSpPr/>
+          <p:nvPr/>
+        </p:nvSpPr>
+        <p:spPr>
+          <a:xfrm>
+            <a:off x="8356397" y="2240280"/>
+            <a:ext cx="3058058" cy="320040"/>
           </a:xfrm>
           <a:prstGeom prst="rect">
             <a:avLst/>
@@ -6935,69 +9164,30 @@
               <a:buNone/>
             </a:pPr>
             <a:r>
-              <a:rPr lang="en-US" sz="1350" dirty="0">
-                <a:solidFill>
-                  <a:srgbClr val="000000"/>
-                </a:solidFill>
-                <a:latin typeface="Yu Gothic" pitchFamily="34" charset="0"/>
-                <a:ea typeface="Yu Gothic" pitchFamily="34" charset="-122"/>
-                <a:cs typeface="Yu Gothic" pitchFamily="34" charset="-120"/>
-              </a:rPr>
-              <a:t>転送理由の52.1%を占める「処置困難」に対し、AIによる病院選定精度の向上と5G高精細映像によって、搬送前に処置可否を確定させる仕組みは、まだ全国的には存在しない</a:t>
-            </a:r>
-            <a:endParaRPr lang="en-US" sz="1350" dirty="0"/>
-          </a:p>
-        </p:txBody>
-      </p:sp>
-      <p:sp>
-        <p:nvSpPr>
-          <p:cNvPr id="7" name="Text 5"/>
-          <p:cNvSpPr/>
-          <p:nvPr/>
-        </p:nvSpPr>
-        <p:spPr>
-          <a:xfrm>
-            <a:off x="548640" y="3063240"/>
-            <a:ext cx="11094415" cy="365760"/>
-          </a:xfrm>
-          <a:prstGeom prst="rect">
-            <a:avLst/>
-          </a:prstGeom>
-          <a:noFill/>
-          <a:ln/>
-        </p:spPr>
-        <p:txBody>
-          <a:bodyPr wrap="square" lIns="0" tIns="0" rIns="0" bIns="0" rtlCol="0" anchor="ctr"/>
-          <a:lstStyle/>
-          <a:p>
-            <a:pPr indent="0" marL="0">
-              <a:buNone/>
-            </a:pPr>
-            <a:r>
-              <a:rPr lang="en-US" sz="1600" b="1" dirty="0">
-                <a:solidFill>
-                  <a:srgbClr val="000000"/>
-                </a:solidFill>
-                <a:latin typeface="Yu Gothic" pitchFamily="34" charset="0"/>
-                <a:ea typeface="Yu Gothic" pitchFamily="34" charset="-122"/>
-                <a:cs typeface="Yu Gothic" pitchFamily="34" charset="-120"/>
-              </a:rPr>
-              <a:t>ネクストアクション</a:t>
-            </a:r>
-            <a:endParaRPr lang="en-US" sz="1600" dirty="0"/>
-          </a:p>
-        </p:txBody>
-      </p:sp>
-      <p:sp>
-        <p:nvSpPr>
-          <p:cNvPr id="8" name="Text 6"/>
-          <p:cNvSpPr/>
-          <p:nvPr/>
-        </p:nvSpPr>
-        <p:spPr>
-          <a:xfrm>
-            <a:off x="548640" y="3520440"/>
-            <a:ext cx="11094415" cy="2377440"/>
+              <a:rPr lang="en-US" sz="1200" dirty="0">
+                <a:solidFill>
+                  <a:srgbClr val="595959"/>
+                </a:solidFill>
+                <a:latin typeface="Yu Gothic" pitchFamily="34" charset="0"/>
+                <a:ea typeface="Yu Gothic" pitchFamily="34" charset="-122"/>
+                <a:cs typeface="Yu Gothic" pitchFamily="34" charset="-120"/>
+              </a:rPr>
+              <a:t>自社</a:t>
+            </a:r>
+            <a:endParaRPr lang="en-US" sz="1200" dirty="0"/>
+          </a:p>
+        </p:txBody>
+      </p:sp>
+      <p:sp>
+        <p:nvSpPr>
+          <p:cNvPr id="15" name="Text 13"/>
+          <p:cNvSpPr/>
+          <p:nvPr/>
+        </p:nvSpPr>
+        <p:spPr>
+          <a:xfrm>
+            <a:off x="8356397" y="2651760"/>
+            <a:ext cx="3058058" cy="2834640"/>
           </a:xfrm>
           <a:prstGeom prst="rect">
             <a:avLst/>
@@ -7011,13 +9201,13 @@
           <a:p>
             <a:pPr marL="342900" indent="-342900">
               <a:spcAft>
-                <a:spcPts val="1600"/>
+                <a:spcPts val="1000"/>
               </a:spcAft>
               <a:buSzPct val="100000"/>
               <a:buChar char="•"/>
             </a:pPr>
             <a:r>
-              <a:rPr lang="en-US" sz="1450" dirty="0">
+              <a:rPr lang="en-US" sz="1250" dirty="0">
                 <a:solidFill>
                   <a:srgbClr val="000000"/>
                 </a:solidFill>
@@ -7025,20 +9215,20 @@
                 <a:ea typeface="Yu Gothic" pitchFamily="34" charset="-122"/>
                 <a:cs typeface="Yu Gothic" pitchFamily="34" charset="-120"/>
               </a:rPr>
-              <a:t>TXP Medical社との具体的な連携スキームを検討する（資本提携の対象範囲を、RWD事業からEMS領域へ拡張できるか）</a:t>
-            </a:r>
-            <a:endParaRPr lang="en-US" sz="1450" dirty="0"/>
+              <a:t>全国規模の通信網と5G</a:t>
+            </a:r>
+            <a:endParaRPr lang="en-US" sz="1250" dirty="0"/>
           </a:p>
           <a:p>
             <a:pPr marL="342900" indent="-342900">
               <a:spcAft>
-                <a:spcPts val="1600"/>
+                <a:spcPts val="1000"/>
               </a:spcAft>
               <a:buSzPct val="100000"/>
               <a:buChar char="•"/>
             </a:pPr>
             <a:r>
-              <a:rPr lang="en-US" sz="1450" dirty="0">
+              <a:rPr lang="en-US" sz="1250" dirty="0">
                 <a:solidFill>
                   <a:srgbClr val="000000"/>
                 </a:solidFill>
@@ -7046,20 +9236,20 @@
                 <a:ea typeface="Yu Gothic" pitchFamily="34" charset="-122"/>
                 <a:cs typeface="Yu Gothic" pitchFamily="34" charset="-120"/>
               </a:rPr>
-              <a:t>消防庁・厚生労働省の一次データへアクセスし、転送削減効果の精緻な試算を行う</a:t>
-            </a:r>
-            <a:endParaRPr lang="en-US" sz="1450" dirty="0"/>
+              <a:t>モバイル空間統計・LAM技術</a:t>
+            </a:r>
+            <a:endParaRPr lang="en-US" sz="1250" dirty="0"/>
           </a:p>
           <a:p>
             <a:pPr marL="342900" indent="-342900">
               <a:spcAft>
-                <a:spcPts val="1600"/>
+                <a:spcPts val="1000"/>
               </a:spcAft>
               <a:buSzPct val="100000"/>
               <a:buChar char="•"/>
             </a:pPr>
             <a:r>
-              <a:rPr lang="en-US" sz="1450" dirty="0">
+              <a:rPr lang="en-US" sz="1250" dirty="0">
                 <a:solidFill>
                   <a:srgbClr val="000000"/>
                 </a:solidFill>
@@ -7067,36 +9257,15 @@
                 <a:ea typeface="Yu Gothic" pitchFamily="34" charset="-122"/>
                 <a:cs typeface="Yu Gothic" pitchFamily="34" charset="-120"/>
               </a:rPr>
-              <a:t>VSL（統計的生命価値）を用いた社会的便益の金額換算を精緻化する</a:t>
-            </a:r>
-            <a:endParaRPr lang="en-US" sz="1450" dirty="0"/>
-          </a:p>
-          <a:p>
-            <a:pPr marL="342900" indent="-342900">
-              <a:spcAft>
-                <a:spcPts val="1600"/>
-              </a:spcAft>
-              <a:buSzPct val="100000"/>
-              <a:buChar char="•"/>
-            </a:pPr>
-            <a:r>
-              <a:rPr lang="en-US" sz="1450" dirty="0">
-                <a:solidFill>
-                  <a:srgbClr val="000000"/>
-                </a:solidFill>
-                <a:latin typeface="Yu Gothic" pitchFamily="34" charset="0"/>
-                <a:ea typeface="Yu Gothic" pitchFamily="34" charset="-122"/>
-                <a:cs typeface="Yu Gothic" pitchFamily="34" charset="-120"/>
-              </a:rPr>
-              <a:t>PoC対象となる自治体・消防本部を選定する</a:t>
-            </a:r>
-            <a:endParaRPr lang="en-US" sz="1450" dirty="0"/>
-          </a:p>
-        </p:txBody>
-      </p:sp>
-      <p:sp>
-        <p:nvSpPr>
-          <p:cNvPr id="9" name="Text 7"/>
+              <a:t>NTT Com×TXP Medicalの資本関係という土台</a:t>
+            </a:r>
+            <a:endParaRPr lang="en-US" sz="1250" dirty="0"/>
+          </a:p>
+        </p:txBody>
+      </p:sp>
+      <p:sp>
+        <p:nvSpPr>
+          <p:cNvPr id="16" name="Text 14"/>
           <p:cNvSpPr/>
           <p:nvPr/>
         </p:nvSpPr>
@@ -7198,7 +9367,7 @@
                 <a:ea typeface="Yu Gothic" pitchFamily="34" charset="-122"/>
                 <a:cs typeface="Yu Gothic" pitchFamily="34" charset="-120"/>
               </a:rPr>
-              <a:t>APPENDIX</a:t>
+              <a:t>3C/4P</a:t>
             </a:r>
             <a:endParaRPr lang="en-US" sz="1300" dirty="0"/>
           </a:p>
@@ -7237,7 +9406,7 @@
                 <a:ea typeface="Yu Gothic" pitchFamily="34" charset="-122"/>
                 <a:cs typeface="Yu Gothic" pitchFamily="34" charset="-120"/>
               </a:rPr>
-              <a:t>出典一覧</a:t>
+              <a:t>4P分析 ― TXP Medical連携による優位性</a:t>
             </a:r>
             <a:endParaRPr lang="en-US" sz="2800" dirty="0"/>
           </a:p>
@@ -7245,14 +9414,801 @@
       </p:sp>
       <p:sp>
         <p:nvSpPr>
-          <p:cNvPr id="4" name="Text 2"/>
-          <p:cNvSpPr/>
-          <p:nvPr/>
-        </p:nvSpPr>
-        <p:spPr>
-          <a:xfrm>
-            <a:off x="548640" y="1737360"/>
-            <a:ext cx="11094415" cy="4572000"/>
+          <p:cNvPr id="4" name="Shape 2"/>
+          <p:cNvSpPr/>
+          <p:nvPr/>
+        </p:nvSpPr>
+        <p:spPr>
+          <a:xfrm>
+            <a:off x="548640" y="1691640"/>
+            <a:ext cx="5364328" cy="1783080"/>
+          </a:xfrm>
+          <a:prstGeom prst="roundRect">
+            <a:avLst>
+              <a:gd name="adj" fmla="val 4103"/>
+            </a:avLst>
+          </a:prstGeom>
+          <a:solidFill>
+            <a:srgbClr val="F2F2F2"/>
+          </a:solidFill>
+          <a:ln w="9525">
+            <a:solidFill>
+              <a:srgbClr val="D9D9D9"/>
+            </a:solidFill>
+            <a:prstDash val="solid"/>
+          </a:ln>
+          <a:effectLst>
+            <a:outerShdw sx="100000" sy="100000" kx="0" ky="0" algn="bl" rotWithShape="0" blurRad="76200" dist="25400" dir="5400000">
+              <a:srgbClr val="000000">
+                <a:alpha val="12000"/>
+              </a:srgbClr>
+            </a:outerShdw>
+          </a:effectLst>
+        </p:spPr>
+      </p:sp>
+      <p:sp>
+        <p:nvSpPr>
+          <p:cNvPr id="5" name="Text 3"/>
+          <p:cNvSpPr/>
+          <p:nvPr/>
+        </p:nvSpPr>
+        <p:spPr>
+          <a:xfrm>
+            <a:off x="822960" y="1856232"/>
+            <a:ext cx="4815688" cy="411480"/>
+          </a:xfrm>
+          <a:prstGeom prst="rect">
+            <a:avLst/>
+          </a:prstGeom>
+          <a:noFill/>
+          <a:ln/>
+        </p:spPr>
+        <p:txBody>
+          <a:bodyPr wrap="square" lIns="0" tIns="0" rIns="0" bIns="0" rtlCol="0" anchor="ctr"/>
+          <a:lstStyle/>
+          <a:p>
+            <a:pPr indent="0" marL="0">
+              <a:buNone/>
+            </a:pPr>
+            <a:r>
+              <a:rPr lang="en-US" sz="1800" b="1" dirty="0">
+                <a:solidFill>
+                  <a:srgbClr val="C00000"/>
+                </a:solidFill>
+                <a:latin typeface="Yu Gothic" pitchFamily="34" charset="0"/>
+                <a:ea typeface="Yu Gothic" pitchFamily="34" charset="-122"/>
+                <a:cs typeface="Yu Gothic" pitchFamily="34" charset="-120"/>
+              </a:rPr>
+              <a:t>Product</a:t>
+            </a:r>
+            <a:endParaRPr lang="en-US" sz="1800" dirty="0"/>
+          </a:p>
+        </p:txBody>
+      </p:sp>
+      <p:sp>
+        <p:nvSpPr>
+          <p:cNvPr id="6" name="Text 4"/>
+          <p:cNvSpPr/>
+          <p:nvPr/>
+        </p:nvSpPr>
+        <p:spPr>
+          <a:xfrm>
+            <a:off x="822960" y="2313432"/>
+            <a:ext cx="4815688" cy="1005840"/>
+          </a:xfrm>
+          <a:prstGeom prst="rect">
+            <a:avLst/>
+          </a:prstGeom>
+          <a:noFill/>
+          <a:ln/>
+        </p:spPr>
+        <p:txBody>
+          <a:bodyPr wrap="square" lIns="0" tIns="0" rIns="0" bIns="0" rtlCol="0" anchor="ctr"/>
+          <a:lstStyle/>
+          <a:p>
+            <a:pPr indent="0" marL="0">
+              <a:buNone/>
+            </a:pPr>
+            <a:r>
+              <a:rPr lang="en-US" sz="1350" dirty="0">
+                <a:solidFill>
+                  <a:srgbClr val="000000"/>
+                </a:solidFill>
+                <a:latin typeface="Yu Gothic" pitchFamily="34" charset="0"/>
+                <a:ea typeface="Yu Gothic" pitchFamily="34" charset="-122"/>
+                <a:cs typeface="Yu Gothic" pitchFamily="34" charset="-120"/>
+              </a:rPr>
+              <a:t>音声AI一次予測・搬送先優先度AI・5G高精細映像を追加。ゼロ開発ではなく既存プロダクト（NSER mobile）を強化</a:t>
+            </a:r>
+            <a:endParaRPr lang="en-US" sz="1350" dirty="0"/>
+          </a:p>
+        </p:txBody>
+      </p:sp>
+      <p:sp>
+        <p:nvSpPr>
+          <p:cNvPr id="7" name="Shape 5"/>
+          <p:cNvSpPr/>
+          <p:nvPr/>
+        </p:nvSpPr>
+        <p:spPr>
+          <a:xfrm>
+            <a:off x="6278728" y="1691640"/>
+            <a:ext cx="5364328" cy="1783080"/>
+          </a:xfrm>
+          <a:prstGeom prst="roundRect">
+            <a:avLst>
+              <a:gd name="adj" fmla="val 4103"/>
+            </a:avLst>
+          </a:prstGeom>
+          <a:solidFill>
+            <a:srgbClr val="F2F2F2"/>
+          </a:solidFill>
+          <a:ln w="9525">
+            <a:solidFill>
+              <a:srgbClr val="D9D9D9"/>
+            </a:solidFill>
+            <a:prstDash val="solid"/>
+          </a:ln>
+          <a:effectLst>
+            <a:outerShdw sx="100000" sy="100000" kx="0" ky="0" algn="bl" rotWithShape="0" blurRad="76200" dist="25400" dir="5400000">
+              <a:srgbClr val="000000">
+                <a:alpha val="12000"/>
+              </a:srgbClr>
+            </a:outerShdw>
+          </a:effectLst>
+        </p:spPr>
+      </p:sp>
+      <p:sp>
+        <p:nvSpPr>
+          <p:cNvPr id="8" name="Text 6"/>
+          <p:cNvSpPr/>
+          <p:nvPr/>
+        </p:nvSpPr>
+        <p:spPr>
+          <a:xfrm>
+            <a:off x="6553048" y="1856232"/>
+            <a:ext cx="4815688" cy="411480"/>
+          </a:xfrm>
+          <a:prstGeom prst="rect">
+            <a:avLst/>
+          </a:prstGeom>
+          <a:noFill/>
+          <a:ln/>
+        </p:spPr>
+        <p:txBody>
+          <a:bodyPr wrap="square" lIns="0" tIns="0" rIns="0" bIns="0" rtlCol="0" anchor="ctr"/>
+          <a:lstStyle/>
+          <a:p>
+            <a:pPr indent="0" marL="0">
+              <a:buNone/>
+            </a:pPr>
+            <a:r>
+              <a:rPr lang="en-US" sz="1800" b="1" dirty="0">
+                <a:solidFill>
+                  <a:srgbClr val="C00000"/>
+                </a:solidFill>
+                <a:latin typeface="Yu Gothic" pitchFamily="34" charset="0"/>
+                <a:ea typeface="Yu Gothic" pitchFamily="34" charset="-122"/>
+                <a:cs typeface="Yu Gothic" pitchFamily="34" charset="-120"/>
+              </a:rPr>
+              <a:t>Price</a:t>
+            </a:r>
+            <a:endParaRPr lang="en-US" sz="1800" dirty="0"/>
+          </a:p>
+        </p:txBody>
+      </p:sp>
+      <p:sp>
+        <p:nvSpPr>
+          <p:cNvPr id="9" name="Text 7"/>
+          <p:cNvSpPr/>
+          <p:nvPr/>
+        </p:nvSpPr>
+        <p:spPr>
+          <a:xfrm>
+            <a:off x="6553048" y="2313432"/>
+            <a:ext cx="4815688" cy="1005840"/>
+          </a:xfrm>
+          <a:prstGeom prst="rect">
+            <a:avLst/>
+          </a:prstGeom>
+          <a:noFill/>
+          <a:ln/>
+        </p:spPr>
+        <p:txBody>
+          <a:bodyPr wrap="square" lIns="0" tIns="0" rIns="0" bIns="0" rtlCol="0" anchor="ctr"/>
+          <a:lstStyle/>
+          <a:p>
+            <a:pPr indent="0" marL="0">
+              <a:buNone/>
+            </a:pPr>
+            <a:r>
+              <a:rPr lang="en-US" sz="1350" dirty="0">
+                <a:solidFill>
+                  <a:srgbClr val="000000"/>
+                </a:solidFill>
+                <a:latin typeface="Yu Gothic" pitchFamily="34" charset="0"/>
+                <a:ea typeface="Yu Gothic" pitchFamily="34" charset="-122"/>
+                <a:cs typeface="Yu Gothic" pitchFamily="34" charset="-120"/>
+              </a:rPr>
+              <a:t>ドコモの既存通信アセットを活用するため、新規開発より低コストで提供可能</a:t>
+            </a:r>
+            <a:endParaRPr lang="en-US" sz="1350" dirty="0"/>
+          </a:p>
+        </p:txBody>
+      </p:sp>
+      <p:sp>
+        <p:nvSpPr>
+          <p:cNvPr id="10" name="Shape 8"/>
+          <p:cNvSpPr/>
+          <p:nvPr/>
+        </p:nvSpPr>
+        <p:spPr>
+          <a:xfrm>
+            <a:off x="548640" y="3749040"/>
+            <a:ext cx="5364328" cy="1783080"/>
+          </a:xfrm>
+          <a:prstGeom prst="roundRect">
+            <a:avLst>
+              <a:gd name="adj" fmla="val 4103"/>
+            </a:avLst>
+          </a:prstGeom>
+          <a:solidFill>
+            <a:srgbClr val="F2F2F2"/>
+          </a:solidFill>
+          <a:ln w="9525">
+            <a:solidFill>
+              <a:srgbClr val="D9D9D9"/>
+            </a:solidFill>
+            <a:prstDash val="solid"/>
+          </a:ln>
+          <a:effectLst>
+            <a:outerShdw sx="100000" sy="100000" kx="0" ky="0" algn="bl" rotWithShape="0" blurRad="76200" dist="25400" dir="5400000">
+              <a:srgbClr val="000000">
+                <a:alpha val="12000"/>
+              </a:srgbClr>
+            </a:outerShdw>
+          </a:effectLst>
+        </p:spPr>
+      </p:sp>
+      <p:sp>
+        <p:nvSpPr>
+          <p:cNvPr id="11" name="Text 9"/>
+          <p:cNvSpPr/>
+          <p:nvPr/>
+        </p:nvSpPr>
+        <p:spPr>
+          <a:xfrm>
+            <a:off x="822960" y="3913632"/>
+            <a:ext cx="4815688" cy="411480"/>
+          </a:xfrm>
+          <a:prstGeom prst="rect">
+            <a:avLst/>
+          </a:prstGeom>
+          <a:noFill/>
+          <a:ln/>
+        </p:spPr>
+        <p:txBody>
+          <a:bodyPr wrap="square" lIns="0" tIns="0" rIns="0" bIns="0" rtlCol="0" anchor="ctr"/>
+          <a:lstStyle/>
+          <a:p>
+            <a:pPr indent="0" marL="0">
+              <a:buNone/>
+            </a:pPr>
+            <a:r>
+              <a:rPr lang="en-US" sz="1800" b="1" dirty="0">
+                <a:solidFill>
+                  <a:srgbClr val="C00000"/>
+                </a:solidFill>
+                <a:latin typeface="Yu Gothic" pitchFamily="34" charset="0"/>
+                <a:ea typeface="Yu Gothic" pitchFamily="34" charset="-122"/>
+                <a:cs typeface="Yu Gothic" pitchFamily="34" charset="-120"/>
+              </a:rPr>
+              <a:t>Place</a:t>
+            </a:r>
+            <a:endParaRPr lang="en-US" sz="1800" dirty="0"/>
+          </a:p>
+        </p:txBody>
+      </p:sp>
+      <p:sp>
+        <p:nvSpPr>
+          <p:cNvPr id="12" name="Text 10"/>
+          <p:cNvSpPr/>
+          <p:nvPr/>
+        </p:nvSpPr>
+        <p:spPr>
+          <a:xfrm>
+            <a:off x="822960" y="4370832"/>
+            <a:ext cx="4815688" cy="1005840"/>
+          </a:xfrm>
+          <a:prstGeom prst="rect">
+            <a:avLst/>
+          </a:prstGeom>
+          <a:noFill/>
+          <a:ln/>
+        </p:spPr>
+        <p:txBody>
+          <a:bodyPr wrap="square" lIns="0" tIns="0" rIns="0" bIns="0" rtlCol="0" anchor="ctr"/>
+          <a:lstStyle/>
+          <a:p>
+            <a:pPr indent="0" marL="0">
+              <a:buNone/>
+            </a:pPr>
+            <a:r>
+              <a:rPr lang="en-US" sz="1350" dirty="0">
+                <a:solidFill>
+                  <a:srgbClr val="000000"/>
+                </a:solidFill>
+                <a:latin typeface="Yu Gothic" pitchFamily="34" charset="0"/>
+                <a:ea typeface="Yu Gothic" pitchFamily="34" charset="-122"/>
+                <a:cs typeface="Yu Gothic" pitchFamily="34" charset="-120"/>
+              </a:rPr>
+              <a:t>TXP Medicalが持つ病院・自治体との既存契約関係を、そのまま販売経路として活用</a:t>
+            </a:r>
+            <a:endParaRPr lang="en-US" sz="1350" dirty="0"/>
+          </a:p>
+        </p:txBody>
+      </p:sp>
+      <p:sp>
+        <p:nvSpPr>
+          <p:cNvPr id="13" name="Shape 11"/>
+          <p:cNvSpPr/>
+          <p:nvPr/>
+        </p:nvSpPr>
+        <p:spPr>
+          <a:xfrm>
+            <a:off x="6278728" y="3749040"/>
+            <a:ext cx="5364328" cy="1783080"/>
+          </a:xfrm>
+          <a:prstGeom prst="roundRect">
+            <a:avLst>
+              <a:gd name="adj" fmla="val 4103"/>
+            </a:avLst>
+          </a:prstGeom>
+          <a:solidFill>
+            <a:srgbClr val="F2F2F2"/>
+          </a:solidFill>
+          <a:ln w="9525">
+            <a:solidFill>
+              <a:srgbClr val="D9D9D9"/>
+            </a:solidFill>
+            <a:prstDash val="solid"/>
+          </a:ln>
+          <a:effectLst>
+            <a:outerShdw sx="100000" sy="100000" kx="0" ky="0" algn="bl" rotWithShape="0" blurRad="76200" dist="25400" dir="5400000">
+              <a:srgbClr val="000000">
+                <a:alpha val="12000"/>
+              </a:srgbClr>
+            </a:outerShdw>
+          </a:effectLst>
+        </p:spPr>
+      </p:sp>
+      <p:sp>
+        <p:nvSpPr>
+          <p:cNvPr id="14" name="Text 12"/>
+          <p:cNvSpPr/>
+          <p:nvPr/>
+        </p:nvSpPr>
+        <p:spPr>
+          <a:xfrm>
+            <a:off x="6553048" y="3913632"/>
+            <a:ext cx="4815688" cy="411480"/>
+          </a:xfrm>
+          <a:prstGeom prst="rect">
+            <a:avLst/>
+          </a:prstGeom>
+          <a:noFill/>
+          <a:ln/>
+        </p:spPr>
+        <p:txBody>
+          <a:bodyPr wrap="square" lIns="0" tIns="0" rIns="0" bIns="0" rtlCol="0" anchor="ctr"/>
+          <a:lstStyle/>
+          <a:p>
+            <a:pPr indent="0" marL="0">
+              <a:buNone/>
+            </a:pPr>
+            <a:r>
+              <a:rPr lang="en-US" sz="1800" b="1" dirty="0">
+                <a:solidFill>
+                  <a:srgbClr val="C00000"/>
+                </a:solidFill>
+                <a:latin typeface="Yu Gothic" pitchFamily="34" charset="0"/>
+                <a:ea typeface="Yu Gothic" pitchFamily="34" charset="-122"/>
+                <a:cs typeface="Yu Gothic" pitchFamily="34" charset="-120"/>
+              </a:rPr>
+              <a:t>Promotion</a:t>
+            </a:r>
+            <a:endParaRPr lang="en-US" sz="1800" dirty="0"/>
+          </a:p>
+        </p:txBody>
+      </p:sp>
+      <p:sp>
+        <p:nvSpPr>
+          <p:cNvPr id="15" name="Text 13"/>
+          <p:cNvSpPr/>
+          <p:nvPr/>
+        </p:nvSpPr>
+        <p:spPr>
+          <a:xfrm>
+            <a:off x="6553048" y="4370832"/>
+            <a:ext cx="4815688" cy="1005840"/>
+          </a:xfrm>
+          <a:prstGeom prst="rect">
+            <a:avLst/>
+          </a:prstGeom>
+          <a:noFill/>
+          <a:ln/>
+        </p:spPr>
+        <p:txBody>
+          <a:bodyPr wrap="square" lIns="0" tIns="0" rIns="0" bIns="0" rtlCol="0" anchor="ctr"/>
+          <a:lstStyle/>
+          <a:p>
+            <a:pPr indent="0" marL="0">
+              <a:buNone/>
+            </a:pPr>
+            <a:r>
+              <a:rPr lang="en-US" sz="1350" dirty="0">
+                <a:solidFill>
+                  <a:srgbClr val="000000"/>
+                </a:solidFill>
+                <a:latin typeface="Yu Gothic" pitchFamily="34" charset="0"/>
+                <a:ea typeface="Yu Gothic" pitchFamily="34" charset="-122"/>
+                <a:cs typeface="Yu Gothic" pitchFamily="34" charset="-120"/>
+              </a:rPr>
+              <a:t>ドコモの知名度 × TXP Medicalの導入実績（51自治体）を掛け合わせて訴求</a:t>
+            </a:r>
+            <a:endParaRPr lang="en-US" sz="1350" dirty="0"/>
+          </a:p>
+        </p:txBody>
+      </p:sp>
+      <p:sp>
+        <p:nvSpPr>
+          <p:cNvPr id="16" name="Text 14"/>
+          <p:cNvSpPr/>
+          <p:nvPr/>
+        </p:nvSpPr>
+        <p:spPr>
+          <a:xfrm>
+            <a:off x="548640" y="5897880"/>
+            <a:ext cx="10545775" cy="365760"/>
+          </a:xfrm>
+          <a:prstGeom prst="rect">
+            <a:avLst/>
+          </a:prstGeom>
+          <a:noFill/>
+          <a:ln/>
+        </p:spPr>
+        <p:txBody>
+          <a:bodyPr wrap="square" lIns="0" tIns="0" rIns="0" bIns="0" rtlCol="0" anchor="ctr"/>
+          <a:lstStyle/>
+          <a:p>
+            <a:pPr indent="0" marL="0">
+              <a:buNone/>
+            </a:pPr>
+            <a:r>
+              <a:rPr lang="en-US" sz="1200" i="1" dirty="0">
+                <a:solidFill>
+                  <a:srgbClr val="595959"/>
+                </a:solidFill>
+                <a:latin typeface="Yu Gothic" pitchFamily="34" charset="0"/>
+                <a:ea typeface="Yu Gothic" pitchFamily="34" charset="-122"/>
+                <a:cs typeface="Yu Gothic" pitchFamily="34" charset="-120"/>
+              </a:rPr>
+              <a:t>① Product ～ ④ Promotion のいずれも、TXP Medicalとの連携によって「ゼロからのスタート」ではなく「既存アセットの強化」として設計できる</a:t>
+            </a:r>
+            <a:endParaRPr lang="en-US" sz="1200" dirty="0"/>
+          </a:p>
+        </p:txBody>
+      </p:sp>
+      <p:sp>
+        <p:nvSpPr>
+          <p:cNvPr id="17" name="Text 15"/>
+          <p:cNvSpPr/>
+          <p:nvPr/>
+        </p:nvSpPr>
+        <p:spPr>
+          <a:xfrm>
+            <a:off x="11368735" y="6400800"/>
+            <a:ext cx="457200" cy="320040"/>
+          </a:xfrm>
+          <a:prstGeom prst="rect">
+            <a:avLst/>
+          </a:prstGeom>
+          <a:noFill/>
+          <a:ln/>
+        </p:spPr>
+        <p:txBody>
+          <a:bodyPr wrap="square" rtlCol="0" anchor="ctr"/>
+          <a:lstStyle/>
+          <a:p>
+            <a:pPr algn="r" indent="0" marL="0">
+              <a:buNone/>
+            </a:pPr>
+            <a:r>
+              <a:rPr lang="en-US" sz="1000" dirty="0">
+                <a:solidFill>
+                  <a:srgbClr val="595959"/>
+                </a:solidFill>
+                <a:latin typeface="Yu Gothic" pitchFamily="34" charset="0"/>
+                <a:ea typeface="Yu Gothic" pitchFamily="34" charset="-122"/>
+                <a:cs typeface="Yu Gothic" pitchFamily="34" charset="-120"/>
+              </a:rPr>
+              <a:t>16</a:t>
+            </a:r>
+            <a:endParaRPr lang="en-US" sz="1000" dirty="0"/>
+          </a:p>
+        </p:txBody>
+      </p:sp>
+    </p:spTree>
+  </p:cSld>
+  <p:clrMapOvr>
+    <a:masterClrMapping/>
+  </p:clrMapOvr>
+</p:sld>
+</file>
+
+<file path=ppt/slides/slide17.xml><?xml version="1.0" encoding="utf-8"?>
+<p:sld xmlns:a="http://schemas.openxmlformats.org/drawingml/2006/main" xmlns:r="http://schemas.openxmlformats.org/officeDocument/2006/relationships" xmlns:p="http://schemas.openxmlformats.org/presentationml/2006/main">
+  <p:cSld name="Slide 17">
+    <p:bg>
+      <p:bgPr>
+        <a:solidFill>
+          <a:srgbClr val="FFFFFF"/>
+        </a:solidFill>
+      </p:bgPr>
+    </p:bg>
+    <p:spTree>
+      <p:nvGrpSpPr>
+        <p:cNvPr id="1" name=""/>
+        <p:cNvGrpSpPr/>
+        <p:nvPr/>
+      </p:nvGrpSpPr>
+      <p:grpSpPr>
+        <a:xfrm>
+          <a:off x="0" y="0"/>
+          <a:ext cx="0" cy="0"/>
+          <a:chOff x="0" y="0"/>
+          <a:chExt cx="0" cy="0"/>
+        </a:xfrm>
+      </p:grpSpPr>
+      <p:sp>
+        <p:nvSpPr>
+          <p:cNvPr id="2" name="Text 0"/>
+          <p:cNvSpPr/>
+          <p:nvPr/>
+        </p:nvSpPr>
+        <p:spPr>
+          <a:xfrm>
+            <a:off x="548640" y="320040"/>
+            <a:ext cx="11094415" cy="320040"/>
+          </a:xfrm>
+          <a:prstGeom prst="rect">
+            <a:avLst/>
+          </a:prstGeom>
+          <a:noFill/>
+          <a:ln/>
+        </p:spPr>
+        <p:txBody>
+          <a:bodyPr wrap="square" rtlCol="0" anchor="ctr"/>
+          <a:lstStyle/>
+          <a:p>
+            <a:pPr indent="0" marL="0">
+              <a:buNone/>
+            </a:pPr>
+            <a:r>
+              <a:rPr lang="en-US" sz="1300" b="1" dirty="0">
+                <a:solidFill>
+                  <a:srgbClr val="C00000"/>
+                </a:solidFill>
+                <a:latin typeface="Yu Gothic" pitchFamily="34" charset="0"/>
+                <a:ea typeface="Yu Gothic" pitchFamily="34" charset="-122"/>
+                <a:cs typeface="Yu Gothic" pitchFamily="34" charset="-120"/>
+              </a:rPr>
+              <a:t>まとめ</a:t>
+            </a:r>
+            <a:endParaRPr lang="en-US" sz="1300" dirty="0"/>
+          </a:p>
+        </p:txBody>
+      </p:sp>
+      <p:sp>
+        <p:nvSpPr>
+          <p:cNvPr id="3" name="Text 1"/>
+          <p:cNvSpPr/>
+          <p:nvPr/>
+        </p:nvSpPr>
+        <p:spPr>
+          <a:xfrm>
+            <a:off x="548640" y="594360"/>
+            <a:ext cx="11094415" cy="685800"/>
+          </a:xfrm>
+          <a:prstGeom prst="rect">
+            <a:avLst/>
+          </a:prstGeom>
+          <a:noFill/>
+          <a:ln/>
+        </p:spPr>
+        <p:txBody>
+          <a:bodyPr wrap="square" rtlCol="0" anchor="ctr"/>
+          <a:lstStyle/>
+          <a:p>
+            <a:pPr indent="0" marL="0">
+              <a:buNone/>
+            </a:pPr>
+            <a:r>
+              <a:rPr lang="en-US" sz="2800" b="1" dirty="0">
+                <a:solidFill>
+                  <a:srgbClr val="000000"/>
+                </a:solidFill>
+                <a:latin typeface="Yu Gothic" pitchFamily="34" charset="0"/>
+                <a:ea typeface="Yu Gothic" pitchFamily="34" charset="-122"/>
+                <a:cs typeface="Yu Gothic" pitchFamily="34" charset="-120"/>
+              </a:rPr>
+              <a:t>残された機会とネクストアクション</a:t>
+            </a:r>
+            <a:endParaRPr lang="en-US" sz="2800" dirty="0"/>
+          </a:p>
+        </p:txBody>
+      </p:sp>
+      <p:sp>
+        <p:nvSpPr>
+          <p:cNvPr id="4" name="Shape 2"/>
+          <p:cNvSpPr/>
+          <p:nvPr/>
+        </p:nvSpPr>
+        <p:spPr>
+          <a:xfrm>
+            <a:off x="548640" y="1691640"/>
+            <a:ext cx="11094415" cy="1188720"/>
+          </a:xfrm>
+          <a:prstGeom prst="roundRect">
+            <a:avLst>
+              <a:gd name="adj" fmla="val 6154"/>
+            </a:avLst>
+          </a:prstGeom>
+          <a:solidFill>
+            <a:srgbClr val="F2F2F2"/>
+          </a:solidFill>
+          <a:ln w="9525">
+            <a:solidFill>
+              <a:srgbClr val="D9D9D9"/>
+            </a:solidFill>
+            <a:prstDash val="solid"/>
+          </a:ln>
+          <a:effectLst>
+            <a:outerShdw sx="100000" sy="100000" kx="0" ky="0" algn="bl" rotWithShape="0" blurRad="76200" dist="25400" dir="5400000">
+              <a:srgbClr val="000000">
+                <a:alpha val="12000"/>
+              </a:srgbClr>
+            </a:outerShdw>
+          </a:effectLst>
+        </p:spPr>
+      </p:sp>
+      <p:sp>
+        <p:nvSpPr>
+          <p:cNvPr id="5" name="Text 3"/>
+          <p:cNvSpPr/>
+          <p:nvPr/>
+        </p:nvSpPr>
+        <p:spPr>
+          <a:xfrm>
+            <a:off x="822960" y="1828800"/>
+            <a:ext cx="10545775" cy="320040"/>
+          </a:xfrm>
+          <a:prstGeom prst="rect">
+            <a:avLst/>
+          </a:prstGeom>
+          <a:noFill/>
+          <a:ln/>
+        </p:spPr>
+        <p:txBody>
+          <a:bodyPr wrap="square" lIns="0" tIns="0" rIns="0" bIns="0" rtlCol="0" anchor="ctr"/>
+          <a:lstStyle/>
+          <a:p>
+            <a:pPr indent="0" marL="0">
+              <a:buNone/>
+            </a:pPr>
+            <a:r>
+              <a:rPr lang="en-US" sz="1500" b="1" dirty="0">
+                <a:solidFill>
+                  <a:srgbClr val="000000"/>
+                </a:solidFill>
+                <a:latin typeface="Yu Gothic" pitchFamily="34" charset="0"/>
+                <a:ea typeface="Yu Gothic" pitchFamily="34" charset="-122"/>
+                <a:cs typeface="Yu Gothic" pitchFamily="34" charset="-120"/>
+              </a:rPr>
+              <a:t>残された機会</a:t>
+            </a:r>
+            <a:endParaRPr lang="en-US" sz="1500" dirty="0"/>
+          </a:p>
+        </p:txBody>
+      </p:sp>
+      <p:sp>
+        <p:nvSpPr>
+          <p:cNvPr id="6" name="Text 4"/>
+          <p:cNvSpPr/>
+          <p:nvPr/>
+        </p:nvSpPr>
+        <p:spPr>
+          <a:xfrm>
+            <a:off x="822960" y="2148840"/>
+            <a:ext cx="10545775" cy="640080"/>
+          </a:xfrm>
+          <a:prstGeom prst="rect">
+            <a:avLst/>
+          </a:prstGeom>
+          <a:noFill/>
+          <a:ln/>
+        </p:spPr>
+        <p:txBody>
+          <a:bodyPr wrap="square" lIns="0" tIns="0" rIns="0" bIns="0" rtlCol="0" anchor="ctr"/>
+          <a:lstStyle/>
+          <a:p>
+            <a:pPr indent="0" marL="0">
+              <a:buNone/>
+            </a:pPr>
+            <a:r>
+              <a:rPr lang="en-US" sz="1350" dirty="0">
+                <a:solidFill>
+                  <a:srgbClr val="000000"/>
+                </a:solidFill>
+                <a:latin typeface="Yu Gothic" pitchFamily="34" charset="0"/>
+                <a:ea typeface="Yu Gothic" pitchFamily="34" charset="-122"/>
+                <a:cs typeface="Yu Gothic" pitchFamily="34" charset="-120"/>
+              </a:rPr>
+              <a:t>転送理由の52.1%を占める「処置困難」に対し、AIによる病院選定精度の向上と5G高精細映像によって、搬送前に処置可否を確定させる仕組みは、まだ全国的には存在しない</a:t>
+            </a:r>
+            <a:endParaRPr lang="en-US" sz="1350" dirty="0"/>
+          </a:p>
+        </p:txBody>
+      </p:sp>
+      <p:sp>
+        <p:nvSpPr>
+          <p:cNvPr id="7" name="Text 5"/>
+          <p:cNvSpPr/>
+          <p:nvPr/>
+        </p:nvSpPr>
+        <p:spPr>
+          <a:xfrm>
+            <a:off x="548640" y="3063240"/>
+            <a:ext cx="11094415" cy="365760"/>
+          </a:xfrm>
+          <a:prstGeom prst="rect">
+            <a:avLst/>
+          </a:prstGeom>
+          <a:noFill/>
+          <a:ln/>
+        </p:spPr>
+        <p:txBody>
+          <a:bodyPr wrap="square" lIns="0" tIns="0" rIns="0" bIns="0" rtlCol="0" anchor="ctr"/>
+          <a:lstStyle/>
+          <a:p>
+            <a:pPr indent="0" marL="0">
+              <a:buNone/>
+            </a:pPr>
+            <a:r>
+              <a:rPr lang="en-US" sz="1600" b="1" dirty="0">
+                <a:solidFill>
+                  <a:srgbClr val="000000"/>
+                </a:solidFill>
+                <a:latin typeface="Yu Gothic" pitchFamily="34" charset="0"/>
+                <a:ea typeface="Yu Gothic" pitchFamily="34" charset="-122"/>
+                <a:cs typeface="Yu Gothic" pitchFamily="34" charset="-120"/>
+              </a:rPr>
+              <a:t>ネクストアクション</a:t>
+            </a:r>
+            <a:endParaRPr lang="en-US" sz="1600" dirty="0"/>
+          </a:p>
+        </p:txBody>
+      </p:sp>
+      <p:sp>
+        <p:nvSpPr>
+          <p:cNvPr id="8" name="Text 6"/>
+          <p:cNvSpPr/>
+          <p:nvPr/>
+        </p:nvSpPr>
+        <p:spPr>
+          <a:xfrm>
+            <a:off x="548640" y="3520440"/>
+            <a:ext cx="11094415" cy="2377440"/>
           </a:xfrm>
           <a:prstGeom prst="rect">
             <a:avLst/>
@@ -7266,13 +10222,13 @@
           <a:p>
             <a:pPr marL="342900" indent="-342900">
               <a:spcAft>
-                <a:spcPts val="1000"/>
+                <a:spcPts val="1600"/>
               </a:spcAft>
               <a:buSzPct val="100000"/>
               <a:buChar char="•"/>
             </a:pPr>
             <a:r>
-              <a:rPr lang="en-US" sz="1250" dirty="0">
+              <a:rPr lang="en-US" sz="1450" dirty="0">
                 <a:solidFill>
                   <a:srgbClr val="000000"/>
                 </a:solidFill>
@@ -7280,20 +10236,20 @@
                 <a:ea typeface="Yu Gothic" pitchFamily="34" charset="-122"/>
                 <a:cs typeface="Yu Gothic" pitchFamily="34" charset="-120"/>
               </a:rPr>
-              <a:t>総務省消防庁「令和7年版 消防白書」第2章第5節「救急体制」https://www.fdma.go.jp/publication/hakusho/r7/69377.html</a:t>
-            </a:r>
-            <a:endParaRPr lang="en-US" sz="1250" dirty="0"/>
+              <a:t>TXP Medical社との具体的な連携スキームを検討する（資本提携の対象範囲を、RWD事業からEMS領域へ拡張できるか）</a:t>
+            </a:r>
+            <a:endParaRPr lang="en-US" sz="1450" dirty="0"/>
           </a:p>
           <a:p>
             <a:pPr marL="342900" indent="-342900">
               <a:spcAft>
-                <a:spcPts val="1000"/>
+                <a:spcPts val="1600"/>
               </a:spcAft>
               <a:buSzPct val="100000"/>
               <a:buChar char="•"/>
             </a:pPr>
             <a:r>
-              <a:rPr lang="en-US" sz="1250" dirty="0">
+              <a:rPr lang="en-US" sz="1450" dirty="0">
                 <a:solidFill>
                   <a:srgbClr val="000000"/>
                 </a:solidFill>
@@ -7301,20 +10257,20 @@
                 <a:ea typeface="Yu Gothic" pitchFamily="34" charset="-122"/>
                 <a:cs typeface="Yu Gothic" pitchFamily="34" charset="-120"/>
               </a:rPr>
-              <a:t>総務省消防庁「令和7年版 消防白書」特集7「消防分野におけるDX・新技術の活用の推進」</a:t>
-            </a:r>
-            <a:endParaRPr lang="en-US" sz="1250" dirty="0"/>
+              <a:t>消防庁・厚生労働省の一次データへアクセスし、転送削減効果の精緻な試算を行う</a:t>
+            </a:r>
+            <a:endParaRPr lang="en-US" sz="1450" dirty="0"/>
           </a:p>
           <a:p>
             <a:pPr marL="342900" indent="-342900">
               <a:spcAft>
-                <a:spcPts val="1000"/>
+                <a:spcPts val="1600"/>
               </a:spcAft>
               <a:buSzPct val="100000"/>
               <a:buChar char="•"/>
             </a:pPr>
             <a:r>
-              <a:rPr lang="en-US" sz="1250" dirty="0">
+              <a:rPr lang="en-US" sz="1450" dirty="0">
                 <a:solidFill>
                   <a:srgbClr val="000000"/>
                 </a:solidFill>
@@ -7322,20 +10278,20 @@
                 <a:ea typeface="Yu Gothic" pitchFamily="34" charset="-122"/>
                 <a:cs typeface="Yu Gothic" pitchFamily="34" charset="-120"/>
               </a:rPr>
-              <a:t>総務省消防庁「令和5年版 救急・救助の現況」P56（救急自動車による転送件数）</a:t>
-            </a:r>
-            <a:endParaRPr lang="en-US" sz="1250" dirty="0"/>
+              <a:t>VSL（統計的生命価値）を用いた社会的便益の金額換算を精緻化する</a:t>
+            </a:r>
+            <a:endParaRPr lang="en-US" sz="1450" dirty="0"/>
           </a:p>
           <a:p>
             <a:pPr marL="342900" indent="-342900">
               <a:spcAft>
-                <a:spcPts val="1000"/>
+                <a:spcPts val="1600"/>
               </a:spcAft>
               <a:buSzPct val="100000"/>
               <a:buChar char="•"/>
             </a:pPr>
             <a:r>
-              <a:rPr lang="en-US" sz="1250" dirty="0">
+              <a:rPr lang="en-US" sz="1450" dirty="0">
                 <a:solidFill>
                   <a:srgbClr val="000000"/>
                 </a:solidFill>
@@ -7343,20 +10299,191 @@
                 <a:ea typeface="Yu Gothic" pitchFamily="34" charset="-122"/>
                 <a:cs typeface="Yu Gothic" pitchFamily="34" charset="-120"/>
               </a:rPr>
-              <a:t>総務省消防庁「救急搬送困難事案に係る状況調査について」</a:t>
-            </a:r>
-            <a:endParaRPr lang="en-US" sz="1250" dirty="0"/>
-          </a:p>
+              <a:t>PoC対象となる自治体・消防本部を選定する</a:t>
+            </a:r>
+            <a:endParaRPr lang="en-US" sz="1450" dirty="0"/>
+          </a:p>
+        </p:txBody>
+      </p:sp>
+      <p:sp>
+        <p:nvSpPr>
+          <p:cNvPr id="9" name="Text 7"/>
+          <p:cNvSpPr/>
+          <p:nvPr/>
+        </p:nvSpPr>
+        <p:spPr>
+          <a:xfrm>
+            <a:off x="11368735" y="6400800"/>
+            <a:ext cx="457200" cy="320040"/>
+          </a:xfrm>
+          <a:prstGeom prst="rect">
+            <a:avLst/>
+          </a:prstGeom>
+          <a:noFill/>
+          <a:ln/>
+        </p:spPr>
+        <p:txBody>
+          <a:bodyPr wrap="square" rtlCol="0" anchor="ctr"/>
+          <a:lstStyle/>
+          <a:p>
+            <a:pPr algn="r" indent="0" marL="0">
+              <a:buNone/>
+            </a:pPr>
+            <a:r>
+              <a:rPr lang="en-US" sz="1000" dirty="0">
+                <a:solidFill>
+                  <a:srgbClr val="595959"/>
+                </a:solidFill>
+                <a:latin typeface="Yu Gothic" pitchFamily="34" charset="0"/>
+                <a:ea typeface="Yu Gothic" pitchFamily="34" charset="-122"/>
+                <a:cs typeface="Yu Gothic" pitchFamily="34" charset="-120"/>
+              </a:rPr>
+              <a:t>17</a:t>
+            </a:r>
+            <a:endParaRPr lang="en-US" sz="1000" dirty="0"/>
+          </a:p>
+        </p:txBody>
+      </p:sp>
+    </p:spTree>
+  </p:cSld>
+  <p:clrMapOvr>
+    <a:masterClrMapping/>
+  </p:clrMapOvr>
+</p:sld>
+</file>
+
+<file path=ppt/slides/slide18.xml><?xml version="1.0" encoding="utf-8"?>
+<p:sld xmlns:a="http://schemas.openxmlformats.org/drawingml/2006/main" xmlns:r="http://schemas.openxmlformats.org/officeDocument/2006/relationships" xmlns:p="http://schemas.openxmlformats.org/presentationml/2006/main">
+  <p:cSld name="Slide 18">
+    <p:bg>
+      <p:bgPr>
+        <a:solidFill>
+          <a:srgbClr val="FFFFFF"/>
+        </a:solidFill>
+      </p:bgPr>
+    </p:bg>
+    <p:spTree>
+      <p:nvGrpSpPr>
+        <p:cNvPr id="1" name=""/>
+        <p:cNvGrpSpPr/>
+        <p:nvPr/>
+      </p:nvGrpSpPr>
+      <p:grpSpPr>
+        <a:xfrm>
+          <a:off x="0" y="0"/>
+          <a:ext cx="0" cy="0"/>
+          <a:chOff x="0" y="0"/>
+          <a:chExt cx="0" cy="0"/>
+        </a:xfrm>
+      </p:grpSpPr>
+      <p:sp>
+        <p:nvSpPr>
+          <p:cNvPr id="2" name="Text 0"/>
+          <p:cNvSpPr/>
+          <p:nvPr/>
+        </p:nvSpPr>
+        <p:spPr>
+          <a:xfrm>
+            <a:off x="548640" y="320040"/>
+            <a:ext cx="11094415" cy="320040"/>
+          </a:xfrm>
+          <a:prstGeom prst="rect">
+            <a:avLst/>
+          </a:prstGeom>
+          <a:noFill/>
+          <a:ln/>
+        </p:spPr>
+        <p:txBody>
+          <a:bodyPr wrap="square" rtlCol="0" anchor="ctr"/>
+          <a:lstStyle/>
+          <a:p>
+            <a:pPr indent="0" marL="0">
+              <a:buNone/>
+            </a:pPr>
+            <a:r>
+              <a:rPr lang="en-US" sz="1300" b="1" dirty="0">
+                <a:solidFill>
+                  <a:srgbClr val="C00000"/>
+                </a:solidFill>
+                <a:latin typeface="Yu Gothic" pitchFamily="34" charset="0"/>
+                <a:ea typeface="Yu Gothic" pitchFamily="34" charset="-122"/>
+                <a:cs typeface="Yu Gothic" pitchFamily="34" charset="-120"/>
+              </a:rPr>
+              <a:t>APPENDIX</a:t>
+            </a:r>
+            <a:endParaRPr lang="en-US" sz="1300" dirty="0"/>
+          </a:p>
+        </p:txBody>
+      </p:sp>
+      <p:sp>
+        <p:nvSpPr>
+          <p:cNvPr id="3" name="Text 1"/>
+          <p:cNvSpPr/>
+          <p:nvPr/>
+        </p:nvSpPr>
+        <p:spPr>
+          <a:xfrm>
+            <a:off x="548640" y="594360"/>
+            <a:ext cx="11094415" cy="685800"/>
+          </a:xfrm>
+          <a:prstGeom prst="rect">
+            <a:avLst/>
+          </a:prstGeom>
+          <a:noFill/>
+          <a:ln/>
+        </p:spPr>
+        <p:txBody>
+          <a:bodyPr wrap="square" rtlCol="0" anchor="ctr"/>
+          <a:lstStyle/>
+          <a:p>
+            <a:pPr indent="0" marL="0">
+              <a:buNone/>
+            </a:pPr>
+            <a:r>
+              <a:rPr lang="en-US" sz="2800" b="1" dirty="0">
+                <a:solidFill>
+                  <a:srgbClr val="000000"/>
+                </a:solidFill>
+                <a:latin typeface="Yu Gothic" pitchFamily="34" charset="0"/>
+                <a:ea typeface="Yu Gothic" pitchFamily="34" charset="-122"/>
+                <a:cs typeface="Yu Gothic" pitchFamily="34" charset="-120"/>
+              </a:rPr>
+              <a:t>出典一覧</a:t>
+            </a:r>
+            <a:endParaRPr lang="en-US" sz="2800" dirty="0"/>
+          </a:p>
+        </p:txBody>
+      </p:sp>
+      <p:sp>
+        <p:nvSpPr>
+          <p:cNvPr id="4" name="Text 2"/>
+          <p:cNvSpPr/>
+          <p:nvPr/>
+        </p:nvSpPr>
+        <p:spPr>
+          <a:xfrm>
+            <a:off x="548640" y="1737360"/>
+            <a:ext cx="11094415" cy="4572000"/>
+          </a:xfrm>
+          <a:prstGeom prst="rect">
+            <a:avLst/>
+          </a:prstGeom>
+          <a:noFill/>
+          <a:ln/>
+        </p:spPr>
+        <p:txBody>
+          <a:bodyPr wrap="square" lIns="0" tIns="0" rIns="0" bIns="0" rtlCol="0" anchor="t"/>
+          <a:lstStyle/>
           <a:p>
             <a:pPr marL="342900" indent="-342900">
               <a:spcAft>
-                <a:spcPts val="1000"/>
+                <a:spcPts val="800"/>
               </a:spcAft>
               <a:buSzPct val="100000"/>
               <a:buChar char="•"/>
             </a:pPr>
             <a:r>
-              <a:rPr lang="en-US" sz="1250" dirty="0">
+              <a:rPr lang="en-US" sz="1150" dirty="0">
                 <a:solidFill>
                   <a:srgbClr val="000000"/>
                 </a:solidFill>
@@ -7364,20 +10491,20 @@
                 <a:ea typeface="Yu Gothic" pitchFamily="34" charset="-122"/>
                 <a:cs typeface="Yu Gothic" pitchFamily="34" charset="-120"/>
               </a:rPr>
-              <a:t>厚生労働省 医政局地域医療計画課「救急医療情報連携プラットフォームについて」</a:t>
-            </a:r>
-            <a:endParaRPr lang="en-US" sz="1250" dirty="0"/>
+              <a:t>総務省消防庁「令和7年版 消防白書」第2章第5節「救急体制」https://www.fdma.go.jp/publication/hakusho/r7/69377.html</a:t>
+            </a:r>
+            <a:endParaRPr lang="en-US" sz="1150" dirty="0"/>
           </a:p>
           <a:p>
             <a:pPr marL="342900" indent="-342900">
               <a:spcAft>
-                <a:spcPts val="1000"/>
+                <a:spcPts val="800"/>
               </a:spcAft>
               <a:buSzPct val="100000"/>
               <a:buChar char="•"/>
             </a:pPr>
             <a:r>
-              <a:rPr lang="en-US" sz="1250" dirty="0">
+              <a:rPr lang="en-US" sz="1150" dirty="0">
                 <a:solidFill>
                   <a:srgbClr val="000000"/>
                 </a:solidFill>
@@ -7385,20 +10512,20 @@
                 <a:ea typeface="Yu Gothic" pitchFamily="34" charset="-122"/>
                 <a:cs typeface="Yu Gothic" pitchFamily="34" charset="-120"/>
               </a:rPr>
-              <a:t>TXP Medical株式会社 プレスリリース各種（NSER mobile導入実績・仙台市/神戸市本格稼働）</a:t>
-            </a:r>
-            <a:endParaRPr lang="en-US" sz="1250" dirty="0"/>
+              <a:t>総務省消防庁「令和7年版 消防白書」特集7「消防分野におけるDX・新技術の活用の推進」</a:t>
+            </a:r>
+            <a:endParaRPr lang="en-US" sz="1150" dirty="0"/>
           </a:p>
           <a:p>
             <a:pPr marL="342900" indent="-342900">
               <a:spcAft>
-                <a:spcPts val="1000"/>
+                <a:spcPts val="800"/>
               </a:spcAft>
               <a:buSzPct val="100000"/>
               <a:buChar char="•"/>
             </a:pPr>
             <a:r>
-              <a:rPr lang="en-US" sz="1250" dirty="0">
+              <a:rPr lang="en-US" sz="1150" dirty="0">
                 <a:solidFill>
                   <a:srgbClr val="000000"/>
                 </a:solidFill>
@@ -7406,20 +10533,20 @@
                 <a:ea typeface="Yu Gothic" pitchFamily="34" charset="-122"/>
                 <a:cs typeface="Yu Gothic" pitchFamily="34" charset="-120"/>
               </a:rPr>
-              <a:t>NTTコミュニケーションズ「NTT ComとTXP Medicalの資本業務提携について」（2024年10月23日）</a:t>
-            </a:r>
-            <a:endParaRPr lang="en-US" sz="1250" dirty="0"/>
+              <a:t>総務省消防庁「令和5年版 救急・救助の現況」P56（救急自動車による転送件数）</a:t>
+            </a:r>
+            <a:endParaRPr lang="en-US" sz="1150" dirty="0"/>
           </a:p>
           <a:p>
             <a:pPr marL="342900" indent="-342900">
               <a:spcAft>
-                <a:spcPts val="1000"/>
+                <a:spcPts val="800"/>
               </a:spcAft>
               <a:buSzPct val="100000"/>
               <a:buChar char="•"/>
             </a:pPr>
             <a:r>
-              <a:rPr lang="en-US" sz="1250" dirty="0">
+              <a:rPr lang="en-US" sz="1150" dirty="0">
                 <a:solidFill>
                   <a:srgbClr val="000000"/>
                 </a:solidFill>
@@ -7427,20 +10554,20 @@
                 <a:ea typeface="Yu Gothic" pitchFamily="34" charset="-122"/>
                 <a:cs typeface="Yu Gothic" pitchFamily="34" charset="-120"/>
               </a:rPr>
-              <a:t>NTTニュースリリース「1to1マーケティングを加速するAI技術『大規模行動モデル(LAM)』を確立」（2025年11月12日）</a:t>
-            </a:r>
-            <a:endParaRPr lang="en-US" sz="1250" dirty="0"/>
+              <a:t>総務省消防庁「救急搬送困難事案に係る状況調査について」</a:t>
+            </a:r>
+            <a:endParaRPr lang="en-US" sz="1150" dirty="0"/>
           </a:p>
           <a:p>
             <a:pPr marL="342900" indent="-342900">
               <a:spcAft>
-                <a:spcPts val="1000"/>
+                <a:spcPts val="800"/>
               </a:spcAft>
               <a:buSzPct val="100000"/>
               <a:buChar char="•"/>
             </a:pPr>
             <a:r>
-              <a:rPr lang="en-US" sz="1250" dirty="0">
+              <a:rPr lang="en-US" sz="1150" dirty="0">
                 <a:solidFill>
                   <a:srgbClr val="000000"/>
                 </a:solidFill>
@@ -7448,9 +10575,177 @@
                 <a:ea typeface="Yu Gothic" pitchFamily="34" charset="-122"/>
                 <a:cs typeface="Yu Gothic" pitchFamily="34" charset="-120"/>
               </a:rPr>
+              <a:t>厚生労働省 医政局地域医療計画課「救急医療情報連携プラットフォームについて」</a:t>
+            </a:r>
+            <a:endParaRPr lang="en-US" sz="1150" dirty="0"/>
+          </a:p>
+          <a:p>
+            <a:pPr marL="342900" indent="-342900">
+              <a:spcAft>
+                <a:spcPts val="800"/>
+              </a:spcAft>
+              <a:buSzPct val="100000"/>
+              <a:buChar char="•"/>
+            </a:pPr>
+            <a:r>
+              <a:rPr lang="en-US" sz="1150" dirty="0">
+                <a:solidFill>
+                  <a:srgbClr val="000000"/>
+                </a:solidFill>
+                <a:latin typeface="Yu Gothic" pitchFamily="34" charset="0"/>
+                <a:ea typeface="Yu Gothic" pitchFamily="34" charset="-122"/>
+                <a:cs typeface="Yu Gothic" pitchFamily="34" charset="-120"/>
+              </a:rPr>
+              <a:t>TXP Medical株式会社 プレスリリース各種（NSER mobile導入実績・仙台市/神戸市本格稼働）</a:t>
+            </a:r>
+            <a:endParaRPr lang="en-US" sz="1150" dirty="0"/>
+          </a:p>
+          <a:p>
+            <a:pPr marL="342900" indent="-342900">
+              <a:spcAft>
+                <a:spcPts val="800"/>
+              </a:spcAft>
+              <a:buSzPct val="100000"/>
+              <a:buChar char="•"/>
+            </a:pPr>
+            <a:r>
+              <a:rPr lang="en-US" sz="1150" dirty="0">
+                <a:solidFill>
+                  <a:srgbClr val="000000"/>
+                </a:solidFill>
+                <a:latin typeface="Yu Gothic" pitchFamily="34" charset="0"/>
+                <a:ea typeface="Yu Gothic" pitchFamily="34" charset="-122"/>
+                <a:cs typeface="Yu Gothic" pitchFamily="34" charset="-120"/>
+              </a:rPr>
+              <a:t>NTTコミュニケーションズ「NTT ComとTXP Medicalの資本業務提携について」（2024年10月23日）</a:t>
+            </a:r>
+            <a:endParaRPr lang="en-US" sz="1150" dirty="0"/>
+          </a:p>
+          <a:p>
+            <a:pPr marL="342900" indent="-342900">
+              <a:spcAft>
+                <a:spcPts val="800"/>
+              </a:spcAft>
+              <a:buSzPct val="100000"/>
+              <a:buChar char="•"/>
+            </a:pPr>
+            <a:r>
+              <a:rPr lang="en-US" sz="1150" dirty="0">
+                <a:solidFill>
+                  <a:srgbClr val="000000"/>
+                </a:solidFill>
+                <a:latin typeface="Yu Gothic" pitchFamily="34" charset="0"/>
+                <a:ea typeface="Yu Gothic" pitchFamily="34" charset="-122"/>
+                <a:cs typeface="Yu Gothic" pitchFamily="34" charset="-120"/>
+              </a:rPr>
+              <a:t>NTTニュースリリース「1to1マーケティングを加速するAI技術『大規模行動モデル(LAM)』を確立」（2025年11月12日）</a:t>
+            </a:r>
+            <a:endParaRPr lang="en-US" sz="1150" dirty="0"/>
+          </a:p>
+          <a:p>
+            <a:pPr marL="342900" indent="-342900">
+              <a:spcAft>
+                <a:spcPts val="800"/>
+              </a:spcAft>
+              <a:buSzPct val="100000"/>
+              <a:buChar char="•"/>
+            </a:pPr>
+            <a:r>
+              <a:rPr lang="en-US" sz="1150" dirty="0">
+                <a:solidFill>
+                  <a:srgbClr val="000000"/>
+                </a:solidFill>
+                <a:latin typeface="Yu Gothic" pitchFamily="34" charset="0"/>
+                <a:ea typeface="Yu Gothic" pitchFamily="34" charset="-122"/>
+                <a:cs typeface="Yu Gothic" pitchFamily="34" charset="-120"/>
+              </a:rPr>
               <a:t>内閣府 統計的生命価値（VSL）推計、国土交通省 公共事業評価における採用値</a:t>
             </a:r>
-            <a:endParaRPr lang="en-US" sz="1250" dirty="0"/>
+            <a:endParaRPr lang="en-US" sz="1150" dirty="0"/>
+          </a:p>
+          <a:p>
+            <a:pPr marL="342900" indent="-342900">
+              <a:spcAft>
+                <a:spcPts val="800"/>
+              </a:spcAft>
+              <a:buSzPct val="100000"/>
+              <a:buChar char="•"/>
+            </a:pPr>
+            <a:r>
+              <a:rPr lang="en-US" sz="1150" dirty="0">
+                <a:solidFill>
+                  <a:srgbClr val="000000"/>
+                </a:solidFill>
+                <a:latin typeface="Yu Gothic" pitchFamily="34" charset="0"/>
+                <a:ea typeface="Yu Gothic" pitchFamily="34" charset="-122"/>
+                <a:cs typeface="Yu Gothic" pitchFamily="34" charset="-120"/>
+              </a:rPr>
+              <a:t>NTTドコモ「ドコモとUbie、資本業務提携契約を締結」（2025年3月27日）</a:t>
+            </a:r>
+            <a:endParaRPr lang="en-US" sz="1150" dirty="0"/>
+          </a:p>
+          <a:p>
+            <a:pPr marL="342900" indent="-342900">
+              <a:spcAft>
+                <a:spcPts val="800"/>
+              </a:spcAft>
+              <a:buSzPct val="100000"/>
+              <a:buChar char="•"/>
+            </a:pPr>
+            <a:r>
+              <a:rPr lang="en-US" sz="1150" dirty="0">
+                <a:solidFill>
+                  <a:srgbClr val="000000"/>
+                </a:solidFill>
+                <a:latin typeface="Yu Gothic" pitchFamily="34" charset="0"/>
+                <a:ea typeface="Yu Gothic" pitchFamily="34" charset="-122"/>
+                <a:cs typeface="Yu Gothic" pitchFamily="34" charset="-120"/>
+              </a:rPr>
+              <a:t>NTT／NTTドコモ「日本電信電話株式会社とSBIホールディングス株式会社の資本業務提携契約の締結に関するお知らせ」、住信SBIネット銀行TOB関連リリース（2025年）</a:t>
+            </a:r>
+            <a:endParaRPr lang="en-US" sz="1150" dirty="0"/>
+          </a:p>
+          <a:p>
+            <a:pPr marL="342900" indent="-342900">
+              <a:spcAft>
+                <a:spcPts val="800"/>
+              </a:spcAft>
+              <a:buSzPct val="100000"/>
+              <a:buChar char="•"/>
+            </a:pPr>
+            <a:r>
+              <a:rPr lang="en-US" sz="1150" dirty="0">
+                <a:solidFill>
+                  <a:srgbClr val="000000"/>
+                </a:solidFill>
+                <a:latin typeface="Yu Gothic" pitchFamily="34" charset="0"/>
+                <a:ea typeface="Yu Gothic" pitchFamily="34" charset="-122"/>
+                <a:cs typeface="Yu Gothic" pitchFamily="34" charset="-120"/>
+              </a:rPr>
+              <a:t>モリタホールディングス株式会社「消防車輌事業」事業紹介、日立・NEC 消防指令システム関連資料</a:t>
+            </a:r>
+            <a:endParaRPr lang="en-US" sz="1150" dirty="0"/>
+          </a:p>
+          <a:p>
+            <a:pPr marL="342900" indent="-342900">
+              <a:spcAft>
+                <a:spcPts val="800"/>
+              </a:spcAft>
+              <a:buSzPct val="100000"/>
+              <a:buChar char="•"/>
+            </a:pPr>
+            <a:r>
+              <a:rPr lang="en-US" sz="1150" dirty="0">
+                <a:solidFill>
+                  <a:srgbClr val="000000"/>
+                </a:solidFill>
+                <a:latin typeface="Yu Gothic" pitchFamily="34" charset="0"/>
+                <a:ea typeface="Yu Gothic" pitchFamily="34" charset="-122"/>
+                <a:cs typeface="Yu Gothic" pitchFamily="34" charset="-120"/>
+              </a:rPr>
+              <a:t>電子カルテ市場シェア報道（富士通34.5%、NEC・SCSK「MegaOak」陣営約20%）、日本赤十字社 施設情報</a:t>
+            </a:r>
+            <a:endParaRPr lang="en-US" sz="1150" dirty="0"/>
           </a:p>
         </p:txBody>
       </p:sp>
@@ -7487,7 +10782,7 @@
                 <a:ea typeface="Yu Gothic" pitchFamily="34" charset="-122"/>
                 <a:cs typeface="Yu Gothic" pitchFamily="34" charset="-120"/>
               </a:rPr>
-              <a:t>16</a:t>
+              <a:t>18</a:t>
             </a:r>
             <a:endParaRPr lang="en-US" sz="1000" dirty="0"/>
           </a:p>
@@ -8554,7 +11849,7 @@
                 <a:ea typeface="Yu Gothic" pitchFamily="34" charset="-122"/>
                 <a:cs typeface="Yu Gothic" pitchFamily="34" charset="-120"/>
               </a:rPr>
-              <a:t>競合分析・マーケティングプラン</a:t>
+              <a:t>競合分析・アライアンス候補・マーケティングプラン</a:t>
             </a:r>
             <a:endParaRPr lang="en-US" sz="1300" dirty="0"/>
           </a:p>
